--- a/PTM_results/disease_gene_tests/als_talk_figures/methylarginine_ALS_talk.pptx
+++ b/PTM_results/disease_gene_tests/als_talk_figures/methylarginine_ALS_talk.pptx
@@ -11,9 +11,11 @@
     <p:sldId id="259" r:id="rId5"/>
     <p:sldId id="260" r:id="rId6"/>
     <p:sldId id="261" r:id="rId7"/>
+    <p:sldId id="262" r:id="rId8"/>
+    <p:sldId id="263" r:id="rId9"/>
   </p:sldIdLst>
   <p:notesMasterIdLst>
-    <p:notesMasterId r:id="rId8"/>
+    <p:notesMasterId r:id="rId10"/>
   </p:notesMasterIdLst>
   <p:sldSz cx="12192000" cy="6858000"/>
   <p:notesSz cx="6858000" cy="12192000"/>
@@ -112,22 +114,24 @@
   <p:extLst>
     <p:ext uri="{521415D9-36F7-43E2-AB2F-B90AF26B5E84}">
       <p14:sectionLst xmlns:p14="http://schemas.microsoft.com/office/powerpoint/2010/main">
-        <p14:section name="Title" id="{b1836e94-6e87-1a1d-f780-e4e93795567f}">
+        <p14:section name="Title" id="{718ef635-1ddf-a5d2-e364-266f20c757d7}">
           <p14:sldIdLst>
             <p14:sldId id="256"/>
           </p14:sldIdLst>
         </p14:section>
-        <p14:section name="ALS enrichment" id="{4dc00b6d-36f7-aa4a-1a08-c90cd0e90c73}">
+        <p14:section name="ALS enrichment" id="{e01d8638-1197-4e73-a561-c3e2680e06ad}">
           <p14:sldIdLst>
             <p14:sldId id="257"/>
             <p14:sldId id="258"/>
             <p14:sldId id="259"/>
             <p14:sldId id="260"/>
+            <p14:sldId id="261"/>
+            <p14:sldId id="262"/>
           </p14:sldIdLst>
         </p14:section>
-        <p14:section name="Backup" id="{610e447a-5c50-055c-c045-c2998ca8c5c9}">
+        <p14:section name="Backup" id="{6a2f6171-ffa5-66a0-7989-2e5a3a296d24}">
           <p14:sldIdLst>
-            <p14:sldId id="261"/>
+            <p14:sldId id="263"/>
           </p14:sldIdLst>
         </p14:section>
       </p14:sectionLst>
@@ -1831,6 +1835,346 @@
     <c:plotArea>
       <c:layout/>
       <c:barChart>
+        <c:barDir val="col"/>
+        <c:grouping val="clustered"/>
+        <c:varyColors val="0"/>
+        <c:ser>
+          <c:idx val="0"/>
+          <c:order val="0"/>
+          <c:tx>
+            <c:strRef>
+              <c:f>Sheet1!$B$1</c:f>
+              <c:strCache>
+                <c:ptCount val="1"/>
+                <c:pt idx="0">
+                  <c:v>In any condensate</c:v>
+                </c:pt>
+              </c:strCache>
+            </c:strRef>
+          </c:tx>
+          <c:spPr>
+            <a:solidFill>
+              <a:srgbClr val="C9CED8"/>
+            </a:solidFill>
+            <a:effectLst/>
+          </c:spPr>
+          <c:invertIfNegative val="0"/>
+          <c:dLbls>
+            <c:numFmt formatCode="0&quot;%&quot;" sourceLinked="0"/>
+            <c:txPr>
+              <a:bodyPr/>
+              <a:lstStyle/>
+              <a:p>
+                <a:pPr>
+                  <a:defRPr b="1" i="0" strike="noStrike" sz="1600" u="none">
+                    <a:solidFill>
+                      <a:srgbClr val="1F2937"/>
+                    </a:solidFill>
+                    <a:latin typeface="+mn-lt"/>
+                  </a:defRPr>
+                </a:pPr>
+              </a:p>
+            </c:txPr>
+            <c:showLegendKey val="0"/>
+            <c:showVal val="1"/>
+            <c:showCatName val="0"/>
+            <c:showSerName val="0"/>
+            <c:showPercent val="0"/>
+            <c:showBubbleSize val="0"/>
+            <c:showLeaderLines val="0"/>
+          </c:dLbls>
+          <c:cat>
+            <c:multiLvlStrRef>
+              <c:f>Sheet1!$A$2:$A$4</c:f>
+              <c:multiLvlStrCache>
+                <c:ptCount val="3"/>
+                <c:lvl>
+                  <c:pt idx="0">
+                    <c:v>Methylated ALS-causing proteins
+(n = 21)</c:v>
+                  </c:pt>
+                  <c:pt idx="1">
+                    <c:v>All methylated proteins
+(n = 4,687)</c:v>
+                  </c:pt>
+                  <c:pt idx="2">
+                    <c:v>All human proteins
+(n = 19,113)</c:v>
+                  </c:pt>
+                </c:lvl>
+              </c:multiLvlStrCache>
+            </c:multiLvlStrRef>
+          </c:cat>
+          <c:val>
+            <c:numRef>
+              <c:f>Sheet1!$B$2:$B$4</c:f>
+              <c:numCache>
+                <c:formatCode>General</c:formatCode>
+                <c:ptCount val="3"/>
+                <c:pt idx="0">
+                  <c:v>81</c:v>
+                </c:pt>
+                <c:pt idx="1">
+                  <c:v>44.9</c:v>
+                </c:pt>
+                <c:pt idx="2">
+                  <c:v>20.9</c:v>
+                </c:pt>
+              </c:numCache>
+            </c:numRef>
+          </c:val>
+        </c:ser>
+        <c:ser>
+          <c:idx val="1"/>
+          <c:order val="1"/>
+          <c:tx>
+            <c:strRef>
+              <c:f>Sheet1!$C$1</c:f>
+              <c:strCache>
+                <c:ptCount val="1"/>
+                <c:pt idx="0">
+                  <c:v>In stress granules</c:v>
+                </c:pt>
+              </c:strCache>
+            </c:strRef>
+          </c:tx>
+          <c:spPr>
+            <a:solidFill>
+              <a:srgbClr val="B5332A"/>
+            </a:solidFill>
+            <a:effectLst/>
+          </c:spPr>
+          <c:invertIfNegative val="0"/>
+          <c:dLbls>
+            <c:numFmt formatCode="0&quot;%&quot;" sourceLinked="0"/>
+            <c:txPr>
+              <a:bodyPr/>
+              <a:lstStyle/>
+              <a:p>
+                <a:pPr>
+                  <a:defRPr b="1" i="0" strike="noStrike" sz="1600" u="none">
+                    <a:solidFill>
+                      <a:srgbClr val="1F2937"/>
+                    </a:solidFill>
+                    <a:latin typeface="+mn-lt"/>
+                  </a:defRPr>
+                </a:pPr>
+              </a:p>
+            </c:txPr>
+            <c:showLegendKey val="0"/>
+            <c:showVal val="1"/>
+            <c:showCatName val="0"/>
+            <c:showSerName val="0"/>
+            <c:showPercent val="0"/>
+            <c:showBubbleSize val="0"/>
+            <c:showLeaderLines val="0"/>
+          </c:dLbls>
+          <c:cat>
+            <c:multiLvlStrRef>
+              <c:f>Sheet1!$A$2:$A$4</c:f>
+              <c:multiLvlStrCache>
+                <c:ptCount val="3"/>
+                <c:lvl>
+                  <c:pt idx="0">
+                    <c:v>Methylated ALS-causing proteins
+(n = 21)</c:v>
+                  </c:pt>
+                  <c:pt idx="1">
+                    <c:v>All methylated proteins
+(n = 4,687)</c:v>
+                  </c:pt>
+                  <c:pt idx="2">
+                    <c:v>All human proteins
+(n = 19,113)</c:v>
+                  </c:pt>
+                </c:lvl>
+              </c:multiLvlStrCache>
+            </c:multiLvlStrRef>
+          </c:cat>
+          <c:val>
+            <c:numRef>
+              <c:f>Sheet1!$C$2:$C$4</c:f>
+              <c:numCache>
+                <c:formatCode>General</c:formatCode>
+                <c:ptCount val="3"/>
+                <c:pt idx="0">
+                  <c:v>57.1</c:v>
+                </c:pt>
+                <c:pt idx="1">
+                  <c:v>16.7</c:v>
+                </c:pt>
+                <c:pt idx="2">
+                  <c:v>5.9</c:v>
+                </c:pt>
+              </c:numCache>
+            </c:numRef>
+          </c:val>
+        </c:ser>
+        <c:dLbls>
+          <c:numFmt formatCode="0&quot;%&quot;" sourceLinked="0"/>
+          <c:txPr>
+            <a:bodyPr/>
+            <a:lstStyle/>
+            <a:p>
+              <a:pPr>
+                <a:defRPr b="1" i="0" strike="noStrike" sz="1600" u="none">
+                  <a:solidFill>
+                    <a:srgbClr val="1F2937"/>
+                  </a:solidFill>
+                  <a:latin typeface="+mn-lt"/>
+                </a:defRPr>
+              </a:pPr>
+            </a:p>
+          </c:txPr>
+          <c:showLegendKey val="0"/>
+          <c:showVal val="1"/>
+          <c:showCatName val="0"/>
+          <c:showSerName val="0"/>
+          <c:showPercent val="0"/>
+          <c:showBubbleSize val="0"/>
+          <c:showLeaderLines val="0"/>
+        </c:dLbls>
+        <c:gapWidth val="60"/>
+        <c:overlap val="-10"/>
+        <c:axId val="2094734554"/>
+        <c:axId val="2094734552"/>
+        <c:axId val="2094734556"/>
+      </c:barChart>
+      <c:catAx>
+        <c:axId val="2094734554"/>
+        <c:scaling>
+          <c:orientation val="minMax"/>
+        </c:scaling>
+        <c:delete val="0"/>
+        <c:axPos val="b"/>
+        <c:numFmt formatCode="General" sourceLinked="1"/>
+        <c:majorTickMark val="none"/>
+        <c:minorTickMark val="none"/>
+        <c:tickLblPos val="low"/>
+        <c:spPr>
+          <a:ln w="12700" cap="flat">
+            <a:solidFill>
+              <a:srgbClr val="888888"/>
+            </a:solidFill>
+            <a:prstDash val="solid"/>
+            <a:round/>
+          </a:ln>
+        </c:spPr>
+        <c:txPr>
+          <a:bodyPr/>
+          <a:lstStyle/>
+          <a:p>
+            <a:pPr>
+              <a:defRPr sz="1300" b="0" i="0" u="none" strike="noStrike">
+                <a:solidFill>
+                  <a:srgbClr val="1F2937"/>
+                </a:solidFill>
+                <a:latin typeface="+mn-lt"/>
+              </a:defRPr>
+            </a:pPr>
+            <a:endParaRPr lang="en-US"/>
+          </a:p>
+        </c:txPr>
+        <c:crossAx val="2094734552"/>
+        <c:crosses val="autoZero"/>
+        <c:auto val="1"/>
+        <c:lblAlgn val="ctr"/>
+        <c:noMultiLvlLbl val="1"/>
+      </c:catAx>
+      <c:valAx>
+        <c:axId val="2094734552"/>
+        <c:scaling>
+          <c:orientation val="minMax"/>
+          <c:max val="100"/>
+          <c:min val="0"/>
+        </c:scaling>
+        <c:delete val="1"/>
+        <c:axPos val="l"/>
+        <c:numFmt formatCode="General" sourceLinked="0"/>
+        <c:majorTickMark val="out"/>
+        <c:minorTickMark val="none"/>
+        <c:tickLblPos val="nextTo"/>
+        <c:spPr>
+          <a:ln w="12700" cap="flat">
+            <a:solidFill>
+              <a:srgbClr val="888888"/>
+            </a:solidFill>
+            <a:prstDash val="solid"/>
+            <a:round/>
+          </a:ln>
+        </c:spPr>
+        <c:txPr>
+          <a:bodyPr/>
+          <a:lstStyle/>
+          <a:p>
+            <a:pPr>
+              <a:defRPr sz="1200" b="0" i="0" u="none" strike="noStrike">
+                <a:solidFill>
+                  <a:srgbClr val="000000"/>
+                </a:solidFill>
+                <a:latin typeface="Arial"/>
+              </a:defRPr>
+            </a:pPr>
+            <a:endParaRPr lang="en-US"/>
+          </a:p>
+        </c:txPr>
+        <c:crossAx val="2094734554"/>
+        <c:crosses val="autoZero"/>
+        <c:crossBetween val="between"/>
+      </c:valAx>
+      <c:spPr>
+        <a:noFill/>
+        <a:ln>
+          <a:noFill/>
+        </a:ln>
+        <a:effectLst/>
+      </c:spPr>
+    </c:plotArea>
+    <c:legend>
+      <c:legendPos val="t"/>
+      <c:overlay val="0"/>
+      <c:txPr>
+        <a:bodyPr/>
+        <a:lstStyle/>
+        <a:p>
+          <a:pPr>
+            <a:defRPr sz="1300">
+              <a:solidFill>
+                <a:srgbClr val="1F2937"/>
+              </a:solidFill>
+              <a:latin typeface="+mn-lt"/>
+              <a:cs typeface="+mn-lt"/>
+            </a:defRPr>
+          </a:pPr>
+          <a:endParaRPr lang="en-US"/>
+        </a:p>
+      </c:txPr>
+    </c:legend>
+    <c:plotVisOnly val="1"/>
+    <c:dispBlanksAs val="span"/>
+  </c:chart>
+  <c:spPr>
+    <a:noFill/>
+    <a:ln>
+      <a:noFill/>
+    </a:ln>
+    <a:effectLst/>
+  </c:spPr>
+  <c:externalData r:id="rId1">
+    <c:autoUpdate val="0"/>
+  </c:externalData>
+</c:chartSpace>
+</file>
+
+<file path=ppt/charts/chart5.xml><?xml version="1.0" encoding="utf-8"?>
+<c:chartSpace xmlns:c="http://schemas.openxmlformats.org/drawingml/2006/chart" xmlns:a="http://schemas.openxmlformats.org/drawingml/2006/main" xmlns:r="http://schemas.openxmlformats.org/officeDocument/2006/relationships">
+  <c:date1904 val="0"/>
+  <c:roundedCorners val="1"/>
+  <c:chart>
+    <c:autoTitleDeleted val="1"/>
+    <c:plotArea>
+      <c:layout/>
+      <c:barChart>
         <c:barDir val="bar"/>
         <c:grouping val="clustered"/>
         <c:varyColors val="0"/>
@@ -2257,7 +2601,7 @@
 </c:chartSpace>
 </file>
 
-<file path=ppt/charts/chart5.xml><?xml version="1.0" encoding="utf-8"?>
+<file path=ppt/charts/chart6.xml><?xml version="1.0" encoding="utf-8"?>
 <c:chartSpace xmlns:c="http://schemas.openxmlformats.org/drawingml/2006/chart" xmlns:a="http://schemas.openxmlformats.org/drawingml/2006/main" xmlns:r="http://schemas.openxmlformats.org/officeDocument/2006/relationships">
   <c:date1904 val="0"/>
   <c:roundedCorners val="1"/>
@@ -3602,7 +3946,8 @@
           <a:p>
             <a:r>
               <a:rPr lang="en-US" dirty="0"/>
-              <a:t>Top Disease Ontology terms are intellectual-disability and developmental terms; motor neuron disease is the top neurodegenerative term. Motor neuron disease: 78 methylated proteins, FDR 8e-4. ALS: rank 20, FDR 0.014.</a:t>
+              <a:t>Any condensate: ALS 81% (n=21), all methylated 44.9%, proteome 20.9%. Stress granule: 57.1%, 16.7%, 5.9%.
+Caveats: CD-CODE is literature-curated, and ALS proteins are among the most studied stress-granule proteins, so part of this is ascertainment. RNA binding explains some of the overlap. Maron 2021 Fig. 7 shows methylarginine proteins are more disordered, charged and LLPS-prone (PScore) than the proteome.</a:t>
             </a:r>
             <a:endParaRPr lang="en-US" dirty="0"/>
           </a:p>
@@ -3690,7 +4035,9 @@
           <a:p>
             <a:r>
               <a:rPr lang="en-US" dirty="0"/>
-              <a:t>Same call as the 2022 enrichKEGG analysis. With Maron 2021 Table S5 alone, Pathways of neurodegeneration (173) and ALS (162, FDR 7e-15) are also the top two by gene ratio.</a:t>
+              <a:t>MS023 raises MMA-pulldown sites on FUS (median log2 3.72, 21 of 23 sites FDR&lt;0.05) and EWSR1 (3.14), against a proteome median of 0. Maron 2021 describes this as substrate scavenging: when type I PRMTs are blocked, PRMT5 and monomethylation take over (FUS gains Rme2s and Rme1; TAF15 gains Rme1).
+Caveat: FUS sites in the ADMA pulldown also rise with MS023 (median 2.09) in our parse of Table S3, whereas the paper text says FUS Rme2a decreased. PTMScan is not normalised to protein level, so higher FUS recovery could inflate all three pulldowns. Check against the original Table S3 before quoting the ADMA direction.
+Relevance: type I PRMT inhibitors are in clinical development, and they block the asymmetric dimethylation of poly-GR/PR that drives C9orf72 DPR toxicity in cell models; symmetric poly-GR dimethylation correlates with longer disease duration (Gittings et al., 2020).</a:t>
             </a:r>
             <a:endParaRPr lang="en-US" dirty="0"/>
           </a:p>
@@ -3714,6 +4061,182 @@
             <a:fld id="{F7021451-1387-4CA6-816F-3879F97B5CBC}" type="slidenum">
               <a:rPr lang="en-US"/>
               <a:t>6</a:t>
+            </a:fld>
+            <a:endParaRPr lang="en-US"/>
+          </a:p>
+        </p:txBody>
+      </p:sp>
+    </p:spTree>
+    <p:extLst>
+      <p:ext uri="{BB962C8B-B14F-4D97-AF65-F5344CB8AC3E}">
+        <p14:creationId xmlns:p14="http://schemas.microsoft.com/office/powerpoint/2010/main" val="1024086991"/>
+      </p:ext>
+    </p:extLst>
+  </p:cSld>
+  <p:clrMapOvr>
+    <a:masterClrMapping/>
+  </p:clrMapOvr>
+</p:notes>
+</file>
+
+<file path=ppt/notesSlides/notesSlide7.xml><?xml version="1.0" encoding="utf-8"?>
+<p:notes xmlns:a="http://schemas.openxmlformats.org/drawingml/2006/main" xmlns:r="http://schemas.openxmlformats.org/officeDocument/2006/relationships" xmlns:p="http://schemas.openxmlformats.org/presentationml/2006/main">
+  <p:cSld>
+    <p:spTree>
+      <p:nvGrpSpPr>
+        <p:cNvPr id="1" name=""/>
+        <p:cNvGrpSpPr/>
+        <p:nvPr/>
+      </p:nvGrpSpPr>
+      <p:grpSpPr>
+        <a:xfrm>
+          <a:off x="0" y="0"/>
+          <a:ext cx="0" cy="0"/>
+          <a:chOff x="0" y="0"/>
+          <a:chExt cx="0" cy="0"/>
+        </a:xfrm>
+      </p:grpSpPr>
+      <p:sp>
+        <p:nvSpPr>
+          <p:cNvPr id="2" name="Slide Image Placeholder 1"/>
+          <p:cNvSpPr>
+            <a:spLocks noGrp="1" noRot="1" noChangeAspect="1"/>
+          </p:cNvSpPr>
+          <p:nvPr>
+            <p:ph type="sldImg"/>
+          </p:nvPr>
+        </p:nvSpPr>
+        <p:spPr/>
+      </p:sp>
+      <p:sp>
+        <p:nvSpPr>
+          <p:cNvPr id="3" name="Notes Placeholder 2"/>
+          <p:cNvSpPr>
+            <a:spLocks noGrp="1"/>
+          </p:cNvSpPr>
+          <p:nvPr>
+            <p:ph type="body" idx="1"/>
+          </p:nvPr>
+        </p:nvSpPr>
+        <p:spPr/>
+        <p:txBody>
+          <a:bodyPr/>
+          <a:lstStyle/>
+          <a:p>
+            <a:r>
+              <a:rPr lang="en-US" dirty="0"/>
+              <a:t>Top Disease Ontology terms are intellectual-disability and developmental terms; motor neuron disease is the top neurodegenerative term. Motor neuron disease: 78 methylated proteins, FDR 8e-4. ALS: rank 20, FDR 0.014.</a:t>
+            </a:r>
+            <a:endParaRPr lang="en-US" dirty="0"/>
+          </a:p>
+        </p:txBody>
+      </p:sp>
+      <p:sp>
+        <p:nvSpPr>
+          <p:cNvPr id="4" name="Slide Number Placeholder 3"/>
+          <p:cNvSpPr>
+            <a:spLocks noGrp="1"/>
+          </p:cNvSpPr>
+          <p:nvPr>
+            <p:ph type="sldNum" sz="quarter" idx="10"/>
+          </p:nvPr>
+        </p:nvSpPr>
+        <p:spPr/>
+        <p:txBody>
+          <a:bodyPr/>
+          <a:lstStyle/>
+          <a:p>
+            <a:fld id="{F7021451-1387-4CA6-816F-3879F97B5CBC}" type="slidenum">
+              <a:rPr lang="en-US"/>
+              <a:t>7</a:t>
+            </a:fld>
+            <a:endParaRPr lang="en-US"/>
+          </a:p>
+        </p:txBody>
+      </p:sp>
+    </p:spTree>
+    <p:extLst>
+      <p:ext uri="{BB962C8B-B14F-4D97-AF65-F5344CB8AC3E}">
+        <p14:creationId xmlns:p14="http://schemas.microsoft.com/office/powerpoint/2010/main" val="1024086991"/>
+      </p:ext>
+    </p:extLst>
+  </p:cSld>
+  <p:clrMapOvr>
+    <a:masterClrMapping/>
+  </p:clrMapOvr>
+</p:notes>
+</file>
+
+<file path=ppt/notesSlides/notesSlide8.xml><?xml version="1.0" encoding="utf-8"?>
+<p:notes xmlns:a="http://schemas.openxmlformats.org/drawingml/2006/main" xmlns:r="http://schemas.openxmlformats.org/officeDocument/2006/relationships" xmlns:p="http://schemas.openxmlformats.org/presentationml/2006/main">
+  <p:cSld>
+    <p:spTree>
+      <p:nvGrpSpPr>
+        <p:cNvPr id="1" name=""/>
+        <p:cNvGrpSpPr/>
+        <p:nvPr/>
+      </p:nvGrpSpPr>
+      <p:grpSpPr>
+        <a:xfrm>
+          <a:off x="0" y="0"/>
+          <a:ext cx="0" cy="0"/>
+          <a:chOff x="0" y="0"/>
+          <a:chExt cx="0" cy="0"/>
+        </a:xfrm>
+      </p:grpSpPr>
+      <p:sp>
+        <p:nvSpPr>
+          <p:cNvPr id="2" name="Slide Image Placeholder 1"/>
+          <p:cNvSpPr>
+            <a:spLocks noGrp="1" noRot="1" noChangeAspect="1"/>
+          </p:cNvSpPr>
+          <p:nvPr>
+            <p:ph type="sldImg"/>
+          </p:nvPr>
+        </p:nvSpPr>
+        <p:spPr/>
+      </p:sp>
+      <p:sp>
+        <p:nvSpPr>
+          <p:cNvPr id="3" name="Notes Placeholder 2"/>
+          <p:cNvSpPr>
+            <a:spLocks noGrp="1"/>
+          </p:cNvSpPr>
+          <p:nvPr>
+            <p:ph type="body" idx="1"/>
+          </p:nvPr>
+        </p:nvSpPr>
+        <p:spPr/>
+        <p:txBody>
+          <a:bodyPr/>
+          <a:lstStyle/>
+          <a:p>
+            <a:r>
+              <a:rPr lang="en-US" dirty="0"/>
+              <a:t>Same call as the 2022 enrichKEGG analysis. With Maron 2021 Table S5 alone, Pathways of neurodegeneration (173) and ALS (162, FDR 7e-15) are also the top two by gene ratio.</a:t>
+            </a:r>
+            <a:endParaRPr lang="en-US" dirty="0"/>
+          </a:p>
+        </p:txBody>
+      </p:sp>
+      <p:sp>
+        <p:nvSpPr>
+          <p:cNvPr id="4" name="Slide Number Placeholder 3"/>
+          <p:cNvSpPr>
+            <a:spLocks noGrp="1"/>
+          </p:cNvSpPr>
+          <p:nvPr>
+            <p:ph type="sldNum" sz="quarter" idx="10"/>
+          </p:nvPr>
+        </p:nvSpPr>
+        <p:spPr/>
+        <p:txBody>
+          <a:bodyPr/>
+          <a:lstStyle/>
+          <a:p>
+            <a:fld id="{F7021451-1387-4CA6-816F-3879F97B5CBC}" type="slidenum">
+              <a:rPr lang="en-US"/>
+              <a:t>8</a:t>
             </a:fld>
             <a:endParaRPr lang="en-US"/>
           </a:p>
@@ -14223,6 +14746,4996 @@
                   <a:schemeClr val="tx2"/>
                 </a:solidFill>
               </a:rPr>
+              <a:t>57% of methylated ALS proteins are stress-granule proteins</a:t>
+            </a:r>
+            <a:endParaRPr lang="en-US" sz="2800" dirty="0"/>
+          </a:p>
+        </p:txBody>
+      </p:sp>
+      <p:sp>
+        <p:nvSpPr>
+          <p:cNvPr id="3" name="Text 0"/>
+          <p:cNvSpPr/>
+          <p:nvPr>
+            <p:ph idx="101" type="body" hasCustomPrompt="1"/>
+          </p:nvPr>
+        </p:nvSpPr>
+        <p:spPr>
+          <a:xfrm>
+            <a:off x="548640" y="1005840"/>
+            <a:ext cx="11064240" cy="411480"/>
+          </a:xfrm>
+          <a:prstGeom prst="rect">
+            <a:avLst/>
+          </a:prstGeom>
+          <a:noFill/>
+          <a:ln/>
+        </p:spPr>
+        <p:txBody>
+          <a:bodyPr wrap="square" lIns="0" tIns="0" rIns="0" bIns="0" rtlCol="0" anchor="t"/>
+          <a:lstStyle/>
+          <a:p>
+            <a:pPr algn="l" indent="0" marL="0">
+              <a:buNone/>
+            </a:pPr>
+            <a:r>
+              <a:rPr lang="en-US" sz="1600" dirty="0">
+                <a:solidFill>
+                  <a:schemeClr val="accent6"/>
+                </a:solidFill>
+              </a:rPr>
+              <a:t>Methylarginine marks condensate-forming proteins (Maron 2021, Fig. 7); ALS proteins are the extreme case</a:t>
+            </a:r>
+            <a:endParaRPr lang="en-US" sz="1600" dirty="0"/>
+          </a:p>
+        </p:txBody>
+      </p:sp>
+      <p:sp>
+        <p:nvSpPr>
+          <p:cNvPr id="4" name="Text 0"/>
+          <p:cNvSpPr/>
+          <p:nvPr>
+            <p:ph idx="102" type="body" hasCustomPrompt="1"/>
+          </p:nvPr>
+        </p:nvSpPr>
+        <p:spPr>
+          <a:xfrm>
+            <a:off x="548640" y="6172200"/>
+            <a:ext cx="10424160" cy="457200"/>
+          </a:xfrm>
+          <a:prstGeom prst="rect">
+            <a:avLst/>
+          </a:prstGeom>
+          <a:noFill/>
+          <a:ln/>
+        </p:spPr>
+        <p:txBody>
+          <a:bodyPr wrap="square" lIns="0" tIns="0" rIns="0" bIns="0" rtlCol="0" anchor="b"/>
+          <a:lstStyle/>
+          <a:p>
+            <a:pPr algn="l" indent="0" marL="0">
+              <a:buNone/>
+            </a:pPr>
+            <a:r>
+              <a:rPr lang="en-US" sz="1000" i="1" dirty="0">
+                <a:solidFill>
+                  <a:schemeClr val="accent6"/>
+                </a:solidFill>
+              </a:rPr>
+              <a:t>Condensate membership: CD-CODE. Methylation in FUS RGG regions suppresses phase separation and stress-granule partitioning; FTD-FUS hypomethylation promotes it (Hofweber et al., Cell 2018; Qamar et al., Cell 2018).</a:t>
+            </a:r>
+            <a:endParaRPr lang="en-US" sz="1000" dirty="0"/>
+          </a:p>
+        </p:txBody>
+      </p:sp>
+      <p:graphicFrame>
+        <p:nvGraphicFramePr>
+          <p:cNvPr id="6" name="Condensate and stress granule membership" descr=""/>
+          <p:cNvGraphicFramePr/>
+          <p:nvPr/>
+        </p:nvGraphicFramePr>
+        <p:xfrm>
+          <a:off x="548640" y="1600200"/>
+          <a:ext cx="7863840" cy="4434840"/>
+        </p:xfrm>
+        <a:graphic xmlns:a="http://schemas.openxmlformats.org/drawingml/2006/main">
+          <a:graphicData uri="http://schemas.openxmlformats.org/drawingml/2006/chart">
+            <c:chart xmlns:c="http://schemas.openxmlformats.org/drawingml/2006/chart" r:id="rId1"/>
+          </a:graphicData>
+        </a:graphic>
+      </p:graphicFrame>
+      <p:sp>
+        <p:nvSpPr>
+          <p:cNvPr id="7" name="Side panel heading"/>
+          <p:cNvSpPr txBox="1"/>
+          <p:nvPr/>
+        </p:nvSpPr>
+        <p:spPr>
+          <a:xfrm>
+            <a:off x="8869680" y="1691640"/>
+            <a:ext cx="2743200" cy="731520"/>
+          </a:xfrm>
+          <a:prstGeom prst="rect">
+            <a:avLst/>
+          </a:prstGeom>
+          <a:noFill/>
+          <a:ln/>
+        </p:spPr>
+        <p:txBody>
+          <a:bodyPr wrap="square" lIns="0" tIns="0" rIns="0" bIns="0" rtlCol="0" anchor="t"/>
+          <a:lstStyle/>
+          <a:p>
+            <a:pPr indent="0" marL="0">
+              <a:buNone/>
+            </a:pPr>
+            <a:r>
+              <a:rPr lang="en-US" sz="1800" b="1" dirty="0">
+                <a:solidFill>
+                  <a:schemeClr val="accent1"/>
+                </a:solidFill>
+              </a:rPr>
+              <a:t>Methylated ALS proteins in stress granules</a:t>
+            </a:r>
+            <a:endParaRPr lang="en-US" sz="1800" dirty="0"/>
+          </a:p>
+        </p:txBody>
+      </p:sp>
+      <p:sp>
+        <p:nvSpPr>
+          <p:cNvPr id="8" name="Side panel proteins"/>
+          <p:cNvSpPr txBox="1"/>
+          <p:nvPr/>
+        </p:nvSpPr>
+        <p:spPr>
+          <a:xfrm>
+            <a:off x="8869680" y="2514600"/>
+            <a:ext cx="2743200" cy="2194560"/>
+          </a:xfrm>
+          <a:prstGeom prst="rect">
+            <a:avLst/>
+          </a:prstGeom>
+          <a:noFill/>
+          <a:ln/>
+        </p:spPr>
+        <p:txBody>
+          <a:bodyPr wrap="square" lIns="0" tIns="0" rIns="0" bIns="0" rtlCol="0" anchor="t"/>
+          <a:lstStyle/>
+          <a:p>
+            <a:pPr algn="l" indent="0" marL="0">
+              <a:spcBef>
+                <a:spcPts val="600"/>
+              </a:spcBef>
+              <a:buNone/>
+            </a:pPr>
+            <a:r>
+              <a:rPr lang="en-US" sz="1500" b="1" dirty="0">
+                <a:solidFill>
+                  <a:schemeClr val="tx1"/>
+                </a:solidFill>
+              </a:rPr>
+              <a:t>ANXA11  ATXN2  FUS  HNRNPA2B1  MATR3  PFN1  SOD1  SQSTM1  TARDBP  TUBA4A  UBQLN2  VCP</a:t>
+            </a:r>
+            <a:endParaRPr lang="en-US" sz="1500" dirty="0"/>
+          </a:p>
+          <a:p>
+            <a:pPr algn="l" indent="0" marL="0">
+              <a:spcBef>
+                <a:spcPts val="600"/>
+              </a:spcBef>
+              <a:buNone/>
+            </a:pPr>
+            <a:r>
+              <a:rPr lang="en-US" sz="1400" dirty="0">
+                <a:solidFill>
+                  <a:schemeClr val="accent6"/>
+                </a:solidFill>
+              </a:rPr>
+              <a:t>12 of 21</a:t>
+            </a:r>
+            <a:endParaRPr lang="en-US" sz="1500" dirty="0"/>
+          </a:p>
+        </p:txBody>
+      </p:sp>
+      <p:sp>
+        <p:nvSpPr>
+          <p:cNvPr id="25" name="Slide Number Placeholder 0"/>
+          <p:cNvSpPr>
+            <a:spLocks noGrp="1"/>
+          </p:cNvSpPr>
+          <p:nvPr>
+            <p:ph type="sldNum" sz="quarter" idx="4294967295"/>
+          </p:nvPr>
+        </p:nvSpPr>
+        <p:spPr>
+          <a:xfrm>
+            <a:off x="11247120" y="6355080"/>
+            <a:ext cx="457200" cy="274320"/>
+          </a:xfrm>
+          <a:prstGeom prst="rect">
+            <a:avLst/>
+          </a:prstGeom>
+          <a:extLst>
+            <a:ext uri="{C572A759-6A51-4108-AA02-DFA0A04FC94B}">
+              <ma14:wrappingTextBoxFlag xmlns:ma14="http://schemas.microsoft.com/office/mac/drawingml/2011/main" val="0"/>
+            </a:ext>
+          </a:extLst>
+        </p:spPr>
+        <p:txBody>
+          <a:bodyPr/>
+          <a:lstStyle>
+            <a:lvl1pPr>
+              <a:defRPr sz="1000">
+                <a:solidFill>
+                  <a:srgbClr val="6B7280"/>
+                </a:solidFill>
+              </a:defRPr>
+            </a:lvl1pPr>
+          </a:lstStyle>
+          <a:p>
+            <a:pPr algn="r"/>
+            <a:fld id="{F7021451-1387-4CA6-816F-3879F97B5CBC}" type="slidenum">
+              <a:rPr b="0" lang="en-US"/>
+              <a:t>5</a:t>
+            </a:fld>
+            <a:endParaRPr lang="en-US"/>
+          </a:p>
+        </p:txBody>
+      </p:sp>
+    </p:spTree>
+  </p:cSld>
+  <p:clrMapOvr>
+    <a:masterClrMapping/>
+  </p:clrMapOvr>
+</p:sld>
+</file>
+
+<file path=ppt/slides/slide6.xml><?xml version="1.0" encoding="utf-8"?>
+<p:sld xmlns:a="http://schemas.openxmlformats.org/drawingml/2006/main" xmlns:r="http://schemas.openxmlformats.org/officeDocument/2006/relationships" xmlns:p="http://schemas.openxmlformats.org/presentationml/2006/main">
+  <p:cSld name="Slide 6">
+    <p:spTree>
+      <p:nvGrpSpPr>
+        <p:cNvPr id="1" name=""/>
+        <p:cNvGrpSpPr/>
+        <p:nvPr/>
+      </p:nvGrpSpPr>
+      <p:grpSpPr>
+        <a:xfrm>
+          <a:off x="0" y="0"/>
+          <a:ext cx="0" cy="0"/>
+          <a:chOff x="0" y="0"/>
+          <a:chExt cx="0" cy="0"/>
+        </a:xfrm>
+      </p:grpSpPr>
+      <p:sp>
+        <p:nvSpPr>
+          <p:cNvPr id="2" name="Text 0"/>
+          <p:cNvSpPr/>
+          <p:nvPr>
+            <p:ph idx="100" type="title" hasCustomPrompt="1"/>
+          </p:nvPr>
+        </p:nvSpPr>
+        <p:spPr>
+          <a:xfrm>
+            <a:off x="548640" y="320040"/>
+            <a:ext cx="11064240" cy="685800"/>
+          </a:xfrm>
+          <a:prstGeom prst="rect">
+            <a:avLst/>
+          </a:prstGeom>
+          <a:noFill/>
+          <a:ln/>
+        </p:spPr>
+        <p:txBody>
+          <a:bodyPr wrap="square" lIns="0" tIns="0" rIns="0" bIns="0" rtlCol="0" anchor="ctr"/>
+          <a:lstStyle/>
+          <a:p>
+            <a:pPr algn="l" indent="0" marL="0">
+              <a:buNone/>
+            </a:pPr>
+            <a:r>
+              <a:rPr lang="en-US" sz="2800" b="1" dirty="0">
+                <a:solidFill>
+                  <a:schemeClr val="tx2"/>
+                </a:solidFill>
+              </a:rPr>
+              <a:t>Type I PRMT inhibition shifts FET proteins to monomethylation</a:t>
+            </a:r>
+            <a:endParaRPr lang="en-US" sz="2800" dirty="0"/>
+          </a:p>
+        </p:txBody>
+      </p:sp>
+      <p:sp>
+        <p:nvSpPr>
+          <p:cNvPr id="3" name="Text 0"/>
+          <p:cNvSpPr/>
+          <p:nvPr>
+            <p:ph idx="101" type="body" hasCustomPrompt="1"/>
+          </p:nvPr>
+        </p:nvSpPr>
+        <p:spPr>
+          <a:xfrm>
+            <a:off x="548640" y="1005840"/>
+            <a:ext cx="11064240" cy="411480"/>
+          </a:xfrm>
+          <a:prstGeom prst="rect">
+            <a:avLst/>
+          </a:prstGeom>
+          <a:noFill/>
+          <a:ln/>
+        </p:spPr>
+        <p:txBody>
+          <a:bodyPr wrap="square" lIns="0" tIns="0" rIns="0" bIns="0" rtlCol="0" anchor="t"/>
+          <a:lstStyle/>
+          <a:p>
+            <a:pPr algn="l" indent="0" marL="0">
+              <a:buNone/>
+            </a:pPr>
+            <a:r>
+              <a:rPr lang="en-US" sz="1600" dirty="0">
+                <a:solidFill>
+                  <a:schemeClr val="accent6"/>
+                </a:solidFill>
+              </a:rPr>
+              <a:t>Median log2 change (treated / DMSO) of methylated sites per pulldown, A549 cells, 7 days of 1 µM GSK591 (PRMT5) or MS023 (type I); n = sites</a:t>
+            </a:r>
+            <a:endParaRPr lang="en-US" sz="1600" dirty="0"/>
+          </a:p>
+        </p:txBody>
+      </p:sp>
+      <p:sp>
+        <p:nvSpPr>
+          <p:cNvPr id="4" name="Text 0"/>
+          <p:cNvSpPr/>
+          <p:nvPr>
+            <p:ph idx="102" type="body" hasCustomPrompt="1"/>
+          </p:nvPr>
+        </p:nvSpPr>
+        <p:spPr>
+          <a:xfrm>
+            <a:off x="548640" y="6172200"/>
+            <a:ext cx="10424160" cy="457200"/>
+          </a:xfrm>
+          <a:prstGeom prst="rect">
+            <a:avLst/>
+          </a:prstGeom>
+          <a:noFill/>
+          <a:ln/>
+        </p:spPr>
+        <p:txBody>
+          <a:bodyPr wrap="square" lIns="0" tIns="0" rIns="0" bIns="0" rtlCol="0" anchor="b"/>
+          <a:lstStyle/>
+          <a:p>
+            <a:pPr algn="l" indent="0" marL="0">
+              <a:buNone/>
+            </a:pPr>
+            <a:r>
+              <a:rPr lang="en-US" sz="1000" i="1" dirty="0">
+                <a:solidFill>
+                  <a:schemeClr val="accent6"/>
+                </a:solidFill>
+              </a:rPr>
+              <a:t>Data: Maron et al., iScience 2021, Table S3 (PTMScan MMA / ADMA / SDMA immunoaffinity). Red = more methylated peptide after treatment; blue = less. TDP-43 sites were not detected.</a:t>
+            </a:r>
+            <a:endParaRPr lang="en-US" sz="1000" dirty="0"/>
+          </a:p>
+        </p:txBody>
+      </p:sp>
+      <p:graphicFrame>
+        <p:nvGraphicFramePr>
+          <p:cNvPr id="7" name="PRMT inhibitor response"/>
+          <p:cNvGraphicFramePr>
+            <a:graphicFrameLocks noGrp="1"/>
+          </p:cNvGraphicFramePr>
+          <p:nvPr>
+            <p:extLst>
+              <p:ext uri="{D42A27DB-BD31-4B8C-83A1-F6EECF244321}">
+                <p14:modId xmlns:p14="http://schemas.microsoft.com/office/powerpoint/2010/main" val="1579011935"/>
+              </p:ext>
+            </p:extLst>
+          </p:nvPr>
+        </p:nvGraphicFramePr>
+        <p:xfrm>
+          <a:off x="548640" y="1691640"/>
+          <a:ext cx="11064240" cy="914400"/>
+        </p:xfrm>
+        <a:graphic>
+          <a:graphicData uri="http://schemas.openxmlformats.org/drawingml/2006/table">
+            <a:tbl>
+              <a:tblPr/>
+              <a:tblGrid>
+                <a:gridCol w="2286000"/>
+                <a:gridCol w="1463040"/>
+                <a:gridCol w="1463040"/>
+                <a:gridCol w="1463040"/>
+                <a:gridCol w="1463040"/>
+                <a:gridCol w="1463040"/>
+                <a:gridCol w="1463040"/>
+              </a:tblGrid>
+              <a:tr h="438912">
+                <a:tc>
+                  <a:txBody>
+                    <a:bodyPr/>
+                    <a:lstStyle/>
+                    <a:p>
+                      <a:pPr algn="ctr" indent="0" marL="0">
+                        <a:buNone/>
+                      </a:pPr>
+                      <a:endParaRPr lang="en-US" sz="1300" dirty="0">
+                        <a:latin typeface="Arial" charset="0"/>
+                        <a:ea typeface="Arial" charset="0"/>
+                        <a:cs typeface="Arial" charset="0"/>
+                      </a:endParaRPr>
+                    </a:p>
+                  </a:txBody>
+                  <a:tcPr marL="91440" marR="91440" marT="45720" marB="45720" anchor="ctr">
+                    <a:lnL w="12700" cap="flat" cmpd="sng" algn="ctr">
+                      <a:solidFill>
+                        <a:srgbClr val="FFFFFF"/>
+                      </a:solidFill>
+                      <a:prstDash val="solid"/>
+                      <a:round/>
+                      <a:headEnd type="none" w="med" len="med"/>
+                      <a:tailEnd type="none" w="med" len="med"/>
+                    </a:lnL>
+                    <a:lnR w="12700" cap="flat" cmpd="sng" algn="ctr">
+                      <a:solidFill>
+                        <a:srgbClr val="FFFFFF"/>
+                      </a:solidFill>
+                      <a:prstDash val="solid"/>
+                      <a:round/>
+                      <a:headEnd type="none" w="med" len="med"/>
+                      <a:tailEnd type="none" w="med" len="med"/>
+                    </a:lnR>
+                    <a:lnT w="12700" cap="flat" cmpd="sng" algn="ctr">
+                      <a:solidFill>
+                        <a:srgbClr val="FFFFFF"/>
+                      </a:solidFill>
+                      <a:prstDash val="solid"/>
+                      <a:round/>
+                      <a:headEnd type="none" w="med" len="med"/>
+                      <a:tailEnd type="none" w="med" len="med"/>
+                    </a:lnT>
+                    <a:lnB w="12700" cap="flat" cmpd="sng" algn="ctr">
+                      <a:solidFill>
+                        <a:srgbClr val="FFFFFF"/>
+                      </a:solidFill>
+                      <a:prstDash val="solid"/>
+                      <a:round/>
+                      <a:headEnd type="none" w="med" len="med"/>
+                      <a:tailEnd type="none" w="med" len="med"/>
+                    </a:lnB>
+                    <a:solidFill>
+                      <a:srgbClr val="FFFFFF"/>
+                    </a:solidFill>
+                  </a:tcPr>
+                </a:tc>
+                <a:tc gridSpan="3">
+                  <a:txBody>
+                    <a:bodyPr/>
+                    <a:lstStyle/>
+                    <a:p>
+                      <a:pPr algn="ctr" indent="0" marL="0">
+                        <a:buNone/>
+                      </a:pPr>
+                      <a:r>
+                        <a:rPr lang="en-US" sz="1400" b="1" dirty="0">
+                          <a:solidFill>
+                            <a:srgbClr val="1F2937"/>
+                          </a:solidFill>
+                          <a:latin typeface="Arial" pitchFamily="34" charset="0"/>
+                          <a:ea typeface="Arial" pitchFamily="34" charset="-122"/>
+                          <a:cs typeface="Arial" pitchFamily="34" charset="-120"/>
+                        </a:rPr>
+                        <a:t>GSK591 (PRMT5)</a:t>
+                      </a:r>
+                      <a:endParaRPr lang="en-US" sz="1400" dirty="0">
+                        <a:latin typeface="Arial" charset="0"/>
+                        <a:ea typeface="Arial" charset="0"/>
+                        <a:cs typeface="Arial" charset="0"/>
+                      </a:endParaRPr>
+                    </a:p>
+                  </a:txBody>
+                  <a:tcPr marL="91440" marR="91440" marT="45720" marB="45720" anchor="ctr">
+                    <a:lnL w="12700" cap="flat" cmpd="sng" algn="ctr">
+                      <a:solidFill>
+                        <a:srgbClr val="FFFFFF"/>
+                      </a:solidFill>
+                      <a:prstDash val="solid"/>
+                      <a:round/>
+                      <a:headEnd type="none" w="med" len="med"/>
+                      <a:tailEnd type="none" w="med" len="med"/>
+                    </a:lnL>
+                    <a:lnR w="12700" cap="flat" cmpd="sng" algn="ctr">
+                      <a:solidFill>
+                        <a:srgbClr val="FFFFFF"/>
+                      </a:solidFill>
+                      <a:prstDash val="solid"/>
+                      <a:round/>
+                      <a:headEnd type="none" w="med" len="med"/>
+                      <a:tailEnd type="none" w="med" len="med"/>
+                    </a:lnR>
+                    <a:lnT w="12700" cap="flat" cmpd="sng" algn="ctr">
+                      <a:solidFill>
+                        <a:srgbClr val="FFFFFF"/>
+                      </a:solidFill>
+                      <a:prstDash val="solid"/>
+                      <a:round/>
+                      <a:headEnd type="none" w="med" len="med"/>
+                      <a:tailEnd type="none" w="med" len="med"/>
+                    </a:lnT>
+                    <a:lnB w="12700" cap="flat" cmpd="sng" algn="ctr">
+                      <a:solidFill>
+                        <a:srgbClr val="FFFFFF"/>
+                      </a:solidFill>
+                      <a:prstDash val="solid"/>
+                      <a:round/>
+                      <a:headEnd type="none" w="med" len="med"/>
+                      <a:tailEnd type="none" w="med" len="med"/>
+                    </a:lnB>
+                  </a:tcPr>
+                </a:tc>
+                <a:tc hMerge="1">
+                  <a:tcPr/>
+                </a:tc>
+                <a:tc hMerge="1">
+                  <a:tcPr/>
+                </a:tc>
+                <a:tc gridSpan="3">
+                  <a:txBody>
+                    <a:bodyPr/>
+                    <a:lstStyle/>
+                    <a:p>
+                      <a:pPr algn="ctr" indent="0" marL="0">
+                        <a:buNone/>
+                      </a:pPr>
+                      <a:r>
+                        <a:rPr lang="en-US" sz="1400" b="1" dirty="0">
+                          <a:solidFill>
+                            <a:srgbClr val="1F2937"/>
+                          </a:solidFill>
+                          <a:latin typeface="Arial" pitchFamily="34" charset="0"/>
+                          <a:ea typeface="Arial" pitchFamily="34" charset="-122"/>
+                          <a:cs typeface="Arial" pitchFamily="34" charset="-120"/>
+                        </a:rPr>
+                        <a:t>MS023 (type I)</a:t>
+                      </a:r>
+                      <a:endParaRPr lang="en-US" sz="1400" dirty="0">
+                        <a:latin typeface="Arial" charset="0"/>
+                        <a:ea typeface="Arial" charset="0"/>
+                        <a:cs typeface="Arial" charset="0"/>
+                      </a:endParaRPr>
+                    </a:p>
+                  </a:txBody>
+                  <a:tcPr marL="91440" marR="91440" marT="45720" marB="45720" anchor="ctr">
+                    <a:lnL w="12700" cap="flat" cmpd="sng" algn="ctr">
+                      <a:solidFill>
+                        <a:srgbClr val="FFFFFF"/>
+                      </a:solidFill>
+                      <a:prstDash val="solid"/>
+                      <a:round/>
+                      <a:headEnd type="none" w="med" len="med"/>
+                      <a:tailEnd type="none" w="med" len="med"/>
+                    </a:lnL>
+                    <a:lnR w="12700" cap="flat" cmpd="sng" algn="ctr">
+                      <a:solidFill>
+                        <a:srgbClr val="FFFFFF"/>
+                      </a:solidFill>
+                      <a:prstDash val="solid"/>
+                      <a:round/>
+                      <a:headEnd type="none" w="med" len="med"/>
+                      <a:tailEnd type="none" w="med" len="med"/>
+                    </a:lnR>
+                    <a:lnT w="12700" cap="flat" cmpd="sng" algn="ctr">
+                      <a:solidFill>
+                        <a:srgbClr val="FFFFFF"/>
+                      </a:solidFill>
+                      <a:prstDash val="solid"/>
+                      <a:round/>
+                      <a:headEnd type="none" w="med" len="med"/>
+                      <a:tailEnd type="none" w="med" len="med"/>
+                    </a:lnT>
+                    <a:lnB w="12700" cap="flat" cmpd="sng" algn="ctr">
+                      <a:solidFill>
+                        <a:srgbClr val="FFFFFF"/>
+                      </a:solidFill>
+                      <a:prstDash val="solid"/>
+                      <a:round/>
+                      <a:headEnd type="none" w="med" len="med"/>
+                      <a:tailEnd type="none" w="med" len="med"/>
+                    </a:lnB>
+                  </a:tcPr>
+                </a:tc>
+                <a:tc hMerge="1">
+                  <a:tcPr/>
+                </a:tc>
+                <a:tc hMerge="1">
+                  <a:tcPr/>
+                </a:tc>
+              </a:tr>
+              <a:tr h="438912">
+                <a:tc>
+                  <a:txBody>
+                    <a:bodyPr/>
+                    <a:lstStyle/>
+                    <a:p>
+                      <a:pPr algn="ctr" indent="0" marL="0">
+                        <a:buNone/>
+                      </a:pPr>
+                      <a:r>
+                        <a:rPr lang="en-US" sz="1300" b="1" dirty="0">
+                          <a:solidFill>
+                            <a:srgbClr val="1F2937"/>
+                          </a:solidFill>
+                          <a:latin typeface="Arial" pitchFamily="34" charset="0"/>
+                          <a:ea typeface="Arial" pitchFamily="34" charset="-122"/>
+                          <a:cs typeface="Arial" pitchFamily="34" charset="-120"/>
+                        </a:rPr>
+                        <a:t>Protein</a:t>
+                      </a:r>
+                      <a:endParaRPr lang="en-US" sz="1300" dirty="0">
+                        <a:latin typeface="Arial" charset="0"/>
+                        <a:ea typeface="Arial" charset="0"/>
+                        <a:cs typeface="Arial" charset="0"/>
+                      </a:endParaRPr>
+                    </a:p>
+                  </a:txBody>
+                  <a:tcPr marL="91440" marR="91440" marT="45720" marB="45720" anchor="ctr">
+                    <a:lnL w="12700" cap="flat" cmpd="sng" algn="ctr">
+                      <a:solidFill>
+                        <a:srgbClr val="FFFFFF"/>
+                      </a:solidFill>
+                      <a:prstDash val="solid"/>
+                      <a:round/>
+                      <a:headEnd type="none" w="med" len="med"/>
+                      <a:tailEnd type="none" w="med" len="med"/>
+                    </a:lnL>
+                    <a:lnR w="12700" cap="flat" cmpd="sng" algn="ctr">
+                      <a:solidFill>
+                        <a:srgbClr val="FFFFFF"/>
+                      </a:solidFill>
+                      <a:prstDash val="solid"/>
+                      <a:round/>
+                      <a:headEnd type="none" w="med" len="med"/>
+                      <a:tailEnd type="none" w="med" len="med"/>
+                    </a:lnR>
+                    <a:lnT w="12700" cap="flat" cmpd="sng" algn="ctr">
+                      <a:solidFill>
+                        <a:srgbClr val="FFFFFF"/>
+                      </a:solidFill>
+                      <a:prstDash val="solid"/>
+                      <a:round/>
+                      <a:headEnd type="none" w="med" len="med"/>
+                      <a:tailEnd type="none" w="med" len="med"/>
+                    </a:lnT>
+                    <a:lnB w="12700" cap="flat" cmpd="sng" algn="ctr">
+                      <a:solidFill>
+                        <a:srgbClr val="FFFFFF"/>
+                      </a:solidFill>
+                      <a:prstDash val="solid"/>
+                      <a:round/>
+                      <a:headEnd type="none" w="med" len="med"/>
+                      <a:tailEnd type="none" w="med" len="med"/>
+                    </a:lnB>
+                    <a:solidFill>
+                      <a:srgbClr val="FFFFFF"/>
+                    </a:solidFill>
+                  </a:tcPr>
+                </a:tc>
+                <a:tc>
+                  <a:txBody>
+                    <a:bodyPr/>
+                    <a:lstStyle/>
+                    <a:p>
+                      <a:pPr algn="ctr" indent="0" marL="0">
+                        <a:buNone/>
+                      </a:pPr>
+                      <a:r>
+                        <a:rPr lang="en-US" sz="1300" b="1" dirty="0">
+                          <a:solidFill>
+                            <a:srgbClr val="1F2937"/>
+                          </a:solidFill>
+                          <a:latin typeface="Arial" pitchFamily="34" charset="0"/>
+                          <a:ea typeface="Arial" pitchFamily="34" charset="-122"/>
+                          <a:cs typeface="Arial" pitchFamily="34" charset="-120"/>
+                        </a:rPr>
+                        <a:t>MMA</a:t>
+                      </a:r>
+                      <a:endParaRPr lang="en-US" sz="1300" dirty="0">
+                        <a:latin typeface="Arial" charset="0"/>
+                        <a:ea typeface="Arial" charset="0"/>
+                        <a:cs typeface="Arial" charset="0"/>
+                      </a:endParaRPr>
+                    </a:p>
+                  </a:txBody>
+                  <a:tcPr marL="91440" marR="91440" marT="45720" marB="45720" anchor="ctr">
+                    <a:lnL w="12700" cap="flat" cmpd="sng" algn="ctr">
+                      <a:solidFill>
+                        <a:srgbClr val="FFFFFF"/>
+                      </a:solidFill>
+                      <a:prstDash val="solid"/>
+                      <a:round/>
+                      <a:headEnd type="none" w="med" len="med"/>
+                      <a:tailEnd type="none" w="med" len="med"/>
+                    </a:lnL>
+                    <a:lnR w="12700" cap="flat" cmpd="sng" algn="ctr">
+                      <a:solidFill>
+                        <a:srgbClr val="FFFFFF"/>
+                      </a:solidFill>
+                      <a:prstDash val="solid"/>
+                      <a:round/>
+                      <a:headEnd type="none" w="med" len="med"/>
+                      <a:tailEnd type="none" w="med" len="med"/>
+                    </a:lnR>
+                    <a:lnT w="12700" cap="flat" cmpd="sng" algn="ctr">
+                      <a:solidFill>
+                        <a:srgbClr val="FFFFFF"/>
+                      </a:solidFill>
+                      <a:prstDash val="solid"/>
+                      <a:round/>
+                      <a:headEnd type="none" w="med" len="med"/>
+                      <a:tailEnd type="none" w="med" len="med"/>
+                    </a:lnT>
+                    <a:lnB w="12700" cap="flat" cmpd="sng" algn="ctr">
+                      <a:solidFill>
+                        <a:srgbClr val="FFFFFF"/>
+                      </a:solidFill>
+                      <a:prstDash val="solid"/>
+                      <a:round/>
+                      <a:headEnd type="none" w="med" len="med"/>
+                      <a:tailEnd type="none" w="med" len="med"/>
+                    </a:lnB>
+                    <a:solidFill>
+                      <a:srgbClr val="FFFFFF"/>
+                    </a:solidFill>
+                  </a:tcPr>
+                </a:tc>
+                <a:tc>
+                  <a:txBody>
+                    <a:bodyPr/>
+                    <a:lstStyle/>
+                    <a:p>
+                      <a:pPr algn="ctr" indent="0" marL="0">
+                        <a:buNone/>
+                      </a:pPr>
+                      <a:r>
+                        <a:rPr lang="en-US" sz="1300" b="1" dirty="0">
+                          <a:solidFill>
+                            <a:srgbClr val="1F2937"/>
+                          </a:solidFill>
+                          <a:latin typeface="Arial" pitchFamily="34" charset="0"/>
+                          <a:ea typeface="Arial" pitchFamily="34" charset="-122"/>
+                          <a:cs typeface="Arial" pitchFamily="34" charset="-120"/>
+                        </a:rPr>
+                        <a:t>ADMA</a:t>
+                      </a:r>
+                      <a:endParaRPr lang="en-US" sz="1300" dirty="0">
+                        <a:latin typeface="Arial" charset="0"/>
+                        <a:ea typeface="Arial" charset="0"/>
+                        <a:cs typeface="Arial" charset="0"/>
+                      </a:endParaRPr>
+                    </a:p>
+                  </a:txBody>
+                  <a:tcPr marL="91440" marR="91440" marT="45720" marB="45720" anchor="ctr">
+                    <a:lnL w="12700" cap="flat" cmpd="sng" algn="ctr">
+                      <a:solidFill>
+                        <a:srgbClr val="FFFFFF"/>
+                      </a:solidFill>
+                      <a:prstDash val="solid"/>
+                      <a:round/>
+                      <a:headEnd type="none" w="med" len="med"/>
+                      <a:tailEnd type="none" w="med" len="med"/>
+                    </a:lnL>
+                    <a:lnR w="12700" cap="flat" cmpd="sng" algn="ctr">
+                      <a:solidFill>
+                        <a:srgbClr val="FFFFFF"/>
+                      </a:solidFill>
+                      <a:prstDash val="solid"/>
+                      <a:round/>
+                      <a:headEnd type="none" w="med" len="med"/>
+                      <a:tailEnd type="none" w="med" len="med"/>
+                    </a:lnR>
+                    <a:lnT w="12700" cap="flat" cmpd="sng" algn="ctr">
+                      <a:solidFill>
+                        <a:srgbClr val="FFFFFF"/>
+                      </a:solidFill>
+                      <a:prstDash val="solid"/>
+                      <a:round/>
+                      <a:headEnd type="none" w="med" len="med"/>
+                      <a:tailEnd type="none" w="med" len="med"/>
+                    </a:lnT>
+                    <a:lnB w="12700" cap="flat" cmpd="sng" algn="ctr">
+                      <a:solidFill>
+                        <a:srgbClr val="FFFFFF"/>
+                      </a:solidFill>
+                      <a:prstDash val="solid"/>
+                      <a:round/>
+                      <a:headEnd type="none" w="med" len="med"/>
+                      <a:tailEnd type="none" w="med" len="med"/>
+                    </a:lnB>
+                    <a:solidFill>
+                      <a:srgbClr val="FFFFFF"/>
+                    </a:solidFill>
+                  </a:tcPr>
+                </a:tc>
+                <a:tc>
+                  <a:txBody>
+                    <a:bodyPr/>
+                    <a:lstStyle/>
+                    <a:p>
+                      <a:pPr algn="ctr" indent="0" marL="0">
+                        <a:buNone/>
+                      </a:pPr>
+                      <a:r>
+                        <a:rPr lang="en-US" sz="1300" b="1" dirty="0">
+                          <a:solidFill>
+                            <a:srgbClr val="1F2937"/>
+                          </a:solidFill>
+                          <a:latin typeface="Arial" pitchFamily="34" charset="0"/>
+                          <a:ea typeface="Arial" pitchFamily="34" charset="-122"/>
+                          <a:cs typeface="Arial" pitchFamily="34" charset="-120"/>
+                        </a:rPr>
+                        <a:t>SDMA</a:t>
+                      </a:r>
+                      <a:endParaRPr lang="en-US" sz="1300" dirty="0">
+                        <a:latin typeface="Arial" charset="0"/>
+                        <a:ea typeface="Arial" charset="0"/>
+                        <a:cs typeface="Arial" charset="0"/>
+                      </a:endParaRPr>
+                    </a:p>
+                  </a:txBody>
+                  <a:tcPr marL="91440" marR="91440" marT="45720" marB="45720" anchor="ctr">
+                    <a:lnL w="12700" cap="flat" cmpd="sng" algn="ctr">
+                      <a:solidFill>
+                        <a:srgbClr val="FFFFFF"/>
+                      </a:solidFill>
+                      <a:prstDash val="solid"/>
+                      <a:round/>
+                      <a:headEnd type="none" w="med" len="med"/>
+                      <a:tailEnd type="none" w="med" len="med"/>
+                    </a:lnL>
+                    <a:lnR w="12700" cap="flat" cmpd="sng" algn="ctr">
+                      <a:solidFill>
+                        <a:srgbClr val="FFFFFF"/>
+                      </a:solidFill>
+                      <a:prstDash val="solid"/>
+                      <a:round/>
+                      <a:headEnd type="none" w="med" len="med"/>
+                      <a:tailEnd type="none" w="med" len="med"/>
+                    </a:lnR>
+                    <a:lnT w="12700" cap="flat" cmpd="sng" algn="ctr">
+                      <a:solidFill>
+                        <a:srgbClr val="FFFFFF"/>
+                      </a:solidFill>
+                      <a:prstDash val="solid"/>
+                      <a:round/>
+                      <a:headEnd type="none" w="med" len="med"/>
+                      <a:tailEnd type="none" w="med" len="med"/>
+                    </a:lnT>
+                    <a:lnB w="12700" cap="flat" cmpd="sng" algn="ctr">
+                      <a:solidFill>
+                        <a:srgbClr val="FFFFFF"/>
+                      </a:solidFill>
+                      <a:prstDash val="solid"/>
+                      <a:round/>
+                      <a:headEnd type="none" w="med" len="med"/>
+                      <a:tailEnd type="none" w="med" len="med"/>
+                    </a:lnB>
+                    <a:solidFill>
+                      <a:srgbClr val="FFFFFF"/>
+                    </a:solidFill>
+                  </a:tcPr>
+                </a:tc>
+                <a:tc>
+                  <a:txBody>
+                    <a:bodyPr/>
+                    <a:lstStyle/>
+                    <a:p>
+                      <a:pPr algn="ctr" indent="0" marL="0">
+                        <a:buNone/>
+                      </a:pPr>
+                      <a:r>
+                        <a:rPr lang="en-US" sz="1300" b="1" dirty="0">
+                          <a:solidFill>
+                            <a:srgbClr val="1F2937"/>
+                          </a:solidFill>
+                          <a:latin typeface="Arial" pitchFamily="34" charset="0"/>
+                          <a:ea typeface="Arial" pitchFamily="34" charset="-122"/>
+                          <a:cs typeface="Arial" pitchFamily="34" charset="-120"/>
+                        </a:rPr>
+                        <a:t>MMA</a:t>
+                      </a:r>
+                      <a:endParaRPr lang="en-US" sz="1300" dirty="0">
+                        <a:latin typeface="Arial" charset="0"/>
+                        <a:ea typeface="Arial" charset="0"/>
+                        <a:cs typeface="Arial" charset="0"/>
+                      </a:endParaRPr>
+                    </a:p>
+                  </a:txBody>
+                  <a:tcPr marL="91440" marR="91440" marT="45720" marB="45720" anchor="ctr">
+                    <a:lnL w="12700" cap="flat" cmpd="sng" algn="ctr">
+                      <a:solidFill>
+                        <a:srgbClr val="FFFFFF"/>
+                      </a:solidFill>
+                      <a:prstDash val="solid"/>
+                      <a:round/>
+                      <a:headEnd type="none" w="med" len="med"/>
+                      <a:tailEnd type="none" w="med" len="med"/>
+                    </a:lnL>
+                    <a:lnR w="12700" cap="flat" cmpd="sng" algn="ctr">
+                      <a:solidFill>
+                        <a:srgbClr val="FFFFFF"/>
+                      </a:solidFill>
+                      <a:prstDash val="solid"/>
+                      <a:round/>
+                      <a:headEnd type="none" w="med" len="med"/>
+                      <a:tailEnd type="none" w="med" len="med"/>
+                    </a:lnR>
+                    <a:lnT w="12700" cap="flat" cmpd="sng" algn="ctr">
+                      <a:solidFill>
+                        <a:srgbClr val="FFFFFF"/>
+                      </a:solidFill>
+                      <a:prstDash val="solid"/>
+                      <a:round/>
+                      <a:headEnd type="none" w="med" len="med"/>
+                      <a:tailEnd type="none" w="med" len="med"/>
+                    </a:lnT>
+                    <a:lnB w="12700" cap="flat" cmpd="sng" algn="ctr">
+                      <a:solidFill>
+                        <a:srgbClr val="FFFFFF"/>
+                      </a:solidFill>
+                      <a:prstDash val="solid"/>
+                      <a:round/>
+                      <a:headEnd type="none" w="med" len="med"/>
+                      <a:tailEnd type="none" w="med" len="med"/>
+                    </a:lnB>
+                    <a:solidFill>
+                      <a:srgbClr val="FFFFFF"/>
+                    </a:solidFill>
+                  </a:tcPr>
+                </a:tc>
+                <a:tc>
+                  <a:txBody>
+                    <a:bodyPr/>
+                    <a:lstStyle/>
+                    <a:p>
+                      <a:pPr algn="ctr" indent="0" marL="0">
+                        <a:buNone/>
+                      </a:pPr>
+                      <a:r>
+                        <a:rPr lang="en-US" sz="1300" b="1" dirty="0">
+                          <a:solidFill>
+                            <a:srgbClr val="1F2937"/>
+                          </a:solidFill>
+                          <a:latin typeface="Arial" pitchFamily="34" charset="0"/>
+                          <a:ea typeface="Arial" pitchFamily="34" charset="-122"/>
+                          <a:cs typeface="Arial" pitchFamily="34" charset="-120"/>
+                        </a:rPr>
+                        <a:t>ADMA</a:t>
+                      </a:r>
+                      <a:endParaRPr lang="en-US" sz="1300" dirty="0">
+                        <a:latin typeface="Arial" charset="0"/>
+                        <a:ea typeface="Arial" charset="0"/>
+                        <a:cs typeface="Arial" charset="0"/>
+                      </a:endParaRPr>
+                    </a:p>
+                  </a:txBody>
+                  <a:tcPr marL="91440" marR="91440" marT="45720" marB="45720" anchor="ctr">
+                    <a:lnL w="12700" cap="flat" cmpd="sng" algn="ctr">
+                      <a:solidFill>
+                        <a:srgbClr val="FFFFFF"/>
+                      </a:solidFill>
+                      <a:prstDash val="solid"/>
+                      <a:round/>
+                      <a:headEnd type="none" w="med" len="med"/>
+                      <a:tailEnd type="none" w="med" len="med"/>
+                    </a:lnL>
+                    <a:lnR w="12700" cap="flat" cmpd="sng" algn="ctr">
+                      <a:solidFill>
+                        <a:srgbClr val="FFFFFF"/>
+                      </a:solidFill>
+                      <a:prstDash val="solid"/>
+                      <a:round/>
+                      <a:headEnd type="none" w="med" len="med"/>
+                      <a:tailEnd type="none" w="med" len="med"/>
+                    </a:lnR>
+                    <a:lnT w="12700" cap="flat" cmpd="sng" algn="ctr">
+                      <a:solidFill>
+                        <a:srgbClr val="FFFFFF"/>
+                      </a:solidFill>
+                      <a:prstDash val="solid"/>
+                      <a:round/>
+                      <a:headEnd type="none" w="med" len="med"/>
+                      <a:tailEnd type="none" w="med" len="med"/>
+                    </a:lnT>
+                    <a:lnB w="12700" cap="flat" cmpd="sng" algn="ctr">
+                      <a:solidFill>
+                        <a:srgbClr val="FFFFFF"/>
+                      </a:solidFill>
+                      <a:prstDash val="solid"/>
+                      <a:round/>
+                      <a:headEnd type="none" w="med" len="med"/>
+                      <a:tailEnd type="none" w="med" len="med"/>
+                    </a:lnB>
+                    <a:solidFill>
+                      <a:srgbClr val="FFFFFF"/>
+                    </a:solidFill>
+                  </a:tcPr>
+                </a:tc>
+                <a:tc>
+                  <a:txBody>
+                    <a:bodyPr/>
+                    <a:lstStyle/>
+                    <a:p>
+                      <a:pPr algn="ctr" indent="0" marL="0">
+                        <a:buNone/>
+                      </a:pPr>
+                      <a:r>
+                        <a:rPr lang="en-US" sz="1300" b="1" dirty="0">
+                          <a:solidFill>
+                            <a:srgbClr val="1F2937"/>
+                          </a:solidFill>
+                          <a:latin typeface="Arial" pitchFamily="34" charset="0"/>
+                          <a:ea typeface="Arial" pitchFamily="34" charset="-122"/>
+                          <a:cs typeface="Arial" pitchFamily="34" charset="-120"/>
+                        </a:rPr>
+                        <a:t>SDMA</a:t>
+                      </a:r>
+                      <a:endParaRPr lang="en-US" sz="1300" dirty="0">
+                        <a:latin typeface="Arial" charset="0"/>
+                        <a:ea typeface="Arial" charset="0"/>
+                        <a:cs typeface="Arial" charset="0"/>
+                      </a:endParaRPr>
+                    </a:p>
+                  </a:txBody>
+                  <a:tcPr marL="91440" marR="91440" marT="45720" marB="45720" anchor="ctr">
+                    <a:lnL w="12700" cap="flat" cmpd="sng" algn="ctr">
+                      <a:solidFill>
+                        <a:srgbClr val="FFFFFF"/>
+                      </a:solidFill>
+                      <a:prstDash val="solid"/>
+                      <a:round/>
+                      <a:headEnd type="none" w="med" len="med"/>
+                      <a:tailEnd type="none" w="med" len="med"/>
+                    </a:lnL>
+                    <a:lnR w="12700" cap="flat" cmpd="sng" algn="ctr">
+                      <a:solidFill>
+                        <a:srgbClr val="FFFFFF"/>
+                      </a:solidFill>
+                      <a:prstDash val="solid"/>
+                      <a:round/>
+                      <a:headEnd type="none" w="med" len="med"/>
+                      <a:tailEnd type="none" w="med" len="med"/>
+                    </a:lnR>
+                    <a:lnT w="12700" cap="flat" cmpd="sng" algn="ctr">
+                      <a:solidFill>
+                        <a:srgbClr val="FFFFFF"/>
+                      </a:solidFill>
+                      <a:prstDash val="solid"/>
+                      <a:round/>
+                      <a:headEnd type="none" w="med" len="med"/>
+                      <a:tailEnd type="none" w="med" len="med"/>
+                    </a:lnT>
+                    <a:lnB w="12700" cap="flat" cmpd="sng" algn="ctr">
+                      <a:solidFill>
+                        <a:srgbClr val="FFFFFF"/>
+                      </a:solidFill>
+                      <a:prstDash val="solid"/>
+                      <a:round/>
+                      <a:headEnd type="none" w="med" len="med"/>
+                      <a:tailEnd type="none" w="med" len="med"/>
+                    </a:lnB>
+                    <a:solidFill>
+                      <a:srgbClr val="FFFFFF"/>
+                    </a:solidFill>
+                  </a:tcPr>
+                </a:tc>
+              </a:tr>
+              <a:tr h="438912">
+                <a:tc>
+                  <a:txBody>
+                    <a:bodyPr/>
+                    <a:lstStyle/>
+                    <a:p>
+                      <a:pPr algn="r" indent="0" marL="0">
+                        <a:buNone/>
+                      </a:pPr>
+                      <a:r>
+                        <a:rPr lang="en-US" sz="1400" b="1" dirty="0">
+                          <a:solidFill>
+                            <a:srgbClr val="1F2937"/>
+                          </a:solidFill>
+                          <a:latin typeface="Arial" pitchFamily="34" charset="0"/>
+                          <a:ea typeface="Arial" pitchFamily="34" charset="-122"/>
+                          <a:cs typeface="Arial" pitchFamily="34" charset="-120"/>
+                        </a:rPr>
+                        <a:t>FUS</a:t>
+                      </a:r>
+                      <a:endParaRPr lang="en-US" sz="1400" dirty="0">
+                        <a:latin typeface="Arial" charset="0"/>
+                        <a:ea typeface="Arial" charset="0"/>
+                        <a:cs typeface="Arial" charset="0"/>
+                      </a:endParaRPr>
+                    </a:p>
+                  </a:txBody>
+                  <a:tcPr marL="91440" marR="91440" marT="45720" marB="45720" anchor="ctr">
+                    <a:lnL w="12700" cap="flat" cmpd="sng" algn="ctr">
+                      <a:solidFill>
+                        <a:srgbClr val="FFFFFF"/>
+                      </a:solidFill>
+                      <a:prstDash val="solid"/>
+                      <a:round/>
+                      <a:headEnd type="none" w="med" len="med"/>
+                      <a:tailEnd type="none" w="med" len="med"/>
+                    </a:lnL>
+                    <a:lnR w="12700" cap="flat" cmpd="sng" algn="ctr">
+                      <a:solidFill>
+                        <a:srgbClr val="FFFFFF"/>
+                      </a:solidFill>
+                      <a:prstDash val="solid"/>
+                      <a:round/>
+                      <a:headEnd type="none" w="med" len="med"/>
+                      <a:tailEnd type="none" w="med" len="med"/>
+                    </a:lnR>
+                    <a:lnT w="12700" cap="flat" cmpd="sng" algn="ctr">
+                      <a:solidFill>
+                        <a:srgbClr val="FFFFFF"/>
+                      </a:solidFill>
+                      <a:prstDash val="solid"/>
+                      <a:round/>
+                      <a:headEnd type="none" w="med" len="med"/>
+                      <a:tailEnd type="none" w="med" len="med"/>
+                    </a:lnT>
+                    <a:lnB w="12700" cap="flat" cmpd="sng" algn="ctr">
+                      <a:solidFill>
+                        <a:srgbClr val="FFFFFF"/>
+                      </a:solidFill>
+                      <a:prstDash val="solid"/>
+                      <a:round/>
+                      <a:headEnd type="none" w="med" len="med"/>
+                      <a:tailEnd type="none" w="med" len="med"/>
+                    </a:lnB>
+                  </a:tcPr>
+                </a:tc>
+                <a:tc>
+                  <a:txBody>
+                    <a:bodyPr/>
+                    <a:lstStyle/>
+                    <a:p>
+                      <a:pPr algn="ctr" indent="0" marL="0">
+                        <a:buNone/>
+                      </a:pPr>
+                      <a:r>
+                        <a:rPr lang="en-US" sz="1300" dirty="0">
+                          <a:solidFill>
+                            <a:srgbClr val="1F2937"/>
+                          </a:solidFill>
+                          <a:latin typeface="Arial" pitchFamily="34" charset="0"/>
+                          <a:ea typeface="Arial" pitchFamily="34" charset="-122"/>
+                          <a:cs typeface="Arial" pitchFamily="34" charset="-120"/>
+                        </a:rPr>
+                        <a:t>+0.5  (23)</a:t>
+                      </a:r>
+                      <a:endParaRPr lang="en-US" sz="1300" dirty="0">
+                        <a:latin typeface="Arial" charset="0"/>
+                        <a:ea typeface="Arial" charset="0"/>
+                        <a:cs typeface="Arial" charset="0"/>
+                      </a:endParaRPr>
+                    </a:p>
+                  </a:txBody>
+                  <a:tcPr marL="91440" marR="91440" marT="45720" marB="45720" anchor="ctr">
+                    <a:lnL w="12700" cap="flat" cmpd="sng" algn="ctr">
+                      <a:solidFill>
+                        <a:srgbClr val="FFFFFF"/>
+                      </a:solidFill>
+                      <a:prstDash val="solid"/>
+                      <a:round/>
+                      <a:headEnd type="none" w="med" len="med"/>
+                      <a:tailEnd type="none" w="med" len="med"/>
+                    </a:lnL>
+                    <a:lnR w="12700" cap="flat" cmpd="sng" algn="ctr">
+                      <a:solidFill>
+                        <a:srgbClr val="FFFFFF"/>
+                      </a:solidFill>
+                      <a:prstDash val="solid"/>
+                      <a:round/>
+                      <a:headEnd type="none" w="med" len="med"/>
+                      <a:tailEnd type="none" w="med" len="med"/>
+                    </a:lnR>
+                    <a:lnT w="12700" cap="flat" cmpd="sng" algn="ctr">
+                      <a:solidFill>
+                        <a:srgbClr val="FFFFFF"/>
+                      </a:solidFill>
+                      <a:prstDash val="solid"/>
+                      <a:round/>
+                      <a:headEnd type="none" w="med" len="med"/>
+                      <a:tailEnd type="none" w="med" len="med"/>
+                    </a:lnT>
+                    <a:lnB w="12700" cap="flat" cmpd="sng" algn="ctr">
+                      <a:solidFill>
+                        <a:srgbClr val="FFFFFF"/>
+                      </a:solidFill>
+                      <a:prstDash val="solid"/>
+                      <a:round/>
+                      <a:headEnd type="none" w="med" len="med"/>
+                      <a:tailEnd type="none" w="med" len="med"/>
+                    </a:lnB>
+                    <a:solidFill>
+                      <a:srgbClr val="EBDADB"/>
+                    </a:solidFill>
+                  </a:tcPr>
+                </a:tc>
+                <a:tc>
+                  <a:txBody>
+                    <a:bodyPr/>
+                    <a:lstStyle/>
+                    <a:p>
+                      <a:pPr algn="ctr" indent="0" marL="0">
+                        <a:buNone/>
+                      </a:pPr>
+                      <a:r>
+                        <a:rPr lang="en-US" sz="1300" b="1" dirty="0">
+                          <a:solidFill>
+                            <a:srgbClr val="1F2937"/>
+                          </a:solidFill>
+                          <a:latin typeface="Arial" pitchFamily="34" charset="0"/>
+                          <a:ea typeface="Arial" pitchFamily="34" charset="-122"/>
+                          <a:cs typeface="Arial" pitchFamily="34" charset="-120"/>
+                        </a:rPr>
+                        <a:t>+2.2  (14)</a:t>
+                      </a:r>
+                      <a:endParaRPr lang="en-US" sz="1300" dirty="0">
+                        <a:latin typeface="Arial" charset="0"/>
+                        <a:ea typeface="Arial" charset="0"/>
+                        <a:cs typeface="Arial" charset="0"/>
+                      </a:endParaRPr>
+                    </a:p>
+                  </a:txBody>
+                  <a:tcPr marL="91440" marR="91440" marT="45720" marB="45720" anchor="ctr">
+                    <a:lnL w="12700" cap="flat" cmpd="sng" algn="ctr">
+                      <a:solidFill>
+                        <a:srgbClr val="FFFFFF"/>
+                      </a:solidFill>
+                      <a:prstDash val="solid"/>
+                      <a:round/>
+                      <a:headEnd type="none" w="med" len="med"/>
+                      <a:tailEnd type="none" w="med" len="med"/>
+                    </a:lnL>
+                    <a:lnR w="12700" cap="flat" cmpd="sng" algn="ctr">
+                      <a:solidFill>
+                        <a:srgbClr val="FFFFFF"/>
+                      </a:solidFill>
+                      <a:prstDash val="solid"/>
+                      <a:round/>
+                      <a:headEnd type="none" w="med" len="med"/>
+                      <a:tailEnd type="none" w="med" len="med"/>
+                    </a:lnR>
+                    <a:lnT w="12700" cap="flat" cmpd="sng" algn="ctr">
+                      <a:solidFill>
+                        <a:srgbClr val="FFFFFF"/>
+                      </a:solidFill>
+                      <a:prstDash val="solid"/>
+                      <a:round/>
+                      <a:headEnd type="none" w="med" len="med"/>
+                      <a:tailEnd type="none" w="med" len="med"/>
+                    </a:lnT>
+                    <a:lnB w="12700" cap="flat" cmpd="sng" algn="ctr">
+                      <a:solidFill>
+                        <a:srgbClr val="FFFFFF"/>
+                      </a:solidFill>
+                      <a:prstDash val="solid"/>
+                      <a:round/>
+                      <a:headEnd type="none" w="med" len="med"/>
+                      <a:tailEnd type="none" w="med" len="med"/>
+                    </a:lnB>
+                    <a:solidFill>
+                      <a:srgbClr val="D18B87"/>
+                    </a:solidFill>
+                  </a:tcPr>
+                </a:tc>
+                <a:tc>
+                  <a:txBody>
+                    <a:bodyPr/>
+                    <a:lstStyle/>
+                    <a:p>
+                      <a:pPr algn="ctr" indent="0" marL="0">
+                        <a:buNone/>
+                      </a:pPr>
+                      <a:r>
+                        <a:rPr lang="en-US" sz="1300" dirty="0">
+                          <a:solidFill>
+                            <a:srgbClr val="1F2937"/>
+                          </a:solidFill>
+                          <a:latin typeface="Arial" pitchFamily="34" charset="0"/>
+                          <a:ea typeface="Arial" pitchFamily="34" charset="-122"/>
+                          <a:cs typeface="Arial" pitchFamily="34" charset="-120"/>
+                        </a:rPr>
+                        <a:t>-0.7  (19)</a:t>
+                      </a:r>
+                      <a:endParaRPr lang="en-US" sz="1300" dirty="0">
+                        <a:latin typeface="Arial" charset="0"/>
+                        <a:ea typeface="Arial" charset="0"/>
+                        <a:cs typeface="Arial" charset="0"/>
+                      </a:endParaRPr>
+                    </a:p>
+                  </a:txBody>
+                  <a:tcPr marL="91440" marR="91440" marT="45720" marB="45720" anchor="ctr">
+                    <a:lnL w="12700" cap="flat" cmpd="sng" algn="ctr">
+                      <a:solidFill>
+                        <a:srgbClr val="FFFFFF"/>
+                      </a:solidFill>
+                      <a:prstDash val="solid"/>
+                      <a:round/>
+                      <a:headEnd type="none" w="med" len="med"/>
+                      <a:tailEnd type="none" w="med" len="med"/>
+                    </a:lnL>
+                    <a:lnR w="12700" cap="flat" cmpd="sng" algn="ctr">
+                      <a:solidFill>
+                        <a:srgbClr val="FFFFFF"/>
+                      </a:solidFill>
+                      <a:prstDash val="solid"/>
+                      <a:round/>
+                      <a:headEnd type="none" w="med" len="med"/>
+                      <a:tailEnd type="none" w="med" len="med"/>
+                    </a:lnR>
+                    <a:lnT w="12700" cap="flat" cmpd="sng" algn="ctr">
+                      <a:solidFill>
+                        <a:srgbClr val="FFFFFF"/>
+                      </a:solidFill>
+                      <a:prstDash val="solid"/>
+                      <a:round/>
+                      <a:headEnd type="none" w="med" len="med"/>
+                      <a:tailEnd type="none" w="med" len="med"/>
+                    </a:lnT>
+                    <a:lnB w="12700" cap="flat" cmpd="sng" algn="ctr">
+                      <a:solidFill>
+                        <a:srgbClr val="FFFFFF"/>
+                      </a:solidFill>
+                      <a:prstDash val="solid"/>
+                      <a:round/>
+                      <a:headEnd type="none" w="med" len="med"/>
+                      <a:tailEnd type="none" w="med" len="med"/>
+                    </a:lnB>
+                    <a:solidFill>
+                      <a:srgbClr val="D3D9E3"/>
+                    </a:solidFill>
+                  </a:tcPr>
+                </a:tc>
+                <a:tc>
+                  <a:txBody>
+                    <a:bodyPr/>
+                    <a:lstStyle/>
+                    <a:p>
+                      <a:pPr algn="ctr" indent="0" marL="0">
+                        <a:buNone/>
+                      </a:pPr>
+                      <a:r>
+                        <a:rPr lang="en-US" sz="1300" b="1" dirty="0">
+                          <a:solidFill>
+                            <a:srgbClr val="FFFFFF"/>
+                          </a:solidFill>
+                          <a:latin typeface="Arial" pitchFamily="34" charset="0"/>
+                          <a:ea typeface="Arial" pitchFamily="34" charset="-122"/>
+                          <a:cs typeface="Arial" pitchFamily="34" charset="-120"/>
+                        </a:rPr>
+                        <a:t>+3.7  (23)</a:t>
+                      </a:r>
+                      <a:endParaRPr lang="en-US" sz="1300" dirty="0">
+                        <a:latin typeface="Arial" charset="0"/>
+                        <a:ea typeface="Arial" charset="0"/>
+                        <a:cs typeface="Arial" charset="0"/>
+                      </a:endParaRPr>
+                    </a:p>
+                  </a:txBody>
+                  <a:tcPr marL="91440" marR="91440" marT="45720" marB="45720" anchor="ctr">
+                    <a:lnL w="12700" cap="flat" cmpd="sng" algn="ctr">
+                      <a:solidFill>
+                        <a:srgbClr val="FFFFFF"/>
+                      </a:solidFill>
+                      <a:prstDash val="solid"/>
+                      <a:round/>
+                      <a:headEnd type="none" w="med" len="med"/>
+                      <a:tailEnd type="none" w="med" len="med"/>
+                    </a:lnL>
+                    <a:lnR w="12700" cap="flat" cmpd="sng" algn="ctr">
+                      <a:solidFill>
+                        <a:srgbClr val="FFFFFF"/>
+                      </a:solidFill>
+                      <a:prstDash val="solid"/>
+                      <a:round/>
+                      <a:headEnd type="none" w="med" len="med"/>
+                      <a:tailEnd type="none" w="med" len="med"/>
+                    </a:lnR>
+                    <a:lnT w="12700" cap="flat" cmpd="sng" algn="ctr">
+                      <a:solidFill>
+                        <a:srgbClr val="FFFFFF"/>
+                      </a:solidFill>
+                      <a:prstDash val="solid"/>
+                      <a:round/>
+                      <a:headEnd type="none" w="med" len="med"/>
+                      <a:tailEnd type="none" w="med" len="med"/>
+                    </a:lnT>
+                    <a:lnB w="12700" cap="flat" cmpd="sng" algn="ctr">
+                      <a:solidFill>
+                        <a:srgbClr val="FFFFFF"/>
+                      </a:solidFill>
+                      <a:prstDash val="solid"/>
+                      <a:round/>
+                      <a:headEnd type="none" w="med" len="med"/>
+                      <a:tailEnd type="none" w="med" len="med"/>
+                    </a:lnB>
+                    <a:solidFill>
+                      <a:srgbClr val="B94138"/>
+                    </a:solidFill>
+                  </a:tcPr>
+                </a:tc>
+                <a:tc>
+                  <a:txBody>
+                    <a:bodyPr/>
+                    <a:lstStyle/>
+                    <a:p>
+                      <a:pPr algn="ctr" indent="0" marL="0">
+                        <a:buNone/>
+                      </a:pPr>
+                      <a:r>
+                        <a:rPr lang="en-US" sz="1300" b="1" dirty="0">
+                          <a:solidFill>
+                            <a:srgbClr val="1F2937"/>
+                          </a:solidFill>
+                          <a:latin typeface="Arial" pitchFamily="34" charset="0"/>
+                          <a:ea typeface="Arial" pitchFamily="34" charset="-122"/>
+                          <a:cs typeface="Arial" pitchFamily="34" charset="-120"/>
+                        </a:rPr>
+                        <a:t>+2.1  (14)</a:t>
+                      </a:r>
+                      <a:endParaRPr lang="en-US" sz="1300" dirty="0">
+                        <a:latin typeface="Arial" charset="0"/>
+                        <a:ea typeface="Arial" charset="0"/>
+                        <a:cs typeface="Arial" charset="0"/>
+                      </a:endParaRPr>
+                    </a:p>
+                  </a:txBody>
+                  <a:tcPr marL="91440" marR="91440" marT="45720" marB="45720" anchor="ctr">
+                    <a:lnL w="12700" cap="flat" cmpd="sng" algn="ctr">
+                      <a:solidFill>
+                        <a:srgbClr val="FFFFFF"/>
+                      </a:solidFill>
+                      <a:prstDash val="solid"/>
+                      <a:round/>
+                      <a:headEnd type="none" w="med" len="med"/>
+                      <a:tailEnd type="none" w="med" len="med"/>
+                    </a:lnL>
+                    <a:lnR w="12700" cap="flat" cmpd="sng" algn="ctr">
+                      <a:solidFill>
+                        <a:srgbClr val="FFFFFF"/>
+                      </a:solidFill>
+                      <a:prstDash val="solid"/>
+                      <a:round/>
+                      <a:headEnd type="none" w="med" len="med"/>
+                      <a:tailEnd type="none" w="med" len="med"/>
+                    </a:lnR>
+                    <a:lnT w="12700" cap="flat" cmpd="sng" algn="ctr">
+                      <a:solidFill>
+                        <a:srgbClr val="FFFFFF"/>
+                      </a:solidFill>
+                      <a:prstDash val="solid"/>
+                      <a:round/>
+                      <a:headEnd type="none" w="med" len="med"/>
+                      <a:tailEnd type="none" w="med" len="med"/>
+                    </a:lnT>
+                    <a:lnB w="12700" cap="flat" cmpd="sng" algn="ctr">
+                      <a:solidFill>
+                        <a:srgbClr val="FFFFFF"/>
+                      </a:solidFill>
+                      <a:prstDash val="solid"/>
+                      <a:round/>
+                      <a:headEnd type="none" w="med" len="med"/>
+                      <a:tailEnd type="none" w="med" len="med"/>
+                    </a:lnB>
+                    <a:solidFill>
+                      <a:srgbClr val="D38F8B"/>
+                    </a:solidFill>
+                  </a:tcPr>
+                </a:tc>
+                <a:tc>
+                  <a:txBody>
+                    <a:bodyPr/>
+                    <a:lstStyle/>
+                    <a:p>
+                      <a:pPr algn="ctr" indent="0" marL="0">
+                        <a:buNone/>
+                      </a:pPr>
+                      <a:r>
+                        <a:rPr lang="en-US" sz="1300" dirty="0">
+                          <a:solidFill>
+                            <a:srgbClr val="1F2937"/>
+                          </a:solidFill>
+                          <a:latin typeface="Arial" pitchFamily="34" charset="0"/>
+                          <a:ea typeface="Arial" pitchFamily="34" charset="-122"/>
+                          <a:cs typeface="Arial" pitchFamily="34" charset="-120"/>
+                        </a:rPr>
+                        <a:t>+0.4  (19)</a:t>
+                      </a:r>
+                      <a:endParaRPr lang="en-US" sz="1300" dirty="0">
+                        <a:latin typeface="Arial" charset="0"/>
+                        <a:ea typeface="Arial" charset="0"/>
+                        <a:cs typeface="Arial" charset="0"/>
+                      </a:endParaRPr>
+                    </a:p>
+                  </a:txBody>
+                  <a:tcPr marL="91440" marR="91440" marT="45720" marB="45720" anchor="ctr">
+                    <a:lnL w="12700" cap="flat" cmpd="sng" algn="ctr">
+                      <a:solidFill>
+                        <a:srgbClr val="FFFFFF"/>
+                      </a:solidFill>
+                      <a:prstDash val="solid"/>
+                      <a:round/>
+                      <a:headEnd type="none" w="med" len="med"/>
+                      <a:tailEnd type="none" w="med" len="med"/>
+                    </a:lnL>
+                    <a:lnR w="12700" cap="flat" cmpd="sng" algn="ctr">
+                      <a:solidFill>
+                        <a:srgbClr val="FFFFFF"/>
+                      </a:solidFill>
+                      <a:prstDash val="solid"/>
+                      <a:round/>
+                      <a:headEnd type="none" w="med" len="med"/>
+                      <a:tailEnd type="none" w="med" len="med"/>
+                    </a:lnR>
+                    <a:lnT w="12700" cap="flat" cmpd="sng" algn="ctr">
+                      <a:solidFill>
+                        <a:srgbClr val="FFFFFF"/>
+                      </a:solidFill>
+                      <a:prstDash val="solid"/>
+                      <a:round/>
+                      <a:headEnd type="none" w="med" len="med"/>
+                      <a:tailEnd type="none" w="med" len="med"/>
+                    </a:lnT>
+                    <a:lnB w="12700" cap="flat" cmpd="sng" algn="ctr">
+                      <a:solidFill>
+                        <a:srgbClr val="FFFFFF"/>
+                      </a:solidFill>
+                      <a:prstDash val="solid"/>
+                      <a:round/>
+                      <a:headEnd type="none" w="med" len="med"/>
+                      <a:tailEnd type="none" w="med" len="med"/>
+                    </a:lnB>
+                    <a:solidFill>
+                      <a:srgbClr val="EDE3E4"/>
+                    </a:solidFill>
+                  </a:tcPr>
+                </a:tc>
+              </a:tr>
+              <a:tr h="438912">
+                <a:tc>
+                  <a:txBody>
+                    <a:bodyPr/>
+                    <a:lstStyle/>
+                    <a:p>
+                      <a:pPr algn="r" indent="0" marL="0">
+                        <a:buNone/>
+                      </a:pPr>
+                      <a:r>
+                        <a:rPr lang="en-US" sz="1400" b="1" dirty="0">
+                          <a:solidFill>
+                            <a:srgbClr val="1F2937"/>
+                          </a:solidFill>
+                          <a:latin typeface="Arial" pitchFamily="34" charset="0"/>
+                          <a:ea typeface="Arial" pitchFamily="34" charset="-122"/>
+                          <a:cs typeface="Arial" pitchFamily="34" charset="-120"/>
+                        </a:rPr>
+                        <a:t>EWSR1</a:t>
+                      </a:r>
+                      <a:endParaRPr lang="en-US" sz="1400" dirty="0">
+                        <a:latin typeface="Arial" charset="0"/>
+                        <a:ea typeface="Arial" charset="0"/>
+                        <a:cs typeface="Arial" charset="0"/>
+                      </a:endParaRPr>
+                    </a:p>
+                  </a:txBody>
+                  <a:tcPr marL="91440" marR="91440" marT="45720" marB="45720" anchor="ctr">
+                    <a:lnL w="12700" cap="flat" cmpd="sng" algn="ctr">
+                      <a:solidFill>
+                        <a:srgbClr val="FFFFFF"/>
+                      </a:solidFill>
+                      <a:prstDash val="solid"/>
+                      <a:round/>
+                      <a:headEnd type="none" w="med" len="med"/>
+                      <a:tailEnd type="none" w="med" len="med"/>
+                    </a:lnL>
+                    <a:lnR w="12700" cap="flat" cmpd="sng" algn="ctr">
+                      <a:solidFill>
+                        <a:srgbClr val="FFFFFF"/>
+                      </a:solidFill>
+                      <a:prstDash val="solid"/>
+                      <a:round/>
+                      <a:headEnd type="none" w="med" len="med"/>
+                      <a:tailEnd type="none" w="med" len="med"/>
+                    </a:lnR>
+                    <a:lnT w="12700" cap="flat" cmpd="sng" algn="ctr">
+                      <a:solidFill>
+                        <a:srgbClr val="FFFFFF"/>
+                      </a:solidFill>
+                      <a:prstDash val="solid"/>
+                      <a:round/>
+                      <a:headEnd type="none" w="med" len="med"/>
+                      <a:tailEnd type="none" w="med" len="med"/>
+                    </a:lnT>
+                    <a:lnB w="12700" cap="flat" cmpd="sng" algn="ctr">
+                      <a:solidFill>
+                        <a:srgbClr val="FFFFFF"/>
+                      </a:solidFill>
+                      <a:prstDash val="solid"/>
+                      <a:round/>
+                      <a:headEnd type="none" w="med" len="med"/>
+                      <a:tailEnd type="none" w="med" len="med"/>
+                    </a:lnB>
+                  </a:tcPr>
+                </a:tc>
+                <a:tc>
+                  <a:txBody>
+                    <a:bodyPr/>
+                    <a:lstStyle/>
+                    <a:p>
+                      <a:pPr algn="ctr" indent="0" marL="0">
+                        <a:buNone/>
+                      </a:pPr>
+                      <a:r>
+                        <a:rPr lang="en-US" sz="1300" dirty="0">
+                          <a:solidFill>
+                            <a:srgbClr val="1F2937"/>
+                          </a:solidFill>
+                          <a:latin typeface="Arial" pitchFamily="34" charset="0"/>
+                          <a:ea typeface="Arial" pitchFamily="34" charset="-122"/>
+                          <a:cs typeface="Arial" pitchFamily="34" charset="-120"/>
+                        </a:rPr>
+                        <a:t>+0.4  (29)</a:t>
+                      </a:r>
+                      <a:endParaRPr lang="en-US" sz="1300" dirty="0">
+                        <a:latin typeface="Arial" charset="0"/>
+                        <a:ea typeface="Arial" charset="0"/>
+                        <a:cs typeface="Arial" charset="0"/>
+                      </a:endParaRPr>
+                    </a:p>
+                  </a:txBody>
+                  <a:tcPr marL="91440" marR="91440" marT="45720" marB="45720" anchor="ctr">
+                    <a:lnL w="12700" cap="flat" cmpd="sng" algn="ctr">
+                      <a:solidFill>
+                        <a:srgbClr val="FFFFFF"/>
+                      </a:solidFill>
+                      <a:prstDash val="solid"/>
+                      <a:round/>
+                      <a:headEnd type="none" w="med" len="med"/>
+                      <a:tailEnd type="none" w="med" len="med"/>
+                    </a:lnL>
+                    <a:lnR w="12700" cap="flat" cmpd="sng" algn="ctr">
+                      <a:solidFill>
+                        <a:srgbClr val="FFFFFF"/>
+                      </a:solidFill>
+                      <a:prstDash val="solid"/>
+                      <a:round/>
+                      <a:headEnd type="none" w="med" len="med"/>
+                      <a:tailEnd type="none" w="med" len="med"/>
+                    </a:lnR>
+                    <a:lnT w="12700" cap="flat" cmpd="sng" algn="ctr">
+                      <a:solidFill>
+                        <a:srgbClr val="FFFFFF"/>
+                      </a:solidFill>
+                      <a:prstDash val="solid"/>
+                      <a:round/>
+                      <a:headEnd type="none" w="med" len="med"/>
+                      <a:tailEnd type="none" w="med" len="med"/>
+                    </a:lnT>
+                    <a:lnB w="12700" cap="flat" cmpd="sng" algn="ctr">
+                      <a:solidFill>
+                        <a:srgbClr val="FFFFFF"/>
+                      </a:solidFill>
+                      <a:prstDash val="solid"/>
+                      <a:round/>
+                      <a:headEnd type="none" w="med" len="med"/>
+                      <a:tailEnd type="none" w="med" len="med"/>
+                    </a:lnB>
+                    <a:solidFill>
+                      <a:srgbClr val="EDE2E3"/>
+                    </a:solidFill>
+                  </a:tcPr>
+                </a:tc>
+                <a:tc>
+                  <a:txBody>
+                    <a:bodyPr/>
+                    <a:lstStyle/>
+                    <a:p>
+                      <a:pPr algn="ctr" indent="0" marL="0">
+                        <a:buNone/>
+                      </a:pPr>
+                      <a:r>
+                        <a:rPr lang="en-US" sz="1300" dirty="0">
+                          <a:solidFill>
+                            <a:srgbClr val="1F2937"/>
+                          </a:solidFill>
+                          <a:latin typeface="Arial" pitchFamily="34" charset="0"/>
+                          <a:ea typeface="Arial" pitchFamily="34" charset="-122"/>
+                          <a:cs typeface="Arial" pitchFamily="34" charset="-120"/>
+                        </a:rPr>
+                        <a:t>+0.7  (16)</a:t>
+                      </a:r>
+                      <a:endParaRPr lang="en-US" sz="1300" dirty="0">
+                        <a:latin typeface="Arial" charset="0"/>
+                        <a:ea typeface="Arial" charset="0"/>
+                        <a:cs typeface="Arial" charset="0"/>
+                      </a:endParaRPr>
+                    </a:p>
+                  </a:txBody>
+                  <a:tcPr marL="91440" marR="91440" marT="45720" marB="45720" anchor="ctr">
+                    <a:lnL w="12700" cap="flat" cmpd="sng" algn="ctr">
+                      <a:solidFill>
+                        <a:srgbClr val="FFFFFF"/>
+                      </a:solidFill>
+                      <a:prstDash val="solid"/>
+                      <a:round/>
+                      <a:headEnd type="none" w="med" len="med"/>
+                      <a:tailEnd type="none" w="med" len="med"/>
+                    </a:lnL>
+                    <a:lnR w="12700" cap="flat" cmpd="sng" algn="ctr">
+                      <a:solidFill>
+                        <a:srgbClr val="FFFFFF"/>
+                      </a:solidFill>
+                      <a:prstDash val="solid"/>
+                      <a:round/>
+                      <a:headEnd type="none" w="med" len="med"/>
+                      <a:tailEnd type="none" w="med" len="med"/>
+                    </a:lnR>
+                    <a:lnT w="12700" cap="flat" cmpd="sng" algn="ctr">
+                      <a:solidFill>
+                        <a:srgbClr val="FFFFFF"/>
+                      </a:solidFill>
+                      <a:prstDash val="solid"/>
+                      <a:round/>
+                      <a:headEnd type="none" w="med" len="med"/>
+                      <a:tailEnd type="none" w="med" len="med"/>
+                    </a:lnT>
+                    <a:lnB w="12700" cap="flat" cmpd="sng" algn="ctr">
+                      <a:solidFill>
+                        <a:srgbClr val="FFFFFF"/>
+                      </a:solidFill>
+                      <a:prstDash val="solid"/>
+                      <a:round/>
+                      <a:headEnd type="none" w="med" len="med"/>
+                      <a:tailEnd type="none" w="med" len="med"/>
+                    </a:lnB>
+                    <a:solidFill>
+                      <a:srgbClr val="E8D1D1"/>
+                    </a:solidFill>
+                  </a:tcPr>
+                </a:tc>
+                <a:tc>
+                  <a:txBody>
+                    <a:bodyPr/>
+                    <a:lstStyle/>
+                    <a:p>
+                      <a:pPr algn="ctr" indent="0" marL="0">
+                        <a:buNone/>
+                      </a:pPr>
+                      <a:r>
+                        <a:rPr lang="en-US" sz="1300" dirty="0">
+                          <a:solidFill>
+                            <a:srgbClr val="1F2937"/>
+                          </a:solidFill>
+                          <a:latin typeface="Arial" pitchFamily="34" charset="0"/>
+                          <a:ea typeface="Arial" pitchFamily="34" charset="-122"/>
+                          <a:cs typeface="Arial" pitchFamily="34" charset="-120"/>
+                        </a:rPr>
+                        <a:t>0.0  (18)</a:t>
+                      </a:r>
+                      <a:endParaRPr lang="en-US" sz="1300" dirty="0">
+                        <a:latin typeface="Arial" charset="0"/>
+                        <a:ea typeface="Arial" charset="0"/>
+                        <a:cs typeface="Arial" charset="0"/>
+                      </a:endParaRPr>
+                    </a:p>
+                  </a:txBody>
+                  <a:tcPr marL="91440" marR="91440" marT="45720" marB="45720" anchor="ctr">
+                    <a:lnL w="12700" cap="flat" cmpd="sng" algn="ctr">
+                      <a:solidFill>
+                        <a:srgbClr val="FFFFFF"/>
+                      </a:solidFill>
+                      <a:prstDash val="solid"/>
+                      <a:round/>
+                      <a:headEnd type="none" w="med" len="med"/>
+                      <a:tailEnd type="none" w="med" len="med"/>
+                    </a:lnL>
+                    <a:lnR w="12700" cap="flat" cmpd="sng" algn="ctr">
+                      <a:solidFill>
+                        <a:srgbClr val="FFFFFF"/>
+                      </a:solidFill>
+                      <a:prstDash val="solid"/>
+                      <a:round/>
+                      <a:headEnd type="none" w="med" len="med"/>
+                      <a:tailEnd type="none" w="med" len="med"/>
+                    </a:lnR>
+                    <a:lnT w="12700" cap="flat" cmpd="sng" algn="ctr">
+                      <a:solidFill>
+                        <a:srgbClr val="FFFFFF"/>
+                      </a:solidFill>
+                      <a:prstDash val="solid"/>
+                      <a:round/>
+                      <a:headEnd type="none" w="med" len="med"/>
+                      <a:tailEnd type="none" w="med" len="med"/>
+                    </a:lnT>
+                    <a:lnB w="12700" cap="flat" cmpd="sng" algn="ctr">
+                      <a:solidFill>
+                        <a:srgbClr val="FFFFFF"/>
+                      </a:solidFill>
+                      <a:prstDash val="solid"/>
+                      <a:round/>
+                      <a:headEnd type="none" w="med" len="med"/>
+                      <a:tailEnd type="none" w="med" len="med"/>
+                    </a:lnB>
+                    <a:solidFill>
+                      <a:srgbClr val="F3F4F6"/>
+                    </a:solidFill>
+                  </a:tcPr>
+                </a:tc>
+                <a:tc>
+                  <a:txBody>
+                    <a:bodyPr/>
+                    <a:lstStyle/>
+                    <a:p>
+                      <a:pPr algn="ctr" indent="0" marL="0">
+                        <a:buNone/>
+                      </a:pPr>
+                      <a:r>
+                        <a:rPr lang="en-US" sz="1300" b="1" dirty="0">
+                          <a:solidFill>
+                            <a:srgbClr val="FFFFFF"/>
+                          </a:solidFill>
+                          <a:latin typeface="Arial" pitchFamily="34" charset="0"/>
+                          <a:ea typeface="Arial" pitchFamily="34" charset="-122"/>
+                          <a:cs typeface="Arial" pitchFamily="34" charset="-120"/>
+                        </a:rPr>
+                        <a:t>+3.1  (29)</a:t>
+                      </a:r>
+                      <a:endParaRPr lang="en-US" sz="1300" dirty="0">
+                        <a:latin typeface="Arial" charset="0"/>
+                        <a:ea typeface="Arial" charset="0"/>
+                        <a:cs typeface="Arial" charset="0"/>
+                      </a:endParaRPr>
+                    </a:p>
+                  </a:txBody>
+                  <a:tcPr marL="91440" marR="91440" marT="45720" marB="45720" anchor="ctr">
+                    <a:lnL w="12700" cap="flat" cmpd="sng" algn="ctr">
+                      <a:solidFill>
+                        <a:srgbClr val="FFFFFF"/>
+                      </a:solidFill>
+                      <a:prstDash val="solid"/>
+                      <a:round/>
+                      <a:headEnd type="none" w="med" len="med"/>
+                      <a:tailEnd type="none" w="med" len="med"/>
+                    </a:lnL>
+                    <a:lnR w="12700" cap="flat" cmpd="sng" algn="ctr">
+                      <a:solidFill>
+                        <a:srgbClr val="FFFFFF"/>
+                      </a:solidFill>
+                      <a:prstDash val="solid"/>
+                      <a:round/>
+                      <a:headEnd type="none" w="med" len="med"/>
+                      <a:tailEnd type="none" w="med" len="med"/>
+                    </a:lnR>
+                    <a:lnT w="12700" cap="flat" cmpd="sng" algn="ctr">
+                      <a:solidFill>
+                        <a:srgbClr val="FFFFFF"/>
+                      </a:solidFill>
+                      <a:prstDash val="solid"/>
+                      <a:round/>
+                      <a:headEnd type="none" w="med" len="med"/>
+                      <a:tailEnd type="none" w="med" len="med"/>
+                    </a:lnT>
+                    <a:lnB w="12700" cap="flat" cmpd="sng" algn="ctr">
+                      <a:solidFill>
+                        <a:srgbClr val="FFFFFF"/>
+                      </a:solidFill>
+                      <a:prstDash val="solid"/>
+                      <a:round/>
+                      <a:headEnd type="none" w="med" len="med"/>
+                      <a:tailEnd type="none" w="med" len="med"/>
+                    </a:lnB>
+                    <a:solidFill>
+                      <a:srgbClr val="C25C56"/>
+                    </a:solidFill>
+                  </a:tcPr>
+                </a:tc>
+                <a:tc>
+                  <a:txBody>
+                    <a:bodyPr/>
+                    <a:lstStyle/>
+                    <a:p>
+                      <a:pPr algn="ctr" indent="0" marL="0">
+                        <a:buNone/>
+                      </a:pPr>
+                      <a:r>
+                        <a:rPr lang="en-US" sz="1300" dirty="0">
+                          <a:solidFill>
+                            <a:srgbClr val="1F2937"/>
+                          </a:solidFill>
+                          <a:latin typeface="Arial" pitchFamily="34" charset="0"/>
+                          <a:ea typeface="Arial" pitchFamily="34" charset="-122"/>
+                          <a:cs typeface="Arial" pitchFamily="34" charset="-120"/>
+                        </a:rPr>
+                        <a:t>+0.8  (16)</a:t>
+                      </a:r>
+                      <a:endParaRPr lang="en-US" sz="1300" dirty="0">
+                        <a:latin typeface="Arial" charset="0"/>
+                        <a:ea typeface="Arial" charset="0"/>
+                        <a:cs typeface="Arial" charset="0"/>
+                      </a:endParaRPr>
+                    </a:p>
+                  </a:txBody>
+                  <a:tcPr marL="91440" marR="91440" marT="45720" marB="45720" anchor="ctr">
+                    <a:lnL w="12700" cap="flat" cmpd="sng" algn="ctr">
+                      <a:solidFill>
+                        <a:srgbClr val="FFFFFF"/>
+                      </a:solidFill>
+                      <a:prstDash val="solid"/>
+                      <a:round/>
+                      <a:headEnd type="none" w="med" len="med"/>
+                      <a:tailEnd type="none" w="med" len="med"/>
+                    </a:lnL>
+                    <a:lnR w="12700" cap="flat" cmpd="sng" algn="ctr">
+                      <a:solidFill>
+                        <a:srgbClr val="FFFFFF"/>
+                      </a:solidFill>
+                      <a:prstDash val="solid"/>
+                      <a:round/>
+                      <a:headEnd type="none" w="med" len="med"/>
+                      <a:tailEnd type="none" w="med" len="med"/>
+                    </a:lnR>
+                    <a:lnT w="12700" cap="flat" cmpd="sng" algn="ctr">
+                      <a:solidFill>
+                        <a:srgbClr val="FFFFFF"/>
+                      </a:solidFill>
+                      <a:prstDash val="solid"/>
+                      <a:round/>
+                      <a:headEnd type="none" w="med" len="med"/>
+                      <a:tailEnd type="none" w="med" len="med"/>
+                    </a:lnT>
+                    <a:lnB w="12700" cap="flat" cmpd="sng" algn="ctr">
+                      <a:solidFill>
+                        <a:srgbClr val="FFFFFF"/>
+                      </a:solidFill>
+                      <a:prstDash val="solid"/>
+                      <a:round/>
+                      <a:headEnd type="none" w="med" len="med"/>
+                      <a:tailEnd type="none" w="med" len="med"/>
+                    </a:lnB>
+                    <a:solidFill>
+                      <a:srgbClr val="E7CECE"/>
+                    </a:solidFill>
+                  </a:tcPr>
+                </a:tc>
+                <a:tc>
+                  <a:txBody>
+                    <a:bodyPr/>
+                    <a:lstStyle/>
+                    <a:p>
+                      <a:pPr algn="ctr" indent="0" marL="0">
+                        <a:buNone/>
+                      </a:pPr>
+                      <a:r>
+                        <a:rPr lang="en-US" sz="1300" b="1" dirty="0">
+                          <a:solidFill>
+                            <a:srgbClr val="FFFFFF"/>
+                          </a:solidFill>
+                          <a:latin typeface="Arial" pitchFamily="34" charset="0"/>
+                          <a:ea typeface="Arial" pitchFamily="34" charset="-122"/>
+                          <a:cs typeface="Arial" pitchFamily="34" charset="-120"/>
+                        </a:rPr>
+                        <a:t>+2.6  (18)</a:t>
+                      </a:r>
+                      <a:endParaRPr lang="en-US" sz="1300" dirty="0">
+                        <a:latin typeface="Arial" charset="0"/>
+                        <a:ea typeface="Arial" charset="0"/>
+                        <a:cs typeface="Arial" charset="0"/>
+                      </a:endParaRPr>
+                    </a:p>
+                  </a:txBody>
+                  <a:tcPr marL="91440" marR="91440" marT="45720" marB="45720" anchor="ctr">
+                    <a:lnL w="12700" cap="flat" cmpd="sng" algn="ctr">
+                      <a:solidFill>
+                        <a:srgbClr val="FFFFFF"/>
+                      </a:solidFill>
+                      <a:prstDash val="solid"/>
+                      <a:round/>
+                      <a:headEnd type="none" w="med" len="med"/>
+                      <a:tailEnd type="none" w="med" len="med"/>
+                    </a:lnL>
+                    <a:lnR w="12700" cap="flat" cmpd="sng" algn="ctr">
+                      <a:solidFill>
+                        <a:srgbClr val="FFFFFF"/>
+                      </a:solidFill>
+                      <a:prstDash val="solid"/>
+                      <a:round/>
+                      <a:headEnd type="none" w="med" len="med"/>
+                      <a:tailEnd type="none" w="med" len="med"/>
+                    </a:lnR>
+                    <a:lnT w="12700" cap="flat" cmpd="sng" algn="ctr">
+                      <a:solidFill>
+                        <a:srgbClr val="FFFFFF"/>
+                      </a:solidFill>
+                      <a:prstDash val="solid"/>
+                      <a:round/>
+                      <a:headEnd type="none" w="med" len="med"/>
+                      <a:tailEnd type="none" w="med" len="med"/>
+                    </a:lnT>
+                    <a:lnB w="12700" cap="flat" cmpd="sng" algn="ctr">
+                      <a:solidFill>
+                        <a:srgbClr val="FFFFFF"/>
+                      </a:solidFill>
+                      <a:prstDash val="solid"/>
+                      <a:round/>
+                      <a:headEnd type="none" w="med" len="med"/>
+                      <a:tailEnd type="none" w="med" len="med"/>
+                    </a:lnB>
+                    <a:solidFill>
+                      <a:srgbClr val="CA756F"/>
+                    </a:solidFill>
+                  </a:tcPr>
+                </a:tc>
+              </a:tr>
+              <a:tr h="438912">
+                <a:tc>
+                  <a:txBody>
+                    <a:bodyPr/>
+                    <a:lstStyle/>
+                    <a:p>
+                      <a:pPr algn="r" indent="0" marL="0">
+                        <a:buNone/>
+                      </a:pPr>
+                      <a:r>
+                        <a:rPr lang="en-US" sz="1400" b="1" dirty="0">
+                          <a:solidFill>
+                            <a:srgbClr val="1F2937"/>
+                          </a:solidFill>
+                          <a:latin typeface="Arial" pitchFamily="34" charset="0"/>
+                          <a:ea typeface="Arial" pitchFamily="34" charset="-122"/>
+                          <a:cs typeface="Arial" pitchFamily="34" charset="-120"/>
+                        </a:rPr>
+                        <a:t>TAF15</a:t>
+                      </a:r>
+                      <a:endParaRPr lang="en-US" sz="1400" dirty="0">
+                        <a:latin typeface="Arial" charset="0"/>
+                        <a:ea typeface="Arial" charset="0"/>
+                        <a:cs typeface="Arial" charset="0"/>
+                      </a:endParaRPr>
+                    </a:p>
+                  </a:txBody>
+                  <a:tcPr marL="91440" marR="91440" marT="45720" marB="45720" anchor="ctr">
+                    <a:lnL w="12700" cap="flat" cmpd="sng" algn="ctr">
+                      <a:solidFill>
+                        <a:srgbClr val="FFFFFF"/>
+                      </a:solidFill>
+                      <a:prstDash val="solid"/>
+                      <a:round/>
+                      <a:headEnd type="none" w="med" len="med"/>
+                      <a:tailEnd type="none" w="med" len="med"/>
+                    </a:lnL>
+                    <a:lnR w="12700" cap="flat" cmpd="sng" algn="ctr">
+                      <a:solidFill>
+                        <a:srgbClr val="FFFFFF"/>
+                      </a:solidFill>
+                      <a:prstDash val="solid"/>
+                      <a:round/>
+                      <a:headEnd type="none" w="med" len="med"/>
+                      <a:tailEnd type="none" w="med" len="med"/>
+                    </a:lnR>
+                    <a:lnT w="12700" cap="flat" cmpd="sng" algn="ctr">
+                      <a:solidFill>
+                        <a:srgbClr val="FFFFFF"/>
+                      </a:solidFill>
+                      <a:prstDash val="solid"/>
+                      <a:round/>
+                      <a:headEnd type="none" w="med" len="med"/>
+                      <a:tailEnd type="none" w="med" len="med"/>
+                    </a:lnT>
+                    <a:lnB w="12700" cap="flat" cmpd="sng" algn="ctr">
+                      <a:solidFill>
+                        <a:srgbClr val="FFFFFF"/>
+                      </a:solidFill>
+                      <a:prstDash val="solid"/>
+                      <a:round/>
+                      <a:headEnd type="none" w="med" len="med"/>
+                      <a:tailEnd type="none" w="med" len="med"/>
+                    </a:lnB>
+                  </a:tcPr>
+                </a:tc>
+                <a:tc>
+                  <a:txBody>
+                    <a:bodyPr/>
+                    <a:lstStyle/>
+                    <a:p>
+                      <a:pPr algn="ctr" indent="0" marL="0">
+                        <a:buNone/>
+                      </a:pPr>
+                      <a:r>
+                        <a:rPr lang="en-US" sz="1300" dirty="0">
+                          <a:solidFill>
+                            <a:srgbClr val="1F2937"/>
+                          </a:solidFill>
+                          <a:latin typeface="Arial" pitchFamily="34" charset="0"/>
+                          <a:ea typeface="Arial" pitchFamily="34" charset="-122"/>
+                          <a:cs typeface="Arial" pitchFamily="34" charset="-120"/>
+                        </a:rPr>
+                        <a:t>-0.5  (33)</a:t>
+                      </a:r>
+                      <a:endParaRPr lang="en-US" sz="1300" dirty="0">
+                        <a:latin typeface="Arial" charset="0"/>
+                        <a:ea typeface="Arial" charset="0"/>
+                        <a:cs typeface="Arial" charset="0"/>
+                      </a:endParaRPr>
+                    </a:p>
+                  </a:txBody>
+                  <a:tcPr marL="91440" marR="91440" marT="45720" marB="45720" anchor="ctr">
+                    <a:lnL w="12700" cap="flat" cmpd="sng" algn="ctr">
+                      <a:solidFill>
+                        <a:srgbClr val="FFFFFF"/>
+                      </a:solidFill>
+                      <a:prstDash val="solid"/>
+                      <a:round/>
+                      <a:headEnd type="none" w="med" len="med"/>
+                      <a:tailEnd type="none" w="med" len="med"/>
+                    </a:lnL>
+                    <a:lnR w="12700" cap="flat" cmpd="sng" algn="ctr">
+                      <a:solidFill>
+                        <a:srgbClr val="FFFFFF"/>
+                      </a:solidFill>
+                      <a:prstDash val="solid"/>
+                      <a:round/>
+                      <a:headEnd type="none" w="med" len="med"/>
+                      <a:tailEnd type="none" w="med" len="med"/>
+                    </a:lnR>
+                    <a:lnT w="12700" cap="flat" cmpd="sng" algn="ctr">
+                      <a:solidFill>
+                        <a:srgbClr val="FFFFFF"/>
+                      </a:solidFill>
+                      <a:prstDash val="solid"/>
+                      <a:round/>
+                      <a:headEnd type="none" w="med" len="med"/>
+                      <a:tailEnd type="none" w="med" len="med"/>
+                    </a:lnT>
+                    <a:lnB w="12700" cap="flat" cmpd="sng" algn="ctr">
+                      <a:solidFill>
+                        <a:srgbClr val="FFFFFF"/>
+                      </a:solidFill>
+                      <a:prstDash val="solid"/>
+                      <a:round/>
+                      <a:headEnd type="none" w="med" len="med"/>
+                      <a:tailEnd type="none" w="med" len="med"/>
+                    </a:lnB>
+                    <a:solidFill>
+                      <a:srgbClr val="DBE0E8"/>
+                    </a:solidFill>
+                  </a:tcPr>
+                </a:tc>
+                <a:tc>
+                  <a:txBody>
+                    <a:bodyPr/>
+                    <a:lstStyle/>
+                    <a:p>
+                      <a:pPr algn="ctr" indent="0" marL="0">
+                        <a:buNone/>
+                      </a:pPr>
+                      <a:r>
+                        <a:rPr lang="en-US" sz="1300" dirty="0">
+                          <a:solidFill>
+                            <a:srgbClr val="1F2937"/>
+                          </a:solidFill>
+                          <a:latin typeface="Arial" pitchFamily="34" charset="0"/>
+                          <a:ea typeface="Arial" pitchFamily="34" charset="-122"/>
+                          <a:cs typeface="Arial" pitchFamily="34" charset="-120"/>
+                        </a:rPr>
+                        <a:t>-0.9  (14)</a:t>
+                      </a:r>
+                      <a:endParaRPr lang="en-US" sz="1300" dirty="0">
+                        <a:latin typeface="Arial" charset="0"/>
+                        <a:ea typeface="Arial" charset="0"/>
+                        <a:cs typeface="Arial" charset="0"/>
+                      </a:endParaRPr>
+                    </a:p>
+                  </a:txBody>
+                  <a:tcPr marL="91440" marR="91440" marT="45720" marB="45720" anchor="ctr">
+                    <a:lnL w="12700" cap="flat" cmpd="sng" algn="ctr">
+                      <a:solidFill>
+                        <a:srgbClr val="FFFFFF"/>
+                      </a:solidFill>
+                      <a:prstDash val="solid"/>
+                      <a:round/>
+                      <a:headEnd type="none" w="med" len="med"/>
+                      <a:tailEnd type="none" w="med" len="med"/>
+                    </a:lnL>
+                    <a:lnR w="12700" cap="flat" cmpd="sng" algn="ctr">
+                      <a:solidFill>
+                        <a:srgbClr val="FFFFFF"/>
+                      </a:solidFill>
+                      <a:prstDash val="solid"/>
+                      <a:round/>
+                      <a:headEnd type="none" w="med" len="med"/>
+                      <a:tailEnd type="none" w="med" len="med"/>
+                    </a:lnR>
+                    <a:lnT w="12700" cap="flat" cmpd="sng" algn="ctr">
+                      <a:solidFill>
+                        <a:srgbClr val="FFFFFF"/>
+                      </a:solidFill>
+                      <a:prstDash val="solid"/>
+                      <a:round/>
+                      <a:headEnd type="none" w="med" len="med"/>
+                      <a:tailEnd type="none" w="med" len="med"/>
+                    </a:lnT>
+                    <a:lnB w="12700" cap="flat" cmpd="sng" algn="ctr">
+                      <a:solidFill>
+                        <a:srgbClr val="FFFFFF"/>
+                      </a:solidFill>
+                      <a:prstDash val="solid"/>
+                      <a:round/>
+                      <a:headEnd type="none" w="med" len="med"/>
+                      <a:tailEnd type="none" w="med" len="med"/>
+                    </a:lnB>
+                    <a:solidFill>
+                      <a:srgbClr val="C8D0DD"/>
+                    </a:solidFill>
+                  </a:tcPr>
+                </a:tc>
+                <a:tc>
+                  <a:txBody>
+                    <a:bodyPr/>
+                    <a:lstStyle/>
+                    <a:p>
+                      <a:pPr algn="ctr" indent="0" marL="0">
+                        <a:buNone/>
+                      </a:pPr>
+                      <a:r>
+                        <a:rPr lang="en-US" sz="1300" dirty="0">
+                          <a:solidFill>
+                            <a:srgbClr val="1F2937"/>
+                          </a:solidFill>
+                          <a:latin typeface="Arial" pitchFamily="34" charset="0"/>
+                          <a:ea typeface="Arial" pitchFamily="34" charset="-122"/>
+                          <a:cs typeface="Arial" pitchFamily="34" charset="-120"/>
+                        </a:rPr>
+                        <a:t>+1.6  (9)</a:t>
+                      </a:r>
+                      <a:endParaRPr lang="en-US" sz="1300" dirty="0">
+                        <a:latin typeface="Arial" charset="0"/>
+                        <a:ea typeface="Arial" charset="0"/>
+                        <a:cs typeface="Arial" charset="0"/>
+                      </a:endParaRPr>
+                    </a:p>
+                  </a:txBody>
+                  <a:tcPr marL="91440" marR="91440" marT="45720" marB="45720" anchor="ctr">
+                    <a:lnL w="12700" cap="flat" cmpd="sng" algn="ctr">
+                      <a:solidFill>
+                        <a:srgbClr val="FFFFFF"/>
+                      </a:solidFill>
+                      <a:prstDash val="solid"/>
+                      <a:round/>
+                      <a:headEnd type="none" w="med" len="med"/>
+                      <a:tailEnd type="none" w="med" len="med"/>
+                    </a:lnL>
+                    <a:lnR w="12700" cap="flat" cmpd="sng" algn="ctr">
+                      <a:solidFill>
+                        <a:srgbClr val="FFFFFF"/>
+                      </a:solidFill>
+                      <a:prstDash val="solid"/>
+                      <a:round/>
+                      <a:headEnd type="none" w="med" len="med"/>
+                      <a:tailEnd type="none" w="med" len="med"/>
+                    </a:lnR>
+                    <a:lnT w="12700" cap="flat" cmpd="sng" algn="ctr">
+                      <a:solidFill>
+                        <a:srgbClr val="FFFFFF"/>
+                      </a:solidFill>
+                      <a:prstDash val="solid"/>
+                      <a:round/>
+                      <a:headEnd type="none" w="med" len="med"/>
+                      <a:tailEnd type="none" w="med" len="med"/>
+                    </a:lnT>
+                    <a:lnB w="12700" cap="flat" cmpd="sng" algn="ctr">
+                      <a:solidFill>
+                        <a:srgbClr val="FFFFFF"/>
+                      </a:solidFill>
+                      <a:prstDash val="solid"/>
+                      <a:round/>
+                      <a:headEnd type="none" w="med" len="med"/>
+                      <a:tailEnd type="none" w="med" len="med"/>
+                    </a:lnB>
+                    <a:solidFill>
+                      <a:srgbClr val="DAA5A3"/>
+                    </a:solidFill>
+                  </a:tcPr>
+                </a:tc>
+                <a:tc>
+                  <a:txBody>
+                    <a:bodyPr/>
+                    <a:lstStyle/>
+                    <a:p>
+                      <a:pPr algn="ctr" indent="0" marL="0">
+                        <a:buNone/>
+                      </a:pPr>
+                      <a:r>
+                        <a:rPr lang="en-US" sz="1300" dirty="0">
+                          <a:solidFill>
+                            <a:srgbClr val="1F2937"/>
+                          </a:solidFill>
+                          <a:latin typeface="Arial" pitchFamily="34" charset="0"/>
+                          <a:ea typeface="Arial" pitchFamily="34" charset="-122"/>
+                          <a:cs typeface="Arial" pitchFamily="34" charset="-120"/>
+                        </a:rPr>
+                        <a:t>+0.6  (33)</a:t>
+                      </a:r>
+                      <a:endParaRPr lang="en-US" sz="1300" dirty="0">
+                        <a:latin typeface="Arial" charset="0"/>
+                        <a:ea typeface="Arial" charset="0"/>
+                        <a:cs typeface="Arial" charset="0"/>
+                      </a:endParaRPr>
+                    </a:p>
+                  </a:txBody>
+                  <a:tcPr marL="91440" marR="91440" marT="45720" marB="45720" anchor="ctr">
+                    <a:lnL w="12700" cap="flat" cmpd="sng" algn="ctr">
+                      <a:solidFill>
+                        <a:srgbClr val="FFFFFF"/>
+                      </a:solidFill>
+                      <a:prstDash val="solid"/>
+                      <a:round/>
+                      <a:headEnd type="none" w="med" len="med"/>
+                      <a:tailEnd type="none" w="med" len="med"/>
+                    </a:lnL>
+                    <a:lnR w="12700" cap="flat" cmpd="sng" algn="ctr">
+                      <a:solidFill>
+                        <a:srgbClr val="FFFFFF"/>
+                      </a:solidFill>
+                      <a:prstDash val="solid"/>
+                      <a:round/>
+                      <a:headEnd type="none" w="med" len="med"/>
+                      <a:tailEnd type="none" w="med" len="med"/>
+                    </a:lnR>
+                    <a:lnT w="12700" cap="flat" cmpd="sng" algn="ctr">
+                      <a:solidFill>
+                        <a:srgbClr val="FFFFFF"/>
+                      </a:solidFill>
+                      <a:prstDash val="solid"/>
+                      <a:round/>
+                      <a:headEnd type="none" w="med" len="med"/>
+                      <a:tailEnd type="none" w="med" len="med"/>
+                    </a:lnT>
+                    <a:lnB w="12700" cap="flat" cmpd="sng" algn="ctr">
+                      <a:solidFill>
+                        <a:srgbClr val="FFFFFF"/>
+                      </a:solidFill>
+                      <a:prstDash val="solid"/>
+                      <a:round/>
+                      <a:headEnd type="none" w="med" len="med"/>
+                      <a:tailEnd type="none" w="med" len="med"/>
+                    </a:lnB>
+                    <a:solidFill>
+                      <a:srgbClr val="EAD7D7"/>
+                    </a:solidFill>
+                  </a:tcPr>
+                </a:tc>
+                <a:tc>
+                  <a:txBody>
+                    <a:bodyPr/>
+                    <a:lstStyle/>
+                    <a:p>
+                      <a:pPr algn="ctr" indent="0" marL="0">
+                        <a:buNone/>
+                      </a:pPr>
+                      <a:r>
+                        <a:rPr lang="en-US" sz="1300" dirty="0">
+                          <a:solidFill>
+                            <a:srgbClr val="1F2937"/>
+                          </a:solidFill>
+                          <a:latin typeface="Arial" pitchFamily="34" charset="0"/>
+                          <a:ea typeface="Arial" pitchFamily="34" charset="-122"/>
+                          <a:cs typeface="Arial" pitchFamily="34" charset="-120"/>
+                        </a:rPr>
+                        <a:t>+0.2  (14)</a:t>
+                      </a:r>
+                      <a:endParaRPr lang="en-US" sz="1300" dirty="0">
+                        <a:latin typeface="Arial" charset="0"/>
+                        <a:ea typeface="Arial" charset="0"/>
+                        <a:cs typeface="Arial" charset="0"/>
+                      </a:endParaRPr>
+                    </a:p>
+                  </a:txBody>
+                  <a:tcPr marL="91440" marR="91440" marT="45720" marB="45720" anchor="ctr">
+                    <a:lnL w="12700" cap="flat" cmpd="sng" algn="ctr">
+                      <a:solidFill>
+                        <a:srgbClr val="FFFFFF"/>
+                      </a:solidFill>
+                      <a:prstDash val="solid"/>
+                      <a:round/>
+                      <a:headEnd type="none" w="med" len="med"/>
+                      <a:tailEnd type="none" w="med" len="med"/>
+                    </a:lnL>
+                    <a:lnR w="12700" cap="flat" cmpd="sng" algn="ctr">
+                      <a:solidFill>
+                        <a:srgbClr val="FFFFFF"/>
+                      </a:solidFill>
+                      <a:prstDash val="solid"/>
+                      <a:round/>
+                      <a:headEnd type="none" w="med" len="med"/>
+                      <a:tailEnd type="none" w="med" len="med"/>
+                    </a:lnR>
+                    <a:lnT w="12700" cap="flat" cmpd="sng" algn="ctr">
+                      <a:solidFill>
+                        <a:srgbClr val="FFFFFF"/>
+                      </a:solidFill>
+                      <a:prstDash val="solid"/>
+                      <a:round/>
+                      <a:headEnd type="none" w="med" len="med"/>
+                      <a:tailEnd type="none" w="med" len="med"/>
+                    </a:lnT>
+                    <a:lnB w="12700" cap="flat" cmpd="sng" algn="ctr">
+                      <a:solidFill>
+                        <a:srgbClr val="FFFFFF"/>
+                      </a:solidFill>
+                      <a:prstDash val="solid"/>
+                      <a:round/>
+                      <a:headEnd type="none" w="med" len="med"/>
+                      <a:tailEnd type="none" w="med" len="med"/>
+                    </a:lnB>
+                    <a:solidFill>
+                      <a:srgbClr val="F0EBEC"/>
+                    </a:solidFill>
+                  </a:tcPr>
+                </a:tc>
+                <a:tc>
+                  <a:txBody>
+                    <a:bodyPr/>
+                    <a:lstStyle/>
+                    <a:p>
+                      <a:pPr algn="ctr" indent="0" marL="0">
+                        <a:buNone/>
+                      </a:pPr>
+                      <a:r>
+                        <a:rPr lang="en-US" sz="1300" dirty="0">
+                          <a:solidFill>
+                            <a:srgbClr val="1F2937"/>
+                          </a:solidFill>
+                          <a:latin typeface="Arial" pitchFamily="34" charset="0"/>
+                          <a:ea typeface="Arial" pitchFamily="34" charset="-122"/>
+                          <a:cs typeface="Arial" pitchFamily="34" charset="-120"/>
+                        </a:rPr>
+                        <a:t>0.0  (9)</a:t>
+                      </a:r>
+                      <a:endParaRPr lang="en-US" sz="1300" dirty="0">
+                        <a:latin typeface="Arial" charset="0"/>
+                        <a:ea typeface="Arial" charset="0"/>
+                        <a:cs typeface="Arial" charset="0"/>
+                      </a:endParaRPr>
+                    </a:p>
+                  </a:txBody>
+                  <a:tcPr marL="91440" marR="91440" marT="45720" marB="45720" anchor="ctr">
+                    <a:lnL w="12700" cap="flat" cmpd="sng" algn="ctr">
+                      <a:solidFill>
+                        <a:srgbClr val="FFFFFF"/>
+                      </a:solidFill>
+                      <a:prstDash val="solid"/>
+                      <a:round/>
+                      <a:headEnd type="none" w="med" len="med"/>
+                      <a:tailEnd type="none" w="med" len="med"/>
+                    </a:lnL>
+                    <a:lnR w="12700" cap="flat" cmpd="sng" algn="ctr">
+                      <a:solidFill>
+                        <a:srgbClr val="FFFFFF"/>
+                      </a:solidFill>
+                      <a:prstDash val="solid"/>
+                      <a:round/>
+                      <a:headEnd type="none" w="med" len="med"/>
+                      <a:tailEnd type="none" w="med" len="med"/>
+                    </a:lnR>
+                    <a:lnT w="12700" cap="flat" cmpd="sng" algn="ctr">
+                      <a:solidFill>
+                        <a:srgbClr val="FFFFFF"/>
+                      </a:solidFill>
+                      <a:prstDash val="solid"/>
+                      <a:round/>
+                      <a:headEnd type="none" w="med" len="med"/>
+                      <a:tailEnd type="none" w="med" len="med"/>
+                    </a:lnT>
+                    <a:lnB w="12700" cap="flat" cmpd="sng" algn="ctr">
+                      <a:solidFill>
+                        <a:srgbClr val="FFFFFF"/>
+                      </a:solidFill>
+                      <a:prstDash val="solid"/>
+                      <a:round/>
+                      <a:headEnd type="none" w="med" len="med"/>
+                      <a:tailEnd type="none" w="med" len="med"/>
+                    </a:lnB>
+                    <a:solidFill>
+                      <a:srgbClr val="F3F4F6"/>
+                    </a:solidFill>
+                  </a:tcPr>
+                </a:tc>
+              </a:tr>
+              <a:tr h="438912">
+                <a:tc>
+                  <a:txBody>
+                    <a:bodyPr/>
+                    <a:lstStyle/>
+                    <a:p>
+                      <a:pPr algn="r" indent="0" marL="0">
+                        <a:buNone/>
+                      </a:pPr>
+                      <a:r>
+                        <a:rPr lang="en-US" sz="1400" b="1" dirty="0">
+                          <a:solidFill>
+                            <a:srgbClr val="1F2937"/>
+                          </a:solidFill>
+                          <a:latin typeface="Arial" pitchFamily="34" charset="0"/>
+                          <a:ea typeface="Arial" pitchFamily="34" charset="-122"/>
+                          <a:cs typeface="Arial" pitchFamily="34" charset="-120"/>
+                        </a:rPr>
+                        <a:t>hnRNPA1</a:t>
+                      </a:r>
+                      <a:endParaRPr lang="en-US" sz="1400" dirty="0">
+                        <a:latin typeface="Arial" charset="0"/>
+                        <a:ea typeface="Arial" charset="0"/>
+                        <a:cs typeface="Arial" charset="0"/>
+                      </a:endParaRPr>
+                    </a:p>
+                  </a:txBody>
+                  <a:tcPr marL="91440" marR="91440" marT="45720" marB="45720" anchor="ctr">
+                    <a:lnL w="12700" cap="flat" cmpd="sng" algn="ctr">
+                      <a:solidFill>
+                        <a:srgbClr val="FFFFFF"/>
+                      </a:solidFill>
+                      <a:prstDash val="solid"/>
+                      <a:round/>
+                      <a:headEnd type="none" w="med" len="med"/>
+                      <a:tailEnd type="none" w="med" len="med"/>
+                    </a:lnL>
+                    <a:lnR w="12700" cap="flat" cmpd="sng" algn="ctr">
+                      <a:solidFill>
+                        <a:srgbClr val="FFFFFF"/>
+                      </a:solidFill>
+                      <a:prstDash val="solid"/>
+                      <a:round/>
+                      <a:headEnd type="none" w="med" len="med"/>
+                      <a:tailEnd type="none" w="med" len="med"/>
+                    </a:lnR>
+                    <a:lnT w="12700" cap="flat" cmpd="sng" algn="ctr">
+                      <a:solidFill>
+                        <a:srgbClr val="FFFFFF"/>
+                      </a:solidFill>
+                      <a:prstDash val="solid"/>
+                      <a:round/>
+                      <a:headEnd type="none" w="med" len="med"/>
+                      <a:tailEnd type="none" w="med" len="med"/>
+                    </a:lnT>
+                    <a:lnB w="12700" cap="flat" cmpd="sng" algn="ctr">
+                      <a:solidFill>
+                        <a:srgbClr val="FFFFFF"/>
+                      </a:solidFill>
+                      <a:prstDash val="solid"/>
+                      <a:round/>
+                      <a:headEnd type="none" w="med" len="med"/>
+                      <a:tailEnd type="none" w="med" len="med"/>
+                    </a:lnB>
+                  </a:tcPr>
+                </a:tc>
+                <a:tc>
+                  <a:txBody>
+                    <a:bodyPr/>
+                    <a:lstStyle/>
+                    <a:p>
+                      <a:pPr algn="ctr" indent="0" marL="0">
+                        <a:buNone/>
+                      </a:pPr>
+                      <a:r>
+                        <a:rPr lang="en-US" sz="1300" dirty="0">
+                          <a:solidFill>
+                            <a:srgbClr val="1F2937"/>
+                          </a:solidFill>
+                          <a:latin typeface="Arial" pitchFamily="34" charset="0"/>
+                          <a:ea typeface="Arial" pitchFamily="34" charset="-122"/>
+                          <a:cs typeface="Arial" pitchFamily="34" charset="-120"/>
+                        </a:rPr>
+                        <a:t>+1.9  (6)</a:t>
+                      </a:r>
+                      <a:endParaRPr lang="en-US" sz="1300" dirty="0">
+                        <a:latin typeface="Arial" charset="0"/>
+                        <a:ea typeface="Arial" charset="0"/>
+                        <a:cs typeface="Arial" charset="0"/>
+                      </a:endParaRPr>
+                    </a:p>
+                  </a:txBody>
+                  <a:tcPr marL="91440" marR="91440" marT="45720" marB="45720" anchor="ctr">
+                    <a:lnL w="12700" cap="flat" cmpd="sng" algn="ctr">
+                      <a:solidFill>
+                        <a:srgbClr val="FFFFFF"/>
+                      </a:solidFill>
+                      <a:prstDash val="solid"/>
+                      <a:round/>
+                      <a:headEnd type="none" w="med" len="med"/>
+                      <a:tailEnd type="none" w="med" len="med"/>
+                    </a:lnL>
+                    <a:lnR w="12700" cap="flat" cmpd="sng" algn="ctr">
+                      <a:solidFill>
+                        <a:srgbClr val="FFFFFF"/>
+                      </a:solidFill>
+                      <a:prstDash val="solid"/>
+                      <a:round/>
+                      <a:headEnd type="none" w="med" len="med"/>
+                      <a:tailEnd type="none" w="med" len="med"/>
+                    </a:lnR>
+                    <a:lnT w="12700" cap="flat" cmpd="sng" algn="ctr">
+                      <a:solidFill>
+                        <a:srgbClr val="FFFFFF"/>
+                      </a:solidFill>
+                      <a:prstDash val="solid"/>
+                      <a:round/>
+                      <a:headEnd type="none" w="med" len="med"/>
+                      <a:tailEnd type="none" w="med" len="med"/>
+                    </a:lnT>
+                    <a:lnB w="12700" cap="flat" cmpd="sng" algn="ctr">
+                      <a:solidFill>
+                        <a:srgbClr val="FFFFFF"/>
+                      </a:solidFill>
+                      <a:prstDash val="solid"/>
+                      <a:round/>
+                      <a:headEnd type="none" w="med" len="med"/>
+                      <a:tailEnd type="none" w="med" len="med"/>
+                    </a:lnB>
+                    <a:solidFill>
+                      <a:srgbClr val="D69B98"/>
+                    </a:solidFill>
+                  </a:tcPr>
+                </a:tc>
+                <a:tc>
+                  <a:txBody>
+                    <a:bodyPr/>
+                    <a:lstStyle/>
+                    <a:p>
+                      <a:pPr algn="ctr" indent="0" marL="0">
+                        <a:buNone/>
+                      </a:pPr>
+                      <a:r>
+                        <a:rPr lang="en-US" sz="1300" dirty="0">
+                          <a:solidFill>
+                            <a:srgbClr val="1F2937"/>
+                          </a:solidFill>
+                          <a:latin typeface="Arial" pitchFamily="34" charset="0"/>
+                          <a:ea typeface="Arial" pitchFamily="34" charset="-122"/>
+                          <a:cs typeface="Arial" pitchFamily="34" charset="-120"/>
+                        </a:rPr>
+                        <a:t>+1.4  (4)</a:t>
+                      </a:r>
+                      <a:endParaRPr lang="en-US" sz="1300" dirty="0">
+                        <a:latin typeface="Arial" charset="0"/>
+                        <a:ea typeface="Arial" charset="0"/>
+                        <a:cs typeface="Arial" charset="0"/>
+                      </a:endParaRPr>
+                    </a:p>
+                  </a:txBody>
+                  <a:tcPr marL="91440" marR="91440" marT="45720" marB="45720" anchor="ctr">
+                    <a:lnL w="12700" cap="flat" cmpd="sng" algn="ctr">
+                      <a:solidFill>
+                        <a:srgbClr val="FFFFFF"/>
+                      </a:solidFill>
+                      <a:prstDash val="solid"/>
+                      <a:round/>
+                      <a:headEnd type="none" w="med" len="med"/>
+                      <a:tailEnd type="none" w="med" len="med"/>
+                    </a:lnL>
+                    <a:lnR w="12700" cap="flat" cmpd="sng" algn="ctr">
+                      <a:solidFill>
+                        <a:srgbClr val="FFFFFF"/>
+                      </a:solidFill>
+                      <a:prstDash val="solid"/>
+                      <a:round/>
+                      <a:headEnd type="none" w="med" len="med"/>
+                      <a:tailEnd type="none" w="med" len="med"/>
+                    </a:lnR>
+                    <a:lnT w="12700" cap="flat" cmpd="sng" algn="ctr">
+                      <a:solidFill>
+                        <a:srgbClr val="FFFFFF"/>
+                      </a:solidFill>
+                      <a:prstDash val="solid"/>
+                      <a:round/>
+                      <a:headEnd type="none" w="med" len="med"/>
+                      <a:tailEnd type="none" w="med" len="med"/>
+                    </a:lnT>
+                    <a:lnB w="12700" cap="flat" cmpd="sng" algn="ctr">
+                      <a:solidFill>
+                        <a:srgbClr val="FFFFFF"/>
+                      </a:solidFill>
+                      <a:prstDash val="solid"/>
+                      <a:round/>
+                      <a:headEnd type="none" w="med" len="med"/>
+                      <a:tailEnd type="none" w="med" len="med"/>
+                    </a:lnB>
+                    <a:solidFill>
+                      <a:srgbClr val="DDB0AF"/>
+                    </a:solidFill>
+                  </a:tcPr>
+                </a:tc>
+                <a:tc>
+                  <a:txBody>
+                    <a:bodyPr/>
+                    <a:lstStyle/>
+                    <a:p>
+                      <a:pPr algn="ctr" indent="0" marL="0">
+                        <a:buNone/>
+                      </a:pPr>
+                      <a:r>
+                        <a:rPr lang="en-US" sz="1300" dirty="0">
+                          <a:solidFill>
+                            <a:srgbClr val="1F2937"/>
+                          </a:solidFill>
+                          <a:latin typeface="Arial" pitchFamily="34" charset="0"/>
+                          <a:ea typeface="Arial" pitchFamily="34" charset="-122"/>
+                          <a:cs typeface="Arial" pitchFamily="34" charset="-120"/>
+                        </a:rPr>
+                        <a:t>+1.1  (5)</a:t>
+                      </a:r>
+                      <a:endParaRPr lang="en-US" sz="1300" dirty="0">
+                        <a:latin typeface="Arial" charset="0"/>
+                        <a:ea typeface="Arial" charset="0"/>
+                        <a:cs typeface="Arial" charset="0"/>
+                      </a:endParaRPr>
+                    </a:p>
+                  </a:txBody>
+                  <a:tcPr marL="91440" marR="91440" marT="45720" marB="45720" anchor="ctr">
+                    <a:lnL w="12700" cap="flat" cmpd="sng" algn="ctr">
+                      <a:solidFill>
+                        <a:srgbClr val="FFFFFF"/>
+                      </a:solidFill>
+                      <a:prstDash val="solid"/>
+                      <a:round/>
+                      <a:headEnd type="none" w="med" len="med"/>
+                      <a:tailEnd type="none" w="med" len="med"/>
+                    </a:lnL>
+                    <a:lnR w="12700" cap="flat" cmpd="sng" algn="ctr">
+                      <a:solidFill>
+                        <a:srgbClr val="FFFFFF"/>
+                      </a:solidFill>
+                      <a:prstDash val="solid"/>
+                      <a:round/>
+                      <a:headEnd type="none" w="med" len="med"/>
+                      <a:tailEnd type="none" w="med" len="med"/>
+                    </a:lnR>
+                    <a:lnT w="12700" cap="flat" cmpd="sng" algn="ctr">
+                      <a:solidFill>
+                        <a:srgbClr val="FFFFFF"/>
+                      </a:solidFill>
+                      <a:prstDash val="solid"/>
+                      <a:round/>
+                      <a:headEnd type="none" w="med" len="med"/>
+                      <a:tailEnd type="none" w="med" len="med"/>
+                    </a:lnT>
+                    <a:lnB w="12700" cap="flat" cmpd="sng" algn="ctr">
+                      <a:solidFill>
+                        <a:srgbClr val="FFFFFF"/>
+                      </a:solidFill>
+                      <a:prstDash val="solid"/>
+                      <a:round/>
+                      <a:headEnd type="none" w="med" len="med"/>
+                      <a:tailEnd type="none" w="med" len="med"/>
+                    </a:lnB>
+                    <a:solidFill>
+                      <a:srgbClr val="E2C0BF"/>
+                    </a:solidFill>
+                  </a:tcPr>
+                </a:tc>
+                <a:tc>
+                  <a:txBody>
+                    <a:bodyPr/>
+                    <a:lstStyle/>
+                    <a:p>
+                      <a:pPr algn="ctr" indent="0" marL="0">
+                        <a:buNone/>
+                      </a:pPr>
+                      <a:r>
+                        <a:rPr lang="en-US" sz="1300" b="1" dirty="0">
+                          <a:solidFill>
+                            <a:srgbClr val="1F2937"/>
+                          </a:solidFill>
+                          <a:latin typeface="Arial" pitchFamily="34" charset="0"/>
+                          <a:ea typeface="Arial" pitchFamily="34" charset="-122"/>
+                          <a:cs typeface="Arial" pitchFamily="34" charset="-120"/>
+                        </a:rPr>
+                        <a:t>+2.4  (6)</a:t>
+                      </a:r>
+                      <a:endParaRPr lang="en-US" sz="1300" dirty="0">
+                        <a:latin typeface="Arial" charset="0"/>
+                        <a:ea typeface="Arial" charset="0"/>
+                        <a:cs typeface="Arial" charset="0"/>
+                      </a:endParaRPr>
+                    </a:p>
+                  </a:txBody>
+                  <a:tcPr marL="91440" marR="91440" marT="45720" marB="45720" anchor="ctr">
+                    <a:lnL w="12700" cap="flat" cmpd="sng" algn="ctr">
+                      <a:solidFill>
+                        <a:srgbClr val="FFFFFF"/>
+                      </a:solidFill>
+                      <a:prstDash val="solid"/>
+                      <a:round/>
+                      <a:headEnd type="none" w="med" len="med"/>
+                      <a:tailEnd type="none" w="med" len="med"/>
+                    </a:lnL>
+                    <a:lnR w="12700" cap="flat" cmpd="sng" algn="ctr">
+                      <a:solidFill>
+                        <a:srgbClr val="FFFFFF"/>
+                      </a:solidFill>
+                      <a:prstDash val="solid"/>
+                      <a:round/>
+                      <a:headEnd type="none" w="med" len="med"/>
+                      <a:tailEnd type="none" w="med" len="med"/>
+                    </a:lnR>
+                    <a:lnT w="12700" cap="flat" cmpd="sng" algn="ctr">
+                      <a:solidFill>
+                        <a:srgbClr val="FFFFFF"/>
+                      </a:solidFill>
+                      <a:prstDash val="solid"/>
+                      <a:round/>
+                      <a:headEnd type="none" w="med" len="med"/>
+                      <a:tailEnd type="none" w="med" len="med"/>
+                    </a:lnT>
+                    <a:lnB w="12700" cap="flat" cmpd="sng" algn="ctr">
+                      <a:solidFill>
+                        <a:srgbClr val="FFFFFF"/>
+                      </a:solidFill>
+                      <a:prstDash val="solid"/>
+                      <a:round/>
+                      <a:headEnd type="none" w="med" len="med"/>
+                      <a:tailEnd type="none" w="med" len="med"/>
+                    </a:lnB>
+                    <a:solidFill>
+                      <a:srgbClr val="CD7F7B"/>
+                    </a:solidFill>
+                  </a:tcPr>
+                </a:tc>
+                <a:tc>
+                  <a:txBody>
+                    <a:bodyPr/>
+                    <a:lstStyle/>
+                    <a:p>
+                      <a:pPr algn="ctr" indent="0" marL="0">
+                        <a:buNone/>
+                      </a:pPr>
+                      <a:r>
+                        <a:rPr lang="en-US" sz="1300" dirty="0">
+                          <a:solidFill>
+                            <a:srgbClr val="1F2937"/>
+                          </a:solidFill>
+                          <a:latin typeface="Arial" pitchFamily="34" charset="0"/>
+                          <a:ea typeface="Arial" pitchFamily="34" charset="-122"/>
+                          <a:cs typeface="Arial" pitchFamily="34" charset="-120"/>
+                        </a:rPr>
+                        <a:t>+1.2  (4)</a:t>
+                      </a:r>
+                      <a:endParaRPr lang="en-US" sz="1300" dirty="0">
+                        <a:latin typeface="Arial" charset="0"/>
+                        <a:ea typeface="Arial" charset="0"/>
+                        <a:cs typeface="Arial" charset="0"/>
+                      </a:endParaRPr>
+                    </a:p>
+                  </a:txBody>
+                  <a:tcPr marL="91440" marR="91440" marT="45720" marB="45720" anchor="ctr">
+                    <a:lnL w="12700" cap="flat" cmpd="sng" algn="ctr">
+                      <a:solidFill>
+                        <a:srgbClr val="FFFFFF"/>
+                      </a:solidFill>
+                      <a:prstDash val="solid"/>
+                      <a:round/>
+                      <a:headEnd type="none" w="med" len="med"/>
+                      <a:tailEnd type="none" w="med" len="med"/>
+                    </a:lnL>
+                    <a:lnR w="12700" cap="flat" cmpd="sng" algn="ctr">
+                      <a:solidFill>
+                        <a:srgbClr val="FFFFFF"/>
+                      </a:solidFill>
+                      <a:prstDash val="solid"/>
+                      <a:round/>
+                      <a:headEnd type="none" w="med" len="med"/>
+                      <a:tailEnd type="none" w="med" len="med"/>
+                    </a:lnR>
+                    <a:lnT w="12700" cap="flat" cmpd="sng" algn="ctr">
+                      <a:solidFill>
+                        <a:srgbClr val="FFFFFF"/>
+                      </a:solidFill>
+                      <a:prstDash val="solid"/>
+                      <a:round/>
+                      <a:headEnd type="none" w="med" len="med"/>
+                      <a:tailEnd type="none" w="med" len="med"/>
+                    </a:lnT>
+                    <a:lnB w="12700" cap="flat" cmpd="sng" algn="ctr">
+                      <a:solidFill>
+                        <a:srgbClr val="FFFFFF"/>
+                      </a:solidFill>
+                      <a:prstDash val="solid"/>
+                      <a:round/>
+                      <a:headEnd type="none" w="med" len="med"/>
+                      <a:tailEnd type="none" w="med" len="med"/>
+                    </a:lnB>
+                    <a:solidFill>
+                      <a:srgbClr val="E1BCBA"/>
+                    </a:solidFill>
+                  </a:tcPr>
+                </a:tc>
+                <a:tc>
+                  <a:txBody>
+                    <a:bodyPr/>
+                    <a:lstStyle/>
+                    <a:p>
+                      <a:pPr algn="ctr" indent="0" marL="0">
+                        <a:buNone/>
+                      </a:pPr>
+                      <a:r>
+                        <a:rPr lang="en-US" sz="1300" dirty="0">
+                          <a:solidFill>
+                            <a:srgbClr val="1F2937"/>
+                          </a:solidFill>
+                          <a:latin typeface="Arial" pitchFamily="34" charset="0"/>
+                          <a:ea typeface="Arial" pitchFamily="34" charset="-122"/>
+                          <a:cs typeface="Arial" pitchFamily="34" charset="-120"/>
+                        </a:rPr>
+                        <a:t>-0.2  (5)</a:t>
+                      </a:r>
+                      <a:endParaRPr lang="en-US" sz="1300" dirty="0">
+                        <a:latin typeface="Arial" charset="0"/>
+                        <a:ea typeface="Arial" charset="0"/>
+                        <a:cs typeface="Arial" charset="0"/>
+                      </a:endParaRPr>
+                    </a:p>
+                  </a:txBody>
+                  <a:tcPr marL="91440" marR="91440" marT="45720" marB="45720" anchor="ctr">
+                    <a:lnL w="12700" cap="flat" cmpd="sng" algn="ctr">
+                      <a:solidFill>
+                        <a:srgbClr val="FFFFFF"/>
+                      </a:solidFill>
+                      <a:prstDash val="solid"/>
+                      <a:round/>
+                      <a:headEnd type="none" w="med" len="med"/>
+                      <a:tailEnd type="none" w="med" len="med"/>
+                    </a:lnL>
+                    <a:lnR w="12700" cap="flat" cmpd="sng" algn="ctr">
+                      <a:solidFill>
+                        <a:srgbClr val="FFFFFF"/>
+                      </a:solidFill>
+                      <a:prstDash val="solid"/>
+                      <a:round/>
+                      <a:headEnd type="none" w="med" len="med"/>
+                      <a:tailEnd type="none" w="med" len="med"/>
+                    </a:lnR>
+                    <a:lnT w="12700" cap="flat" cmpd="sng" algn="ctr">
+                      <a:solidFill>
+                        <a:srgbClr val="FFFFFF"/>
+                      </a:solidFill>
+                      <a:prstDash val="solid"/>
+                      <a:round/>
+                      <a:headEnd type="none" w="med" len="med"/>
+                      <a:tailEnd type="none" w="med" len="med"/>
+                    </a:lnT>
+                    <a:lnB w="12700" cap="flat" cmpd="sng" algn="ctr">
+                      <a:solidFill>
+                        <a:srgbClr val="FFFFFF"/>
+                      </a:solidFill>
+                      <a:prstDash val="solid"/>
+                      <a:round/>
+                      <a:headEnd type="none" w="med" len="med"/>
+                      <a:tailEnd type="none" w="med" len="med"/>
+                    </a:lnB>
+                    <a:solidFill>
+                      <a:srgbClr val="E8EBF0"/>
+                    </a:solidFill>
+                  </a:tcPr>
+                </a:tc>
+              </a:tr>
+              <a:tr h="438912">
+                <a:tc>
+                  <a:txBody>
+                    <a:bodyPr/>
+                    <a:lstStyle/>
+                    <a:p>
+                      <a:pPr algn="r" indent="0" marL="0">
+                        <a:buNone/>
+                      </a:pPr>
+                      <a:r>
+                        <a:rPr lang="en-US" sz="1400" b="1" dirty="0">
+                          <a:solidFill>
+                            <a:srgbClr val="1F2937"/>
+                          </a:solidFill>
+                          <a:latin typeface="Arial" pitchFamily="34" charset="0"/>
+                          <a:ea typeface="Arial" pitchFamily="34" charset="-122"/>
+                          <a:cs typeface="Arial" pitchFamily="34" charset="-120"/>
+                        </a:rPr>
+                        <a:t>hnRNPA2B1</a:t>
+                      </a:r>
+                      <a:endParaRPr lang="en-US" sz="1400" dirty="0">
+                        <a:latin typeface="Arial" charset="0"/>
+                        <a:ea typeface="Arial" charset="0"/>
+                        <a:cs typeface="Arial" charset="0"/>
+                      </a:endParaRPr>
+                    </a:p>
+                  </a:txBody>
+                  <a:tcPr marL="91440" marR="91440" marT="45720" marB="45720" anchor="ctr">
+                    <a:lnL w="12700" cap="flat" cmpd="sng" algn="ctr">
+                      <a:solidFill>
+                        <a:srgbClr val="FFFFFF"/>
+                      </a:solidFill>
+                      <a:prstDash val="solid"/>
+                      <a:round/>
+                      <a:headEnd type="none" w="med" len="med"/>
+                      <a:tailEnd type="none" w="med" len="med"/>
+                    </a:lnL>
+                    <a:lnR w="12700" cap="flat" cmpd="sng" algn="ctr">
+                      <a:solidFill>
+                        <a:srgbClr val="FFFFFF"/>
+                      </a:solidFill>
+                      <a:prstDash val="solid"/>
+                      <a:round/>
+                      <a:headEnd type="none" w="med" len="med"/>
+                      <a:tailEnd type="none" w="med" len="med"/>
+                    </a:lnR>
+                    <a:lnT w="12700" cap="flat" cmpd="sng" algn="ctr">
+                      <a:solidFill>
+                        <a:srgbClr val="FFFFFF"/>
+                      </a:solidFill>
+                      <a:prstDash val="solid"/>
+                      <a:round/>
+                      <a:headEnd type="none" w="med" len="med"/>
+                      <a:tailEnd type="none" w="med" len="med"/>
+                    </a:lnT>
+                    <a:lnB w="12700" cap="flat" cmpd="sng" algn="ctr">
+                      <a:solidFill>
+                        <a:srgbClr val="FFFFFF"/>
+                      </a:solidFill>
+                      <a:prstDash val="solid"/>
+                      <a:round/>
+                      <a:headEnd type="none" w="med" len="med"/>
+                      <a:tailEnd type="none" w="med" len="med"/>
+                    </a:lnB>
+                  </a:tcPr>
+                </a:tc>
+                <a:tc>
+                  <a:txBody>
+                    <a:bodyPr/>
+                    <a:lstStyle/>
+                    <a:p>
+                      <a:pPr algn="ctr" indent="0" marL="0">
+                        <a:buNone/>
+                      </a:pPr>
+                      <a:r>
+                        <a:rPr lang="en-US" sz="1300" dirty="0">
+                          <a:solidFill>
+                            <a:srgbClr val="1F2937"/>
+                          </a:solidFill>
+                          <a:latin typeface="Arial" pitchFamily="34" charset="0"/>
+                          <a:ea typeface="Arial" pitchFamily="34" charset="-122"/>
+                          <a:cs typeface="Arial" pitchFamily="34" charset="-120"/>
+                        </a:rPr>
+                        <a:t>+0.3  (5)</a:t>
+                      </a:r>
+                      <a:endParaRPr lang="en-US" sz="1300" dirty="0">
+                        <a:latin typeface="Arial" charset="0"/>
+                        <a:ea typeface="Arial" charset="0"/>
+                        <a:cs typeface="Arial" charset="0"/>
+                      </a:endParaRPr>
+                    </a:p>
+                  </a:txBody>
+                  <a:tcPr marL="91440" marR="91440" marT="45720" marB="45720" anchor="ctr">
+                    <a:lnL w="12700" cap="flat" cmpd="sng" algn="ctr">
+                      <a:solidFill>
+                        <a:srgbClr val="FFFFFF"/>
+                      </a:solidFill>
+                      <a:prstDash val="solid"/>
+                      <a:round/>
+                      <a:headEnd type="none" w="med" len="med"/>
+                      <a:tailEnd type="none" w="med" len="med"/>
+                    </a:lnL>
+                    <a:lnR w="12700" cap="flat" cmpd="sng" algn="ctr">
+                      <a:solidFill>
+                        <a:srgbClr val="FFFFFF"/>
+                      </a:solidFill>
+                      <a:prstDash val="solid"/>
+                      <a:round/>
+                      <a:headEnd type="none" w="med" len="med"/>
+                      <a:tailEnd type="none" w="med" len="med"/>
+                    </a:lnR>
+                    <a:lnT w="12700" cap="flat" cmpd="sng" algn="ctr">
+                      <a:solidFill>
+                        <a:srgbClr val="FFFFFF"/>
+                      </a:solidFill>
+                      <a:prstDash val="solid"/>
+                      <a:round/>
+                      <a:headEnd type="none" w="med" len="med"/>
+                      <a:tailEnd type="none" w="med" len="med"/>
+                    </a:lnT>
+                    <a:lnB w="12700" cap="flat" cmpd="sng" algn="ctr">
+                      <a:solidFill>
+                        <a:srgbClr val="FFFFFF"/>
+                      </a:solidFill>
+                      <a:prstDash val="solid"/>
+                      <a:round/>
+                      <a:headEnd type="none" w="med" len="med"/>
+                      <a:tailEnd type="none" w="med" len="med"/>
+                    </a:lnB>
+                    <a:solidFill>
+                      <a:srgbClr val="EFE8E9"/>
+                    </a:solidFill>
+                  </a:tcPr>
+                </a:tc>
+                <a:tc>
+                  <a:txBody>
+                    <a:bodyPr/>
+                    <a:lstStyle/>
+                    <a:p>
+                      <a:pPr algn="ctr" indent="0" marL="0">
+                        <a:buNone/>
+                      </a:pPr>
+                      <a:r>
+                        <a:rPr lang="en-US" sz="1300" dirty="0">
+                          <a:solidFill>
+                            <a:srgbClr val="1F2937"/>
+                          </a:solidFill>
+                          <a:latin typeface="Arial" pitchFamily="34" charset="0"/>
+                          <a:ea typeface="Arial" pitchFamily="34" charset="-122"/>
+                          <a:cs typeface="Arial" pitchFamily="34" charset="-120"/>
+                        </a:rPr>
+                        <a:t>—</a:t>
+                      </a:r>
+                      <a:endParaRPr lang="en-US" sz="1300" dirty="0">
+                        <a:latin typeface="Arial" charset="0"/>
+                        <a:ea typeface="Arial" charset="0"/>
+                        <a:cs typeface="Arial" charset="0"/>
+                      </a:endParaRPr>
+                    </a:p>
+                  </a:txBody>
+                  <a:tcPr marL="91440" marR="91440" marT="45720" marB="45720" anchor="ctr">
+                    <a:lnL w="12700" cap="flat" cmpd="sng" algn="ctr">
+                      <a:solidFill>
+                        <a:srgbClr val="FFFFFF"/>
+                      </a:solidFill>
+                      <a:prstDash val="solid"/>
+                      <a:round/>
+                      <a:headEnd type="none" w="med" len="med"/>
+                      <a:tailEnd type="none" w="med" len="med"/>
+                    </a:lnL>
+                    <a:lnR w="12700" cap="flat" cmpd="sng" algn="ctr">
+                      <a:solidFill>
+                        <a:srgbClr val="FFFFFF"/>
+                      </a:solidFill>
+                      <a:prstDash val="solid"/>
+                      <a:round/>
+                      <a:headEnd type="none" w="med" len="med"/>
+                      <a:tailEnd type="none" w="med" len="med"/>
+                    </a:lnR>
+                    <a:lnT w="12700" cap="flat" cmpd="sng" algn="ctr">
+                      <a:solidFill>
+                        <a:srgbClr val="FFFFFF"/>
+                      </a:solidFill>
+                      <a:prstDash val="solid"/>
+                      <a:round/>
+                      <a:headEnd type="none" w="med" len="med"/>
+                      <a:tailEnd type="none" w="med" len="med"/>
+                    </a:lnT>
+                    <a:lnB w="12700" cap="flat" cmpd="sng" algn="ctr">
+                      <a:solidFill>
+                        <a:srgbClr val="FFFFFF"/>
+                      </a:solidFill>
+                      <a:prstDash val="solid"/>
+                      <a:round/>
+                      <a:headEnd type="none" w="med" len="med"/>
+                      <a:tailEnd type="none" w="med" len="med"/>
+                    </a:lnB>
+                    <a:solidFill>
+                      <a:srgbClr val="FFFFFF"/>
+                    </a:solidFill>
+                  </a:tcPr>
+                </a:tc>
+                <a:tc>
+                  <a:txBody>
+                    <a:bodyPr/>
+                    <a:lstStyle/>
+                    <a:p>
+                      <a:pPr algn="ctr" indent="0" marL="0">
+                        <a:buNone/>
+                      </a:pPr>
+                      <a:r>
+                        <a:rPr lang="en-US" sz="1300" dirty="0">
+                          <a:solidFill>
+                            <a:srgbClr val="1F2937"/>
+                          </a:solidFill>
+                          <a:latin typeface="Arial" pitchFamily="34" charset="0"/>
+                          <a:ea typeface="Arial" pitchFamily="34" charset="-122"/>
+                          <a:cs typeface="Arial" pitchFamily="34" charset="-120"/>
+                        </a:rPr>
+                        <a:t>+0.9  (2)</a:t>
+                      </a:r>
+                      <a:endParaRPr lang="en-US" sz="1300" dirty="0">
+                        <a:latin typeface="Arial" charset="0"/>
+                        <a:ea typeface="Arial" charset="0"/>
+                        <a:cs typeface="Arial" charset="0"/>
+                      </a:endParaRPr>
+                    </a:p>
+                  </a:txBody>
+                  <a:tcPr marL="91440" marR="91440" marT="45720" marB="45720" anchor="ctr">
+                    <a:lnL w="12700" cap="flat" cmpd="sng" algn="ctr">
+                      <a:solidFill>
+                        <a:srgbClr val="FFFFFF"/>
+                      </a:solidFill>
+                      <a:prstDash val="solid"/>
+                      <a:round/>
+                      <a:headEnd type="none" w="med" len="med"/>
+                      <a:tailEnd type="none" w="med" len="med"/>
+                    </a:lnL>
+                    <a:lnR w="12700" cap="flat" cmpd="sng" algn="ctr">
+                      <a:solidFill>
+                        <a:srgbClr val="FFFFFF"/>
+                      </a:solidFill>
+                      <a:prstDash val="solid"/>
+                      <a:round/>
+                      <a:headEnd type="none" w="med" len="med"/>
+                      <a:tailEnd type="none" w="med" len="med"/>
+                    </a:lnR>
+                    <a:lnT w="12700" cap="flat" cmpd="sng" algn="ctr">
+                      <a:solidFill>
+                        <a:srgbClr val="FFFFFF"/>
+                      </a:solidFill>
+                      <a:prstDash val="solid"/>
+                      <a:round/>
+                      <a:headEnd type="none" w="med" len="med"/>
+                      <a:tailEnd type="none" w="med" len="med"/>
+                    </a:lnT>
+                    <a:lnB w="12700" cap="flat" cmpd="sng" algn="ctr">
+                      <a:solidFill>
+                        <a:srgbClr val="FFFFFF"/>
+                      </a:solidFill>
+                      <a:prstDash val="solid"/>
+                      <a:round/>
+                      <a:headEnd type="none" w="med" len="med"/>
+                      <a:tailEnd type="none" w="med" len="med"/>
+                    </a:lnB>
+                    <a:solidFill>
+                      <a:srgbClr val="E6CACA"/>
+                    </a:solidFill>
+                  </a:tcPr>
+                </a:tc>
+                <a:tc>
+                  <a:txBody>
+                    <a:bodyPr/>
+                    <a:lstStyle/>
+                    <a:p>
+                      <a:pPr algn="ctr" indent="0" marL="0">
+                        <a:buNone/>
+                      </a:pPr>
+                      <a:r>
+                        <a:rPr lang="en-US" sz="1300" b="1" dirty="0">
+                          <a:solidFill>
+                            <a:srgbClr val="FFFFFF"/>
+                          </a:solidFill>
+                          <a:latin typeface="Arial" pitchFamily="34" charset="0"/>
+                          <a:ea typeface="Arial" pitchFamily="34" charset="-122"/>
+                          <a:cs typeface="Arial" pitchFamily="34" charset="-120"/>
+                        </a:rPr>
+                        <a:t>-5.5  (5)</a:t>
+                      </a:r>
+                      <a:endParaRPr lang="en-US" sz="1300" dirty="0">
+                        <a:latin typeface="Arial" charset="0"/>
+                        <a:ea typeface="Arial" charset="0"/>
+                        <a:cs typeface="Arial" charset="0"/>
+                      </a:endParaRPr>
+                    </a:p>
+                  </a:txBody>
+                  <a:tcPr marL="91440" marR="91440" marT="45720" marB="45720" anchor="ctr">
+                    <a:lnL w="12700" cap="flat" cmpd="sng" algn="ctr">
+                      <a:solidFill>
+                        <a:srgbClr val="FFFFFF"/>
+                      </a:solidFill>
+                      <a:prstDash val="solid"/>
+                      <a:round/>
+                      <a:headEnd type="none" w="med" len="med"/>
+                      <a:tailEnd type="none" w="med" len="med"/>
+                    </a:lnL>
+                    <a:lnR w="12700" cap="flat" cmpd="sng" algn="ctr">
+                      <a:solidFill>
+                        <a:srgbClr val="FFFFFF"/>
+                      </a:solidFill>
+                      <a:prstDash val="solid"/>
+                      <a:round/>
+                      <a:headEnd type="none" w="med" len="med"/>
+                      <a:tailEnd type="none" w="med" len="med"/>
+                    </a:lnR>
+                    <a:lnT w="12700" cap="flat" cmpd="sng" algn="ctr">
+                      <a:solidFill>
+                        <a:srgbClr val="FFFFFF"/>
+                      </a:solidFill>
+                      <a:prstDash val="solid"/>
+                      <a:round/>
+                      <a:headEnd type="none" w="med" len="med"/>
+                      <a:tailEnd type="none" w="med" len="med"/>
+                    </a:lnT>
+                    <a:lnB w="12700" cap="flat" cmpd="sng" algn="ctr">
+                      <a:solidFill>
+                        <a:srgbClr val="FFFFFF"/>
+                      </a:solidFill>
+                      <a:prstDash val="solid"/>
+                      <a:round/>
+                      <a:headEnd type="none" w="med" len="med"/>
+                      <a:tailEnd type="none" w="med" len="med"/>
+                    </a:lnB>
+                    <a:solidFill>
+                      <a:srgbClr val="3F5E8C"/>
+                    </a:solidFill>
+                  </a:tcPr>
+                </a:tc>
+                <a:tc>
+                  <a:txBody>
+                    <a:bodyPr/>
+                    <a:lstStyle/>
+                    <a:p>
+                      <a:pPr algn="ctr" indent="0" marL="0">
+                        <a:buNone/>
+                      </a:pPr>
+                      <a:r>
+                        <a:rPr lang="en-US" sz="1300" dirty="0">
+                          <a:solidFill>
+                            <a:srgbClr val="1F2937"/>
+                          </a:solidFill>
+                          <a:latin typeface="Arial" pitchFamily="34" charset="0"/>
+                          <a:ea typeface="Arial" pitchFamily="34" charset="-122"/>
+                          <a:cs typeface="Arial" pitchFamily="34" charset="-120"/>
+                        </a:rPr>
+                        <a:t>—</a:t>
+                      </a:r>
+                      <a:endParaRPr lang="en-US" sz="1300" dirty="0">
+                        <a:latin typeface="Arial" charset="0"/>
+                        <a:ea typeface="Arial" charset="0"/>
+                        <a:cs typeface="Arial" charset="0"/>
+                      </a:endParaRPr>
+                    </a:p>
+                  </a:txBody>
+                  <a:tcPr marL="91440" marR="91440" marT="45720" marB="45720" anchor="ctr">
+                    <a:lnL w="12700" cap="flat" cmpd="sng" algn="ctr">
+                      <a:solidFill>
+                        <a:srgbClr val="FFFFFF"/>
+                      </a:solidFill>
+                      <a:prstDash val="solid"/>
+                      <a:round/>
+                      <a:headEnd type="none" w="med" len="med"/>
+                      <a:tailEnd type="none" w="med" len="med"/>
+                    </a:lnL>
+                    <a:lnR w="12700" cap="flat" cmpd="sng" algn="ctr">
+                      <a:solidFill>
+                        <a:srgbClr val="FFFFFF"/>
+                      </a:solidFill>
+                      <a:prstDash val="solid"/>
+                      <a:round/>
+                      <a:headEnd type="none" w="med" len="med"/>
+                      <a:tailEnd type="none" w="med" len="med"/>
+                    </a:lnR>
+                    <a:lnT w="12700" cap="flat" cmpd="sng" algn="ctr">
+                      <a:solidFill>
+                        <a:srgbClr val="FFFFFF"/>
+                      </a:solidFill>
+                      <a:prstDash val="solid"/>
+                      <a:round/>
+                      <a:headEnd type="none" w="med" len="med"/>
+                      <a:tailEnd type="none" w="med" len="med"/>
+                    </a:lnT>
+                    <a:lnB w="12700" cap="flat" cmpd="sng" algn="ctr">
+                      <a:solidFill>
+                        <a:srgbClr val="FFFFFF"/>
+                      </a:solidFill>
+                      <a:prstDash val="solid"/>
+                      <a:round/>
+                      <a:headEnd type="none" w="med" len="med"/>
+                      <a:tailEnd type="none" w="med" len="med"/>
+                    </a:lnB>
+                    <a:solidFill>
+                      <a:srgbClr val="FFFFFF"/>
+                    </a:solidFill>
+                  </a:tcPr>
+                </a:tc>
+                <a:tc>
+                  <a:txBody>
+                    <a:bodyPr/>
+                    <a:lstStyle/>
+                    <a:p>
+                      <a:pPr algn="ctr" indent="0" marL="0">
+                        <a:buNone/>
+                      </a:pPr>
+                      <a:r>
+                        <a:rPr lang="en-US" sz="1300" dirty="0">
+                          <a:solidFill>
+                            <a:srgbClr val="1F2937"/>
+                          </a:solidFill>
+                          <a:latin typeface="Arial" pitchFamily="34" charset="0"/>
+                          <a:ea typeface="Arial" pitchFamily="34" charset="-122"/>
+                          <a:cs typeface="Arial" pitchFamily="34" charset="-120"/>
+                        </a:rPr>
+                        <a:t>-0.3  (2)</a:t>
+                      </a:r>
+                      <a:endParaRPr lang="en-US" sz="1300" dirty="0">
+                        <a:latin typeface="Arial" charset="0"/>
+                        <a:ea typeface="Arial" charset="0"/>
+                        <a:cs typeface="Arial" charset="0"/>
+                      </a:endParaRPr>
+                    </a:p>
+                  </a:txBody>
+                  <a:tcPr marL="91440" marR="91440" marT="45720" marB="45720" anchor="ctr">
+                    <a:lnL w="12700" cap="flat" cmpd="sng" algn="ctr">
+                      <a:solidFill>
+                        <a:srgbClr val="FFFFFF"/>
+                      </a:solidFill>
+                      <a:prstDash val="solid"/>
+                      <a:round/>
+                      <a:headEnd type="none" w="med" len="med"/>
+                      <a:tailEnd type="none" w="med" len="med"/>
+                    </a:lnL>
+                    <a:lnR w="12700" cap="flat" cmpd="sng" algn="ctr">
+                      <a:solidFill>
+                        <a:srgbClr val="FFFFFF"/>
+                      </a:solidFill>
+                      <a:prstDash val="solid"/>
+                      <a:round/>
+                      <a:headEnd type="none" w="med" len="med"/>
+                      <a:tailEnd type="none" w="med" len="med"/>
+                    </a:lnR>
+                    <a:lnT w="12700" cap="flat" cmpd="sng" algn="ctr">
+                      <a:solidFill>
+                        <a:srgbClr val="FFFFFF"/>
+                      </a:solidFill>
+                      <a:prstDash val="solid"/>
+                      <a:round/>
+                      <a:headEnd type="none" w="med" len="med"/>
+                      <a:tailEnd type="none" w="med" len="med"/>
+                    </a:lnT>
+                    <a:lnB w="12700" cap="flat" cmpd="sng" algn="ctr">
+                      <a:solidFill>
+                        <a:srgbClr val="FFFFFF"/>
+                      </a:solidFill>
+                      <a:prstDash val="solid"/>
+                      <a:round/>
+                      <a:headEnd type="none" w="med" len="med"/>
+                      <a:tailEnd type="none" w="med" len="med"/>
+                    </a:lnB>
+                    <a:solidFill>
+                      <a:srgbClr val="E6E9EE"/>
+                    </a:solidFill>
+                  </a:tcPr>
+                </a:tc>
+              </a:tr>
+              <a:tr h="438912">
+                <a:tc>
+                  <a:txBody>
+                    <a:bodyPr/>
+                    <a:lstStyle/>
+                    <a:p>
+                      <a:pPr algn="r" indent="0" marL="0">
+                        <a:buNone/>
+                      </a:pPr>
+                      <a:r>
+                        <a:rPr lang="en-US" sz="1400" b="1" dirty="0">
+                          <a:solidFill>
+                            <a:srgbClr val="1F2937"/>
+                          </a:solidFill>
+                          <a:latin typeface="Arial" pitchFamily="34" charset="0"/>
+                          <a:ea typeface="Arial" pitchFamily="34" charset="-122"/>
+                          <a:cs typeface="Arial" pitchFamily="34" charset="-120"/>
+                        </a:rPr>
+                        <a:t>hnRNPA3</a:t>
+                      </a:r>
+                      <a:endParaRPr lang="en-US" sz="1400" dirty="0">
+                        <a:latin typeface="Arial" charset="0"/>
+                        <a:ea typeface="Arial" charset="0"/>
+                        <a:cs typeface="Arial" charset="0"/>
+                      </a:endParaRPr>
+                    </a:p>
+                  </a:txBody>
+                  <a:tcPr marL="91440" marR="91440" marT="45720" marB="45720" anchor="ctr">
+                    <a:lnL w="12700" cap="flat" cmpd="sng" algn="ctr">
+                      <a:solidFill>
+                        <a:srgbClr val="FFFFFF"/>
+                      </a:solidFill>
+                      <a:prstDash val="solid"/>
+                      <a:round/>
+                      <a:headEnd type="none" w="med" len="med"/>
+                      <a:tailEnd type="none" w="med" len="med"/>
+                    </a:lnL>
+                    <a:lnR w="12700" cap="flat" cmpd="sng" algn="ctr">
+                      <a:solidFill>
+                        <a:srgbClr val="FFFFFF"/>
+                      </a:solidFill>
+                      <a:prstDash val="solid"/>
+                      <a:round/>
+                      <a:headEnd type="none" w="med" len="med"/>
+                      <a:tailEnd type="none" w="med" len="med"/>
+                    </a:lnR>
+                    <a:lnT w="12700" cap="flat" cmpd="sng" algn="ctr">
+                      <a:solidFill>
+                        <a:srgbClr val="FFFFFF"/>
+                      </a:solidFill>
+                      <a:prstDash val="solid"/>
+                      <a:round/>
+                      <a:headEnd type="none" w="med" len="med"/>
+                      <a:tailEnd type="none" w="med" len="med"/>
+                    </a:lnT>
+                    <a:lnB w="12700" cap="flat" cmpd="sng" algn="ctr">
+                      <a:solidFill>
+                        <a:srgbClr val="FFFFFF"/>
+                      </a:solidFill>
+                      <a:prstDash val="solid"/>
+                      <a:round/>
+                      <a:headEnd type="none" w="med" len="med"/>
+                      <a:tailEnd type="none" w="med" len="med"/>
+                    </a:lnB>
+                  </a:tcPr>
+                </a:tc>
+                <a:tc>
+                  <a:txBody>
+                    <a:bodyPr/>
+                    <a:lstStyle/>
+                    <a:p>
+                      <a:pPr algn="ctr" indent="0" marL="0">
+                        <a:buNone/>
+                      </a:pPr>
+                      <a:r>
+                        <a:rPr lang="en-US" sz="1300" dirty="0">
+                          <a:solidFill>
+                            <a:srgbClr val="1F2937"/>
+                          </a:solidFill>
+                          <a:latin typeface="Arial" pitchFamily="34" charset="0"/>
+                          <a:ea typeface="Arial" pitchFamily="34" charset="-122"/>
+                          <a:cs typeface="Arial" pitchFamily="34" charset="-120"/>
+                        </a:rPr>
+                        <a:t>+0.3  (6)</a:t>
+                      </a:r>
+                      <a:endParaRPr lang="en-US" sz="1300" dirty="0">
+                        <a:latin typeface="Arial" charset="0"/>
+                        <a:ea typeface="Arial" charset="0"/>
+                        <a:cs typeface="Arial" charset="0"/>
+                      </a:endParaRPr>
+                    </a:p>
+                  </a:txBody>
+                  <a:tcPr marL="91440" marR="91440" marT="45720" marB="45720" anchor="ctr">
+                    <a:lnL w="12700" cap="flat" cmpd="sng" algn="ctr">
+                      <a:solidFill>
+                        <a:srgbClr val="FFFFFF"/>
+                      </a:solidFill>
+                      <a:prstDash val="solid"/>
+                      <a:round/>
+                      <a:headEnd type="none" w="med" len="med"/>
+                      <a:tailEnd type="none" w="med" len="med"/>
+                    </a:lnL>
+                    <a:lnR w="12700" cap="flat" cmpd="sng" algn="ctr">
+                      <a:solidFill>
+                        <a:srgbClr val="FFFFFF"/>
+                      </a:solidFill>
+                      <a:prstDash val="solid"/>
+                      <a:round/>
+                      <a:headEnd type="none" w="med" len="med"/>
+                      <a:tailEnd type="none" w="med" len="med"/>
+                    </a:lnR>
+                    <a:lnT w="12700" cap="flat" cmpd="sng" algn="ctr">
+                      <a:solidFill>
+                        <a:srgbClr val="FFFFFF"/>
+                      </a:solidFill>
+                      <a:prstDash val="solid"/>
+                      <a:round/>
+                      <a:headEnd type="none" w="med" len="med"/>
+                      <a:tailEnd type="none" w="med" len="med"/>
+                    </a:lnT>
+                    <a:lnB w="12700" cap="flat" cmpd="sng" algn="ctr">
+                      <a:solidFill>
+                        <a:srgbClr val="FFFFFF"/>
+                      </a:solidFill>
+                      <a:prstDash val="solid"/>
+                      <a:round/>
+                      <a:headEnd type="none" w="med" len="med"/>
+                      <a:tailEnd type="none" w="med" len="med"/>
+                    </a:lnB>
+                    <a:solidFill>
+                      <a:srgbClr val="EFE7E9"/>
+                    </a:solidFill>
+                  </a:tcPr>
+                </a:tc>
+                <a:tc>
+                  <a:txBody>
+                    <a:bodyPr/>
+                    <a:lstStyle/>
+                    <a:p>
+                      <a:pPr algn="ctr" indent="0" marL="0">
+                        <a:buNone/>
+                      </a:pPr>
+                      <a:r>
+                        <a:rPr lang="en-US" sz="1300" dirty="0">
+                          <a:solidFill>
+                            <a:srgbClr val="1F2937"/>
+                          </a:solidFill>
+                          <a:latin typeface="Arial" pitchFamily="34" charset="0"/>
+                          <a:ea typeface="Arial" pitchFamily="34" charset="-122"/>
+                          <a:cs typeface="Arial" pitchFamily="34" charset="-120"/>
+                        </a:rPr>
+                        <a:t>—</a:t>
+                      </a:r>
+                      <a:endParaRPr lang="en-US" sz="1300" dirty="0">
+                        <a:latin typeface="Arial" charset="0"/>
+                        <a:ea typeface="Arial" charset="0"/>
+                        <a:cs typeface="Arial" charset="0"/>
+                      </a:endParaRPr>
+                    </a:p>
+                  </a:txBody>
+                  <a:tcPr marL="91440" marR="91440" marT="45720" marB="45720" anchor="ctr">
+                    <a:lnL w="12700" cap="flat" cmpd="sng" algn="ctr">
+                      <a:solidFill>
+                        <a:srgbClr val="FFFFFF"/>
+                      </a:solidFill>
+                      <a:prstDash val="solid"/>
+                      <a:round/>
+                      <a:headEnd type="none" w="med" len="med"/>
+                      <a:tailEnd type="none" w="med" len="med"/>
+                    </a:lnL>
+                    <a:lnR w="12700" cap="flat" cmpd="sng" algn="ctr">
+                      <a:solidFill>
+                        <a:srgbClr val="FFFFFF"/>
+                      </a:solidFill>
+                      <a:prstDash val="solid"/>
+                      <a:round/>
+                      <a:headEnd type="none" w="med" len="med"/>
+                      <a:tailEnd type="none" w="med" len="med"/>
+                    </a:lnR>
+                    <a:lnT w="12700" cap="flat" cmpd="sng" algn="ctr">
+                      <a:solidFill>
+                        <a:srgbClr val="FFFFFF"/>
+                      </a:solidFill>
+                      <a:prstDash val="solid"/>
+                      <a:round/>
+                      <a:headEnd type="none" w="med" len="med"/>
+                      <a:tailEnd type="none" w="med" len="med"/>
+                    </a:lnT>
+                    <a:lnB w="12700" cap="flat" cmpd="sng" algn="ctr">
+                      <a:solidFill>
+                        <a:srgbClr val="FFFFFF"/>
+                      </a:solidFill>
+                      <a:prstDash val="solid"/>
+                      <a:round/>
+                      <a:headEnd type="none" w="med" len="med"/>
+                      <a:tailEnd type="none" w="med" len="med"/>
+                    </a:lnB>
+                    <a:solidFill>
+                      <a:srgbClr val="FFFFFF"/>
+                    </a:solidFill>
+                  </a:tcPr>
+                </a:tc>
+                <a:tc>
+                  <a:txBody>
+                    <a:bodyPr/>
+                    <a:lstStyle/>
+                    <a:p>
+                      <a:pPr algn="ctr" indent="0" marL="0">
+                        <a:buNone/>
+                      </a:pPr>
+                      <a:r>
+                        <a:rPr lang="en-US" sz="1300" dirty="0">
+                          <a:solidFill>
+                            <a:srgbClr val="1F2937"/>
+                          </a:solidFill>
+                          <a:latin typeface="Arial" pitchFamily="34" charset="0"/>
+                          <a:ea typeface="Arial" pitchFamily="34" charset="-122"/>
+                          <a:cs typeface="Arial" pitchFamily="34" charset="-120"/>
+                        </a:rPr>
+                        <a:t>0.0  (2)</a:t>
+                      </a:r>
+                      <a:endParaRPr lang="en-US" sz="1300" dirty="0">
+                        <a:latin typeface="Arial" charset="0"/>
+                        <a:ea typeface="Arial" charset="0"/>
+                        <a:cs typeface="Arial" charset="0"/>
+                      </a:endParaRPr>
+                    </a:p>
+                  </a:txBody>
+                  <a:tcPr marL="91440" marR="91440" marT="45720" marB="45720" anchor="ctr">
+                    <a:lnL w="12700" cap="flat" cmpd="sng" algn="ctr">
+                      <a:solidFill>
+                        <a:srgbClr val="FFFFFF"/>
+                      </a:solidFill>
+                      <a:prstDash val="solid"/>
+                      <a:round/>
+                      <a:headEnd type="none" w="med" len="med"/>
+                      <a:tailEnd type="none" w="med" len="med"/>
+                    </a:lnL>
+                    <a:lnR w="12700" cap="flat" cmpd="sng" algn="ctr">
+                      <a:solidFill>
+                        <a:srgbClr val="FFFFFF"/>
+                      </a:solidFill>
+                      <a:prstDash val="solid"/>
+                      <a:round/>
+                      <a:headEnd type="none" w="med" len="med"/>
+                      <a:tailEnd type="none" w="med" len="med"/>
+                    </a:lnR>
+                    <a:lnT w="12700" cap="flat" cmpd="sng" algn="ctr">
+                      <a:solidFill>
+                        <a:srgbClr val="FFFFFF"/>
+                      </a:solidFill>
+                      <a:prstDash val="solid"/>
+                      <a:round/>
+                      <a:headEnd type="none" w="med" len="med"/>
+                      <a:tailEnd type="none" w="med" len="med"/>
+                    </a:lnT>
+                    <a:lnB w="12700" cap="flat" cmpd="sng" algn="ctr">
+                      <a:solidFill>
+                        <a:srgbClr val="FFFFFF"/>
+                      </a:solidFill>
+                      <a:prstDash val="solid"/>
+                      <a:round/>
+                      <a:headEnd type="none" w="med" len="med"/>
+                      <a:tailEnd type="none" w="med" len="med"/>
+                    </a:lnB>
+                    <a:solidFill>
+                      <a:srgbClr val="F3F4F6"/>
+                    </a:solidFill>
+                  </a:tcPr>
+                </a:tc>
+                <a:tc>
+                  <a:txBody>
+                    <a:bodyPr/>
+                    <a:lstStyle/>
+                    <a:p>
+                      <a:pPr algn="ctr" indent="0" marL="0">
+                        <a:buNone/>
+                      </a:pPr>
+                      <a:r>
+                        <a:rPr lang="en-US" sz="1300" b="1" dirty="0">
+                          <a:solidFill>
+                            <a:srgbClr val="FFFFFF"/>
+                          </a:solidFill>
+                          <a:latin typeface="Arial" pitchFamily="34" charset="0"/>
+                          <a:ea typeface="Arial" pitchFamily="34" charset="-122"/>
+                          <a:cs typeface="Arial" pitchFamily="34" charset="-120"/>
+                        </a:rPr>
+                        <a:t>+4.8  (6)</a:t>
+                      </a:r>
+                      <a:endParaRPr lang="en-US" sz="1300" dirty="0">
+                        <a:latin typeface="Arial" charset="0"/>
+                        <a:ea typeface="Arial" charset="0"/>
+                        <a:cs typeface="Arial" charset="0"/>
+                      </a:endParaRPr>
+                    </a:p>
+                  </a:txBody>
+                  <a:tcPr marL="91440" marR="91440" marT="45720" marB="45720" anchor="ctr">
+                    <a:lnL w="12700" cap="flat" cmpd="sng" algn="ctr">
+                      <a:solidFill>
+                        <a:srgbClr val="FFFFFF"/>
+                      </a:solidFill>
+                      <a:prstDash val="solid"/>
+                      <a:round/>
+                      <a:headEnd type="none" w="med" len="med"/>
+                      <a:tailEnd type="none" w="med" len="med"/>
+                    </a:lnL>
+                    <a:lnR w="12700" cap="flat" cmpd="sng" algn="ctr">
+                      <a:solidFill>
+                        <a:srgbClr val="FFFFFF"/>
+                      </a:solidFill>
+                      <a:prstDash val="solid"/>
+                      <a:round/>
+                      <a:headEnd type="none" w="med" len="med"/>
+                      <a:tailEnd type="none" w="med" len="med"/>
+                    </a:lnR>
+                    <a:lnT w="12700" cap="flat" cmpd="sng" algn="ctr">
+                      <a:solidFill>
+                        <a:srgbClr val="FFFFFF"/>
+                      </a:solidFill>
+                      <a:prstDash val="solid"/>
+                      <a:round/>
+                      <a:headEnd type="none" w="med" len="med"/>
+                      <a:tailEnd type="none" w="med" len="med"/>
+                    </a:lnT>
+                    <a:lnB w="12700" cap="flat" cmpd="sng" algn="ctr">
+                      <a:solidFill>
+                        <a:srgbClr val="FFFFFF"/>
+                      </a:solidFill>
+                      <a:prstDash val="solid"/>
+                      <a:round/>
+                      <a:headEnd type="none" w="med" len="med"/>
+                      <a:tailEnd type="none" w="med" len="med"/>
+                    </a:lnB>
+                    <a:solidFill>
+                      <a:srgbClr val="B5332A"/>
+                    </a:solidFill>
+                  </a:tcPr>
+                </a:tc>
+                <a:tc>
+                  <a:txBody>
+                    <a:bodyPr/>
+                    <a:lstStyle/>
+                    <a:p>
+                      <a:pPr algn="ctr" indent="0" marL="0">
+                        <a:buNone/>
+                      </a:pPr>
+                      <a:r>
+                        <a:rPr lang="en-US" sz="1300" dirty="0">
+                          <a:solidFill>
+                            <a:srgbClr val="1F2937"/>
+                          </a:solidFill>
+                          <a:latin typeface="Arial" pitchFamily="34" charset="0"/>
+                          <a:ea typeface="Arial" pitchFamily="34" charset="-122"/>
+                          <a:cs typeface="Arial" pitchFamily="34" charset="-120"/>
+                        </a:rPr>
+                        <a:t>—</a:t>
+                      </a:r>
+                      <a:endParaRPr lang="en-US" sz="1300" dirty="0">
+                        <a:latin typeface="Arial" charset="0"/>
+                        <a:ea typeface="Arial" charset="0"/>
+                        <a:cs typeface="Arial" charset="0"/>
+                      </a:endParaRPr>
+                    </a:p>
+                  </a:txBody>
+                  <a:tcPr marL="91440" marR="91440" marT="45720" marB="45720" anchor="ctr">
+                    <a:lnL w="12700" cap="flat" cmpd="sng" algn="ctr">
+                      <a:solidFill>
+                        <a:srgbClr val="FFFFFF"/>
+                      </a:solidFill>
+                      <a:prstDash val="solid"/>
+                      <a:round/>
+                      <a:headEnd type="none" w="med" len="med"/>
+                      <a:tailEnd type="none" w="med" len="med"/>
+                    </a:lnL>
+                    <a:lnR w="12700" cap="flat" cmpd="sng" algn="ctr">
+                      <a:solidFill>
+                        <a:srgbClr val="FFFFFF"/>
+                      </a:solidFill>
+                      <a:prstDash val="solid"/>
+                      <a:round/>
+                      <a:headEnd type="none" w="med" len="med"/>
+                      <a:tailEnd type="none" w="med" len="med"/>
+                    </a:lnR>
+                    <a:lnT w="12700" cap="flat" cmpd="sng" algn="ctr">
+                      <a:solidFill>
+                        <a:srgbClr val="FFFFFF"/>
+                      </a:solidFill>
+                      <a:prstDash val="solid"/>
+                      <a:round/>
+                      <a:headEnd type="none" w="med" len="med"/>
+                      <a:tailEnd type="none" w="med" len="med"/>
+                    </a:lnT>
+                    <a:lnB w="12700" cap="flat" cmpd="sng" algn="ctr">
+                      <a:solidFill>
+                        <a:srgbClr val="FFFFFF"/>
+                      </a:solidFill>
+                      <a:prstDash val="solid"/>
+                      <a:round/>
+                      <a:headEnd type="none" w="med" len="med"/>
+                      <a:tailEnd type="none" w="med" len="med"/>
+                    </a:lnB>
+                    <a:solidFill>
+                      <a:srgbClr val="FFFFFF"/>
+                    </a:solidFill>
+                  </a:tcPr>
+                </a:tc>
+                <a:tc>
+                  <a:txBody>
+                    <a:bodyPr/>
+                    <a:lstStyle/>
+                    <a:p>
+                      <a:pPr algn="ctr" indent="0" marL="0">
+                        <a:buNone/>
+                      </a:pPr>
+                      <a:r>
+                        <a:rPr lang="en-US" sz="1300" b="1" dirty="0">
+                          <a:solidFill>
+                            <a:srgbClr val="FFFFFF"/>
+                          </a:solidFill>
+                          <a:latin typeface="Arial" pitchFamily="34" charset="0"/>
+                          <a:ea typeface="Arial" pitchFamily="34" charset="-122"/>
+                          <a:cs typeface="Arial" pitchFamily="34" charset="-120"/>
+                        </a:rPr>
+                        <a:t>+8.8  (2)</a:t>
+                      </a:r>
+                      <a:endParaRPr lang="en-US" sz="1300" dirty="0">
+                        <a:latin typeface="Arial" charset="0"/>
+                        <a:ea typeface="Arial" charset="0"/>
+                        <a:cs typeface="Arial" charset="0"/>
+                      </a:endParaRPr>
+                    </a:p>
+                  </a:txBody>
+                  <a:tcPr marL="91440" marR="91440" marT="45720" marB="45720" anchor="ctr">
+                    <a:lnL w="12700" cap="flat" cmpd="sng" algn="ctr">
+                      <a:solidFill>
+                        <a:srgbClr val="FFFFFF"/>
+                      </a:solidFill>
+                      <a:prstDash val="solid"/>
+                      <a:round/>
+                      <a:headEnd type="none" w="med" len="med"/>
+                      <a:tailEnd type="none" w="med" len="med"/>
+                    </a:lnL>
+                    <a:lnR w="12700" cap="flat" cmpd="sng" algn="ctr">
+                      <a:solidFill>
+                        <a:srgbClr val="FFFFFF"/>
+                      </a:solidFill>
+                      <a:prstDash val="solid"/>
+                      <a:round/>
+                      <a:headEnd type="none" w="med" len="med"/>
+                      <a:tailEnd type="none" w="med" len="med"/>
+                    </a:lnR>
+                    <a:lnT w="12700" cap="flat" cmpd="sng" algn="ctr">
+                      <a:solidFill>
+                        <a:srgbClr val="FFFFFF"/>
+                      </a:solidFill>
+                      <a:prstDash val="solid"/>
+                      <a:round/>
+                      <a:headEnd type="none" w="med" len="med"/>
+                      <a:tailEnd type="none" w="med" len="med"/>
+                    </a:lnT>
+                    <a:lnB w="12700" cap="flat" cmpd="sng" algn="ctr">
+                      <a:solidFill>
+                        <a:srgbClr val="FFFFFF"/>
+                      </a:solidFill>
+                      <a:prstDash val="solid"/>
+                      <a:round/>
+                      <a:headEnd type="none" w="med" len="med"/>
+                      <a:tailEnd type="none" w="med" len="med"/>
+                    </a:lnB>
+                    <a:solidFill>
+                      <a:srgbClr val="B5332A"/>
+                    </a:solidFill>
+                  </a:tcPr>
+                </a:tc>
+              </a:tr>
+              <a:tr h="438912">
+                <a:tc>
+                  <a:txBody>
+                    <a:bodyPr/>
+                    <a:lstStyle/>
+                    <a:p>
+                      <a:pPr algn="r" indent="0" marL="0">
+                        <a:buNone/>
+                      </a:pPr>
+                      <a:r>
+                        <a:rPr lang="en-US" sz="1400" b="1" dirty="0">
+                          <a:solidFill>
+                            <a:srgbClr val="1F2937"/>
+                          </a:solidFill>
+                          <a:latin typeface="Arial" pitchFamily="34" charset="0"/>
+                          <a:ea typeface="Arial" pitchFamily="34" charset="-122"/>
+                          <a:cs typeface="Arial" pitchFamily="34" charset="-120"/>
+                        </a:rPr>
+                        <a:t>G3BP1</a:t>
+                      </a:r>
+                      <a:endParaRPr lang="en-US" sz="1400" dirty="0">
+                        <a:latin typeface="Arial" charset="0"/>
+                        <a:ea typeface="Arial" charset="0"/>
+                        <a:cs typeface="Arial" charset="0"/>
+                      </a:endParaRPr>
+                    </a:p>
+                  </a:txBody>
+                  <a:tcPr marL="91440" marR="91440" marT="45720" marB="45720" anchor="ctr">
+                    <a:lnL w="12700" cap="flat" cmpd="sng" algn="ctr">
+                      <a:solidFill>
+                        <a:srgbClr val="FFFFFF"/>
+                      </a:solidFill>
+                      <a:prstDash val="solid"/>
+                      <a:round/>
+                      <a:headEnd type="none" w="med" len="med"/>
+                      <a:tailEnd type="none" w="med" len="med"/>
+                    </a:lnL>
+                    <a:lnR w="12700" cap="flat" cmpd="sng" algn="ctr">
+                      <a:solidFill>
+                        <a:srgbClr val="FFFFFF"/>
+                      </a:solidFill>
+                      <a:prstDash val="solid"/>
+                      <a:round/>
+                      <a:headEnd type="none" w="med" len="med"/>
+                      <a:tailEnd type="none" w="med" len="med"/>
+                    </a:lnR>
+                    <a:lnT w="12700" cap="flat" cmpd="sng" algn="ctr">
+                      <a:solidFill>
+                        <a:srgbClr val="FFFFFF"/>
+                      </a:solidFill>
+                      <a:prstDash val="solid"/>
+                      <a:round/>
+                      <a:headEnd type="none" w="med" len="med"/>
+                      <a:tailEnd type="none" w="med" len="med"/>
+                    </a:lnT>
+                    <a:lnB w="12700" cap="flat" cmpd="sng" algn="ctr">
+                      <a:solidFill>
+                        <a:srgbClr val="FFFFFF"/>
+                      </a:solidFill>
+                      <a:prstDash val="solid"/>
+                      <a:round/>
+                      <a:headEnd type="none" w="med" len="med"/>
+                      <a:tailEnd type="none" w="med" len="med"/>
+                    </a:lnB>
+                  </a:tcPr>
+                </a:tc>
+                <a:tc>
+                  <a:txBody>
+                    <a:bodyPr/>
+                    <a:lstStyle/>
+                    <a:p>
+                      <a:pPr algn="ctr" indent="0" marL="0">
+                        <a:buNone/>
+                      </a:pPr>
+                      <a:r>
+                        <a:rPr lang="en-US" sz="1300" dirty="0">
+                          <a:solidFill>
+                            <a:srgbClr val="1F2937"/>
+                          </a:solidFill>
+                          <a:latin typeface="Arial" pitchFamily="34" charset="0"/>
+                          <a:ea typeface="Arial" pitchFamily="34" charset="-122"/>
+                          <a:cs typeface="Arial" pitchFamily="34" charset="-120"/>
+                        </a:rPr>
+                        <a:t>+1.8  (5)</a:t>
+                      </a:r>
+                      <a:endParaRPr lang="en-US" sz="1300" dirty="0">
+                        <a:latin typeface="Arial" charset="0"/>
+                        <a:ea typeface="Arial" charset="0"/>
+                        <a:cs typeface="Arial" charset="0"/>
+                      </a:endParaRPr>
+                    </a:p>
+                  </a:txBody>
+                  <a:tcPr marL="91440" marR="91440" marT="45720" marB="45720" anchor="ctr">
+                    <a:lnL w="12700" cap="flat" cmpd="sng" algn="ctr">
+                      <a:solidFill>
+                        <a:srgbClr val="FFFFFF"/>
+                      </a:solidFill>
+                      <a:prstDash val="solid"/>
+                      <a:round/>
+                      <a:headEnd type="none" w="med" len="med"/>
+                      <a:tailEnd type="none" w="med" len="med"/>
+                    </a:lnL>
+                    <a:lnR w="12700" cap="flat" cmpd="sng" algn="ctr">
+                      <a:solidFill>
+                        <a:srgbClr val="FFFFFF"/>
+                      </a:solidFill>
+                      <a:prstDash val="solid"/>
+                      <a:round/>
+                      <a:headEnd type="none" w="med" len="med"/>
+                      <a:tailEnd type="none" w="med" len="med"/>
+                    </a:lnR>
+                    <a:lnT w="12700" cap="flat" cmpd="sng" algn="ctr">
+                      <a:solidFill>
+                        <a:srgbClr val="FFFFFF"/>
+                      </a:solidFill>
+                      <a:prstDash val="solid"/>
+                      <a:round/>
+                      <a:headEnd type="none" w="med" len="med"/>
+                      <a:tailEnd type="none" w="med" len="med"/>
+                    </a:lnT>
+                    <a:lnB w="12700" cap="flat" cmpd="sng" algn="ctr">
+                      <a:solidFill>
+                        <a:srgbClr val="FFFFFF"/>
+                      </a:solidFill>
+                      <a:prstDash val="solid"/>
+                      <a:round/>
+                      <a:headEnd type="none" w="med" len="med"/>
+                      <a:tailEnd type="none" w="med" len="med"/>
+                    </a:lnB>
+                    <a:solidFill>
+                      <a:srgbClr val="D79E9B"/>
+                    </a:solidFill>
+                  </a:tcPr>
+                </a:tc>
+                <a:tc>
+                  <a:txBody>
+                    <a:bodyPr/>
+                    <a:lstStyle/>
+                    <a:p>
+                      <a:pPr algn="ctr" indent="0" marL="0">
+                        <a:buNone/>
+                      </a:pPr>
+                      <a:r>
+                        <a:rPr lang="en-US" sz="1300" dirty="0">
+                          <a:solidFill>
+                            <a:srgbClr val="1F2937"/>
+                          </a:solidFill>
+                          <a:latin typeface="Arial" pitchFamily="34" charset="0"/>
+                          <a:ea typeface="Arial" pitchFamily="34" charset="-122"/>
+                          <a:cs typeface="Arial" pitchFamily="34" charset="-120"/>
+                        </a:rPr>
+                        <a:t>-0.9  (5)</a:t>
+                      </a:r>
+                      <a:endParaRPr lang="en-US" sz="1300" dirty="0">
+                        <a:latin typeface="Arial" charset="0"/>
+                        <a:ea typeface="Arial" charset="0"/>
+                        <a:cs typeface="Arial" charset="0"/>
+                      </a:endParaRPr>
+                    </a:p>
+                  </a:txBody>
+                  <a:tcPr marL="91440" marR="91440" marT="45720" marB="45720" anchor="ctr">
+                    <a:lnL w="12700" cap="flat" cmpd="sng" algn="ctr">
+                      <a:solidFill>
+                        <a:srgbClr val="FFFFFF"/>
+                      </a:solidFill>
+                      <a:prstDash val="solid"/>
+                      <a:round/>
+                      <a:headEnd type="none" w="med" len="med"/>
+                      <a:tailEnd type="none" w="med" len="med"/>
+                    </a:lnL>
+                    <a:lnR w="12700" cap="flat" cmpd="sng" algn="ctr">
+                      <a:solidFill>
+                        <a:srgbClr val="FFFFFF"/>
+                      </a:solidFill>
+                      <a:prstDash val="solid"/>
+                      <a:round/>
+                      <a:headEnd type="none" w="med" len="med"/>
+                      <a:tailEnd type="none" w="med" len="med"/>
+                    </a:lnR>
+                    <a:lnT w="12700" cap="flat" cmpd="sng" algn="ctr">
+                      <a:solidFill>
+                        <a:srgbClr val="FFFFFF"/>
+                      </a:solidFill>
+                      <a:prstDash val="solid"/>
+                      <a:round/>
+                      <a:headEnd type="none" w="med" len="med"/>
+                      <a:tailEnd type="none" w="med" len="med"/>
+                    </a:lnT>
+                    <a:lnB w="12700" cap="flat" cmpd="sng" algn="ctr">
+                      <a:solidFill>
+                        <a:srgbClr val="FFFFFF"/>
+                      </a:solidFill>
+                      <a:prstDash val="solid"/>
+                      <a:round/>
+                      <a:headEnd type="none" w="med" len="med"/>
+                      <a:tailEnd type="none" w="med" len="med"/>
+                    </a:lnB>
+                    <a:solidFill>
+                      <a:srgbClr val="C9D1DD"/>
+                    </a:solidFill>
+                  </a:tcPr>
+                </a:tc>
+                <a:tc>
+                  <a:txBody>
+                    <a:bodyPr/>
+                    <a:lstStyle/>
+                    <a:p>
+                      <a:pPr algn="ctr" indent="0" marL="0">
+                        <a:buNone/>
+                      </a:pPr>
+                      <a:r>
+                        <a:rPr lang="en-US" sz="1300" b="1" dirty="0">
+                          <a:solidFill>
+                            <a:srgbClr val="FFFFFF"/>
+                          </a:solidFill>
+                          <a:latin typeface="Arial" pitchFamily="34" charset="0"/>
+                          <a:ea typeface="Arial" pitchFamily="34" charset="-122"/>
+                          <a:cs typeface="Arial" pitchFamily="34" charset="-120"/>
+                        </a:rPr>
+                        <a:t>-3.2  (6)</a:t>
+                      </a:r>
+                      <a:endParaRPr lang="en-US" sz="1300" dirty="0">
+                        <a:latin typeface="Arial" charset="0"/>
+                        <a:ea typeface="Arial" charset="0"/>
+                        <a:cs typeface="Arial" charset="0"/>
+                      </a:endParaRPr>
+                    </a:p>
+                  </a:txBody>
+                  <a:tcPr marL="91440" marR="91440" marT="45720" marB="45720" anchor="ctr">
+                    <a:lnL w="12700" cap="flat" cmpd="sng" algn="ctr">
+                      <a:solidFill>
+                        <a:srgbClr val="FFFFFF"/>
+                      </a:solidFill>
+                      <a:prstDash val="solid"/>
+                      <a:round/>
+                      <a:headEnd type="none" w="med" len="med"/>
+                      <a:tailEnd type="none" w="med" len="med"/>
+                    </a:lnL>
+                    <a:lnR w="12700" cap="flat" cmpd="sng" algn="ctr">
+                      <a:solidFill>
+                        <a:srgbClr val="FFFFFF"/>
+                      </a:solidFill>
+                      <a:prstDash val="solid"/>
+                      <a:round/>
+                      <a:headEnd type="none" w="med" len="med"/>
+                      <a:tailEnd type="none" w="med" len="med"/>
+                    </a:lnR>
+                    <a:lnT w="12700" cap="flat" cmpd="sng" algn="ctr">
+                      <a:solidFill>
+                        <a:srgbClr val="FFFFFF"/>
+                      </a:solidFill>
+                      <a:prstDash val="solid"/>
+                      <a:round/>
+                      <a:headEnd type="none" w="med" len="med"/>
+                      <a:tailEnd type="none" w="med" len="med"/>
+                    </a:lnT>
+                    <a:lnB w="12700" cap="flat" cmpd="sng" algn="ctr">
+                      <a:solidFill>
+                        <a:srgbClr val="FFFFFF"/>
+                      </a:solidFill>
+                      <a:prstDash val="solid"/>
+                      <a:round/>
+                      <a:headEnd type="none" w="med" len="med"/>
+                      <a:tailEnd type="none" w="med" len="med"/>
+                    </a:lnB>
+                    <a:solidFill>
+                      <a:srgbClr val="627BA1"/>
+                    </a:solidFill>
+                  </a:tcPr>
+                </a:tc>
+                <a:tc>
+                  <a:txBody>
+                    <a:bodyPr/>
+                    <a:lstStyle/>
+                    <a:p>
+                      <a:pPr algn="ctr" indent="0" marL="0">
+                        <a:buNone/>
+                      </a:pPr>
+                      <a:r>
+                        <a:rPr lang="en-US" sz="1300" dirty="0">
+                          <a:solidFill>
+                            <a:srgbClr val="1F2937"/>
+                          </a:solidFill>
+                          <a:latin typeface="Arial" pitchFamily="34" charset="0"/>
+                          <a:ea typeface="Arial" pitchFamily="34" charset="-122"/>
+                          <a:cs typeface="Arial" pitchFamily="34" charset="-120"/>
+                        </a:rPr>
+                        <a:t>+1.2  (5)</a:t>
+                      </a:r>
+                      <a:endParaRPr lang="en-US" sz="1300" dirty="0">
+                        <a:latin typeface="Arial" charset="0"/>
+                        <a:ea typeface="Arial" charset="0"/>
+                        <a:cs typeface="Arial" charset="0"/>
+                      </a:endParaRPr>
+                    </a:p>
+                  </a:txBody>
+                  <a:tcPr marL="91440" marR="91440" marT="45720" marB="45720" anchor="ctr">
+                    <a:lnL w="12700" cap="flat" cmpd="sng" algn="ctr">
+                      <a:solidFill>
+                        <a:srgbClr val="FFFFFF"/>
+                      </a:solidFill>
+                      <a:prstDash val="solid"/>
+                      <a:round/>
+                      <a:headEnd type="none" w="med" len="med"/>
+                      <a:tailEnd type="none" w="med" len="med"/>
+                    </a:lnL>
+                    <a:lnR w="12700" cap="flat" cmpd="sng" algn="ctr">
+                      <a:solidFill>
+                        <a:srgbClr val="FFFFFF"/>
+                      </a:solidFill>
+                      <a:prstDash val="solid"/>
+                      <a:round/>
+                      <a:headEnd type="none" w="med" len="med"/>
+                      <a:tailEnd type="none" w="med" len="med"/>
+                    </a:lnR>
+                    <a:lnT w="12700" cap="flat" cmpd="sng" algn="ctr">
+                      <a:solidFill>
+                        <a:srgbClr val="FFFFFF"/>
+                      </a:solidFill>
+                      <a:prstDash val="solid"/>
+                      <a:round/>
+                      <a:headEnd type="none" w="med" len="med"/>
+                      <a:tailEnd type="none" w="med" len="med"/>
+                    </a:lnT>
+                    <a:lnB w="12700" cap="flat" cmpd="sng" algn="ctr">
+                      <a:solidFill>
+                        <a:srgbClr val="FFFFFF"/>
+                      </a:solidFill>
+                      <a:prstDash val="solid"/>
+                      <a:round/>
+                      <a:headEnd type="none" w="med" len="med"/>
+                      <a:tailEnd type="none" w="med" len="med"/>
+                    </a:lnB>
+                    <a:solidFill>
+                      <a:srgbClr val="E1BBB9"/>
+                    </a:solidFill>
+                  </a:tcPr>
+                </a:tc>
+                <a:tc>
+                  <a:txBody>
+                    <a:bodyPr/>
+                    <a:lstStyle/>
+                    <a:p>
+                      <a:pPr algn="ctr" indent="0" marL="0">
+                        <a:buNone/>
+                      </a:pPr>
+                      <a:r>
+                        <a:rPr lang="en-US" sz="1300" dirty="0">
+                          <a:solidFill>
+                            <a:srgbClr val="1F2937"/>
+                          </a:solidFill>
+                          <a:latin typeface="Arial" pitchFamily="34" charset="0"/>
+                          <a:ea typeface="Arial" pitchFamily="34" charset="-122"/>
+                          <a:cs typeface="Arial" pitchFamily="34" charset="-120"/>
+                        </a:rPr>
+                        <a:t>-0.8  (5)</a:t>
+                      </a:r>
+                      <a:endParaRPr lang="en-US" sz="1300" dirty="0">
+                        <a:latin typeface="Arial" charset="0"/>
+                        <a:ea typeface="Arial" charset="0"/>
+                        <a:cs typeface="Arial" charset="0"/>
+                      </a:endParaRPr>
+                    </a:p>
+                  </a:txBody>
+                  <a:tcPr marL="91440" marR="91440" marT="45720" marB="45720" anchor="ctr">
+                    <a:lnL w="12700" cap="flat" cmpd="sng" algn="ctr">
+                      <a:solidFill>
+                        <a:srgbClr val="FFFFFF"/>
+                      </a:solidFill>
+                      <a:prstDash val="solid"/>
+                      <a:round/>
+                      <a:headEnd type="none" w="med" len="med"/>
+                      <a:tailEnd type="none" w="med" len="med"/>
+                    </a:lnL>
+                    <a:lnR w="12700" cap="flat" cmpd="sng" algn="ctr">
+                      <a:solidFill>
+                        <a:srgbClr val="FFFFFF"/>
+                      </a:solidFill>
+                      <a:prstDash val="solid"/>
+                      <a:round/>
+                      <a:headEnd type="none" w="med" len="med"/>
+                      <a:tailEnd type="none" w="med" len="med"/>
+                    </a:lnR>
+                    <a:lnT w="12700" cap="flat" cmpd="sng" algn="ctr">
+                      <a:solidFill>
+                        <a:srgbClr val="FFFFFF"/>
+                      </a:solidFill>
+                      <a:prstDash val="solid"/>
+                      <a:round/>
+                      <a:headEnd type="none" w="med" len="med"/>
+                      <a:tailEnd type="none" w="med" len="med"/>
+                    </a:lnT>
+                    <a:lnB w="12700" cap="flat" cmpd="sng" algn="ctr">
+                      <a:solidFill>
+                        <a:srgbClr val="FFFFFF"/>
+                      </a:solidFill>
+                      <a:prstDash val="solid"/>
+                      <a:round/>
+                      <a:headEnd type="none" w="med" len="med"/>
+                      <a:tailEnd type="none" w="med" len="med"/>
+                    </a:lnB>
+                    <a:solidFill>
+                      <a:srgbClr val="CDD5E0"/>
+                    </a:solidFill>
+                  </a:tcPr>
+                </a:tc>
+                <a:tc>
+                  <a:txBody>
+                    <a:bodyPr/>
+                    <a:lstStyle/>
+                    <a:p>
+                      <a:pPr algn="ctr" indent="0" marL="0">
+                        <a:buNone/>
+                      </a:pPr>
+                      <a:r>
+                        <a:rPr lang="en-US" sz="1300" dirty="0">
+                          <a:solidFill>
+                            <a:srgbClr val="1F2937"/>
+                          </a:solidFill>
+                          <a:latin typeface="Arial" pitchFamily="34" charset="0"/>
+                          <a:ea typeface="Arial" pitchFamily="34" charset="-122"/>
+                          <a:cs typeface="Arial" pitchFamily="34" charset="-120"/>
+                        </a:rPr>
+                        <a:t>-1.5  (6)</a:t>
+                      </a:r>
+                      <a:endParaRPr lang="en-US" sz="1300" dirty="0">
+                        <a:latin typeface="Arial" charset="0"/>
+                        <a:ea typeface="Arial" charset="0"/>
+                        <a:cs typeface="Arial" charset="0"/>
+                      </a:endParaRPr>
+                    </a:p>
+                  </a:txBody>
+                  <a:tcPr marL="91440" marR="91440" marT="45720" marB="45720" anchor="ctr">
+                    <a:lnL w="12700" cap="flat" cmpd="sng" algn="ctr">
+                      <a:solidFill>
+                        <a:srgbClr val="FFFFFF"/>
+                      </a:solidFill>
+                      <a:prstDash val="solid"/>
+                      <a:round/>
+                      <a:headEnd type="none" w="med" len="med"/>
+                      <a:tailEnd type="none" w="med" len="med"/>
+                    </a:lnL>
+                    <a:lnR w="12700" cap="flat" cmpd="sng" algn="ctr">
+                      <a:solidFill>
+                        <a:srgbClr val="FFFFFF"/>
+                      </a:solidFill>
+                      <a:prstDash val="solid"/>
+                      <a:round/>
+                      <a:headEnd type="none" w="med" len="med"/>
+                      <a:tailEnd type="none" w="med" len="med"/>
+                    </a:lnR>
+                    <a:lnT w="12700" cap="flat" cmpd="sng" algn="ctr">
+                      <a:solidFill>
+                        <a:srgbClr val="FFFFFF"/>
+                      </a:solidFill>
+                      <a:prstDash val="solid"/>
+                      <a:round/>
+                      <a:headEnd type="none" w="med" len="med"/>
+                      <a:tailEnd type="none" w="med" len="med"/>
+                    </a:lnT>
+                    <a:lnB w="12700" cap="flat" cmpd="sng" algn="ctr">
+                      <a:solidFill>
+                        <a:srgbClr val="FFFFFF"/>
+                      </a:solidFill>
+                      <a:prstDash val="solid"/>
+                      <a:round/>
+                      <a:headEnd type="none" w="med" len="med"/>
+                      <a:tailEnd type="none" w="med" len="med"/>
+                    </a:lnB>
+                    <a:solidFill>
+                      <a:srgbClr val="AEBBCD"/>
+                    </a:solidFill>
+                  </a:tcPr>
+                </a:tc>
+              </a:tr>
+              <a:tr h="438912">
+                <a:tc>
+                  <a:txBody>
+                    <a:bodyPr/>
+                    <a:lstStyle/>
+                    <a:p>
+                      <a:pPr algn="r" indent="0" marL="0">
+                        <a:buNone/>
+                      </a:pPr>
+                      <a:r>
+                        <a:rPr lang="en-US" sz="1400" b="1" dirty="0">
+                          <a:solidFill>
+                            <a:srgbClr val="6B7280"/>
+                          </a:solidFill>
+                          <a:latin typeface="Arial" pitchFamily="34" charset="0"/>
+                          <a:ea typeface="Arial" pitchFamily="34" charset="-122"/>
+                          <a:cs typeface="Arial" pitchFamily="34" charset="-120"/>
+                        </a:rPr>
+                        <a:t>All sites (proteome)</a:t>
+                      </a:r>
+                      <a:endParaRPr lang="en-US" sz="1400" dirty="0">
+                        <a:latin typeface="Arial" charset="0"/>
+                        <a:ea typeface="Arial" charset="0"/>
+                        <a:cs typeface="Arial" charset="0"/>
+                      </a:endParaRPr>
+                    </a:p>
+                  </a:txBody>
+                  <a:tcPr marL="91440" marR="91440" marT="45720" marB="45720" anchor="ctr">
+                    <a:lnL w="12700" cap="flat" cmpd="sng" algn="ctr">
+                      <a:solidFill>
+                        <a:srgbClr val="FFFFFF"/>
+                      </a:solidFill>
+                      <a:prstDash val="solid"/>
+                      <a:round/>
+                      <a:headEnd type="none" w="med" len="med"/>
+                      <a:tailEnd type="none" w="med" len="med"/>
+                    </a:lnL>
+                    <a:lnR w="12700" cap="flat" cmpd="sng" algn="ctr">
+                      <a:solidFill>
+                        <a:srgbClr val="FFFFFF"/>
+                      </a:solidFill>
+                      <a:prstDash val="solid"/>
+                      <a:round/>
+                      <a:headEnd type="none" w="med" len="med"/>
+                      <a:tailEnd type="none" w="med" len="med"/>
+                    </a:lnR>
+                    <a:lnT w="12700" cap="flat" cmpd="sng" algn="ctr">
+                      <a:solidFill>
+                        <a:srgbClr val="FFFFFF"/>
+                      </a:solidFill>
+                      <a:prstDash val="solid"/>
+                      <a:round/>
+                      <a:headEnd type="none" w="med" len="med"/>
+                      <a:tailEnd type="none" w="med" len="med"/>
+                    </a:lnT>
+                    <a:lnB w="12700" cap="flat" cmpd="sng" algn="ctr">
+                      <a:solidFill>
+                        <a:srgbClr val="FFFFFF"/>
+                      </a:solidFill>
+                      <a:prstDash val="solid"/>
+                      <a:round/>
+                      <a:headEnd type="none" w="med" len="med"/>
+                      <a:tailEnd type="none" w="med" len="med"/>
+                    </a:lnB>
+                  </a:tcPr>
+                </a:tc>
+                <a:tc>
+                  <a:txBody>
+                    <a:bodyPr/>
+                    <a:lstStyle/>
+                    <a:p>
+                      <a:pPr algn="ctr" indent="0" marL="0">
+                        <a:buNone/>
+                      </a:pPr>
+                      <a:r>
+                        <a:rPr lang="en-US" sz="1300" dirty="0">
+                          <a:solidFill>
+                            <a:srgbClr val="1F2937"/>
+                          </a:solidFill>
+                          <a:latin typeface="Arial" pitchFamily="34" charset="0"/>
+                          <a:ea typeface="Arial" pitchFamily="34" charset="-122"/>
+                          <a:cs typeface="Arial" pitchFamily="34" charset="-120"/>
+                        </a:rPr>
+                        <a:t>+0.1  (748)</a:t>
+                      </a:r>
+                      <a:endParaRPr lang="en-US" sz="1300" dirty="0">
+                        <a:latin typeface="Arial" charset="0"/>
+                        <a:ea typeface="Arial" charset="0"/>
+                        <a:cs typeface="Arial" charset="0"/>
+                      </a:endParaRPr>
+                    </a:p>
+                  </a:txBody>
+                  <a:tcPr marL="91440" marR="91440" marT="45720" marB="45720" anchor="ctr">
+                    <a:lnL w="12700" cap="flat" cmpd="sng" algn="ctr">
+                      <a:solidFill>
+                        <a:srgbClr val="FFFFFF"/>
+                      </a:solidFill>
+                      <a:prstDash val="solid"/>
+                      <a:round/>
+                      <a:headEnd type="none" w="med" len="med"/>
+                      <a:tailEnd type="none" w="med" len="med"/>
+                    </a:lnL>
+                    <a:lnR w="12700" cap="flat" cmpd="sng" algn="ctr">
+                      <a:solidFill>
+                        <a:srgbClr val="FFFFFF"/>
+                      </a:solidFill>
+                      <a:prstDash val="solid"/>
+                      <a:round/>
+                      <a:headEnd type="none" w="med" len="med"/>
+                      <a:tailEnd type="none" w="med" len="med"/>
+                    </a:lnR>
+                    <a:lnT w="12700" cap="flat" cmpd="sng" algn="ctr">
+                      <a:solidFill>
+                        <a:srgbClr val="FFFFFF"/>
+                      </a:solidFill>
+                      <a:prstDash val="solid"/>
+                      <a:round/>
+                      <a:headEnd type="none" w="med" len="med"/>
+                      <a:tailEnd type="none" w="med" len="med"/>
+                    </a:lnT>
+                    <a:lnB w="12700" cap="flat" cmpd="sng" algn="ctr">
+                      <a:solidFill>
+                        <a:srgbClr val="FFFFFF"/>
+                      </a:solidFill>
+                      <a:prstDash val="solid"/>
+                      <a:round/>
+                      <a:headEnd type="none" w="med" len="med"/>
+                      <a:tailEnd type="none" w="med" len="med"/>
+                    </a:lnB>
+                    <a:solidFill>
+                      <a:srgbClr val="F1EFF1"/>
+                    </a:solidFill>
+                  </a:tcPr>
+                </a:tc>
+                <a:tc>
+                  <a:txBody>
+                    <a:bodyPr/>
+                    <a:lstStyle/>
+                    <a:p>
+                      <a:pPr algn="ctr" indent="0" marL="0">
+                        <a:buNone/>
+                      </a:pPr>
+                      <a:r>
+                        <a:rPr lang="en-US" sz="1300" dirty="0">
+                          <a:solidFill>
+                            <a:srgbClr val="1F2937"/>
+                          </a:solidFill>
+                          <a:latin typeface="Arial" pitchFamily="34" charset="0"/>
+                          <a:ea typeface="Arial" pitchFamily="34" charset="-122"/>
+                          <a:cs typeface="Arial" pitchFamily="34" charset="-120"/>
+                        </a:rPr>
+                        <a:t>-0.3  (569)</a:t>
+                      </a:r>
+                      <a:endParaRPr lang="en-US" sz="1300" dirty="0">
+                        <a:latin typeface="Arial" charset="0"/>
+                        <a:ea typeface="Arial" charset="0"/>
+                        <a:cs typeface="Arial" charset="0"/>
+                      </a:endParaRPr>
+                    </a:p>
+                  </a:txBody>
+                  <a:tcPr marL="91440" marR="91440" marT="45720" marB="45720" anchor="ctr">
+                    <a:lnL w="12700" cap="flat" cmpd="sng" algn="ctr">
+                      <a:solidFill>
+                        <a:srgbClr val="FFFFFF"/>
+                      </a:solidFill>
+                      <a:prstDash val="solid"/>
+                      <a:round/>
+                      <a:headEnd type="none" w="med" len="med"/>
+                      <a:tailEnd type="none" w="med" len="med"/>
+                    </a:lnL>
+                    <a:lnR w="12700" cap="flat" cmpd="sng" algn="ctr">
+                      <a:solidFill>
+                        <a:srgbClr val="FFFFFF"/>
+                      </a:solidFill>
+                      <a:prstDash val="solid"/>
+                      <a:round/>
+                      <a:headEnd type="none" w="med" len="med"/>
+                      <a:tailEnd type="none" w="med" len="med"/>
+                    </a:lnR>
+                    <a:lnT w="12700" cap="flat" cmpd="sng" algn="ctr">
+                      <a:solidFill>
+                        <a:srgbClr val="FFFFFF"/>
+                      </a:solidFill>
+                      <a:prstDash val="solid"/>
+                      <a:round/>
+                      <a:headEnd type="none" w="med" len="med"/>
+                      <a:tailEnd type="none" w="med" len="med"/>
+                    </a:lnT>
+                    <a:lnB w="12700" cap="flat" cmpd="sng" algn="ctr">
+                      <a:solidFill>
+                        <a:srgbClr val="FFFFFF"/>
+                      </a:solidFill>
+                      <a:prstDash val="solid"/>
+                      <a:round/>
+                      <a:headEnd type="none" w="med" len="med"/>
+                      <a:tailEnd type="none" w="med" len="med"/>
+                    </a:lnB>
+                    <a:solidFill>
+                      <a:srgbClr val="E6EAEF"/>
+                    </a:solidFill>
+                  </a:tcPr>
+                </a:tc>
+                <a:tc>
+                  <a:txBody>
+                    <a:bodyPr/>
+                    <a:lstStyle/>
+                    <a:p>
+                      <a:pPr algn="ctr" indent="0" marL="0">
+                        <a:buNone/>
+                      </a:pPr>
+                      <a:r>
+                        <a:rPr lang="en-US" sz="1300" dirty="0">
+                          <a:solidFill>
+                            <a:srgbClr val="1F2937"/>
+                          </a:solidFill>
+                          <a:latin typeface="Arial" pitchFamily="34" charset="0"/>
+                          <a:ea typeface="Arial" pitchFamily="34" charset="-122"/>
+                          <a:cs typeface="Arial" pitchFamily="34" charset="-120"/>
+                        </a:rPr>
+                        <a:t>-0.3  (461)</a:t>
+                      </a:r>
+                      <a:endParaRPr lang="en-US" sz="1300" dirty="0">
+                        <a:latin typeface="Arial" charset="0"/>
+                        <a:ea typeface="Arial" charset="0"/>
+                        <a:cs typeface="Arial" charset="0"/>
+                      </a:endParaRPr>
+                    </a:p>
+                  </a:txBody>
+                  <a:tcPr marL="91440" marR="91440" marT="45720" marB="45720" anchor="ctr">
+                    <a:lnL w="12700" cap="flat" cmpd="sng" algn="ctr">
+                      <a:solidFill>
+                        <a:srgbClr val="FFFFFF"/>
+                      </a:solidFill>
+                      <a:prstDash val="solid"/>
+                      <a:round/>
+                      <a:headEnd type="none" w="med" len="med"/>
+                      <a:tailEnd type="none" w="med" len="med"/>
+                    </a:lnL>
+                    <a:lnR w="12700" cap="flat" cmpd="sng" algn="ctr">
+                      <a:solidFill>
+                        <a:srgbClr val="FFFFFF"/>
+                      </a:solidFill>
+                      <a:prstDash val="solid"/>
+                      <a:round/>
+                      <a:headEnd type="none" w="med" len="med"/>
+                      <a:tailEnd type="none" w="med" len="med"/>
+                    </a:lnR>
+                    <a:lnT w="12700" cap="flat" cmpd="sng" algn="ctr">
+                      <a:solidFill>
+                        <a:srgbClr val="FFFFFF"/>
+                      </a:solidFill>
+                      <a:prstDash val="solid"/>
+                      <a:round/>
+                      <a:headEnd type="none" w="med" len="med"/>
+                      <a:tailEnd type="none" w="med" len="med"/>
+                    </a:lnT>
+                    <a:lnB w="12700" cap="flat" cmpd="sng" algn="ctr">
+                      <a:solidFill>
+                        <a:srgbClr val="FFFFFF"/>
+                      </a:solidFill>
+                      <a:prstDash val="solid"/>
+                      <a:round/>
+                      <a:headEnd type="none" w="med" len="med"/>
+                      <a:tailEnd type="none" w="med" len="med"/>
+                    </a:lnB>
+                    <a:solidFill>
+                      <a:srgbClr val="E4E8ED"/>
+                    </a:solidFill>
+                  </a:tcPr>
+                </a:tc>
+                <a:tc>
+                  <a:txBody>
+                    <a:bodyPr/>
+                    <a:lstStyle/>
+                    <a:p>
+                      <a:pPr algn="ctr" indent="0" marL="0">
+                        <a:buNone/>
+                      </a:pPr>
+                      <a:r>
+                        <a:rPr lang="en-US" sz="1300" dirty="0">
+                          <a:solidFill>
+                            <a:srgbClr val="1F2937"/>
+                          </a:solidFill>
+                          <a:latin typeface="Arial" pitchFamily="34" charset="0"/>
+                          <a:ea typeface="Arial" pitchFamily="34" charset="-122"/>
+                          <a:cs typeface="Arial" pitchFamily="34" charset="-120"/>
+                        </a:rPr>
+                        <a:t>0.0  (748)</a:t>
+                      </a:r>
+                      <a:endParaRPr lang="en-US" sz="1300" dirty="0">
+                        <a:latin typeface="Arial" charset="0"/>
+                        <a:ea typeface="Arial" charset="0"/>
+                        <a:cs typeface="Arial" charset="0"/>
+                      </a:endParaRPr>
+                    </a:p>
+                  </a:txBody>
+                  <a:tcPr marL="91440" marR="91440" marT="45720" marB="45720" anchor="ctr">
+                    <a:lnL w="12700" cap="flat" cmpd="sng" algn="ctr">
+                      <a:solidFill>
+                        <a:srgbClr val="FFFFFF"/>
+                      </a:solidFill>
+                      <a:prstDash val="solid"/>
+                      <a:round/>
+                      <a:headEnd type="none" w="med" len="med"/>
+                      <a:tailEnd type="none" w="med" len="med"/>
+                    </a:lnL>
+                    <a:lnR w="12700" cap="flat" cmpd="sng" algn="ctr">
+                      <a:solidFill>
+                        <a:srgbClr val="FFFFFF"/>
+                      </a:solidFill>
+                      <a:prstDash val="solid"/>
+                      <a:round/>
+                      <a:headEnd type="none" w="med" len="med"/>
+                      <a:tailEnd type="none" w="med" len="med"/>
+                    </a:lnR>
+                    <a:lnT w="12700" cap="flat" cmpd="sng" algn="ctr">
+                      <a:solidFill>
+                        <a:srgbClr val="FFFFFF"/>
+                      </a:solidFill>
+                      <a:prstDash val="solid"/>
+                      <a:round/>
+                      <a:headEnd type="none" w="med" len="med"/>
+                      <a:tailEnd type="none" w="med" len="med"/>
+                    </a:lnT>
+                    <a:lnB w="12700" cap="flat" cmpd="sng" algn="ctr">
+                      <a:solidFill>
+                        <a:srgbClr val="FFFFFF"/>
+                      </a:solidFill>
+                      <a:prstDash val="solid"/>
+                      <a:round/>
+                      <a:headEnd type="none" w="med" len="med"/>
+                      <a:tailEnd type="none" w="med" len="med"/>
+                    </a:lnB>
+                    <a:solidFill>
+                      <a:srgbClr val="F3F4F6"/>
+                    </a:solidFill>
+                  </a:tcPr>
+                </a:tc>
+                <a:tc>
+                  <a:txBody>
+                    <a:bodyPr/>
+                    <a:lstStyle/>
+                    <a:p>
+                      <a:pPr algn="ctr" indent="0" marL="0">
+                        <a:buNone/>
+                      </a:pPr>
+                      <a:r>
+                        <a:rPr lang="en-US" sz="1300" dirty="0">
+                          <a:solidFill>
+                            <a:srgbClr val="1F2937"/>
+                          </a:solidFill>
+                          <a:latin typeface="Arial" pitchFamily="34" charset="0"/>
+                          <a:ea typeface="Arial" pitchFamily="34" charset="-122"/>
+                          <a:cs typeface="Arial" pitchFamily="34" charset="-120"/>
+                        </a:rPr>
+                        <a:t>-0.3  (569)</a:t>
+                      </a:r>
+                      <a:endParaRPr lang="en-US" sz="1300" dirty="0">
+                        <a:latin typeface="Arial" charset="0"/>
+                        <a:ea typeface="Arial" charset="0"/>
+                        <a:cs typeface="Arial" charset="0"/>
+                      </a:endParaRPr>
+                    </a:p>
+                  </a:txBody>
+                  <a:tcPr marL="91440" marR="91440" marT="45720" marB="45720" anchor="ctr">
+                    <a:lnL w="12700" cap="flat" cmpd="sng" algn="ctr">
+                      <a:solidFill>
+                        <a:srgbClr val="FFFFFF"/>
+                      </a:solidFill>
+                      <a:prstDash val="solid"/>
+                      <a:round/>
+                      <a:headEnd type="none" w="med" len="med"/>
+                      <a:tailEnd type="none" w="med" len="med"/>
+                    </a:lnL>
+                    <a:lnR w="12700" cap="flat" cmpd="sng" algn="ctr">
+                      <a:solidFill>
+                        <a:srgbClr val="FFFFFF"/>
+                      </a:solidFill>
+                      <a:prstDash val="solid"/>
+                      <a:round/>
+                      <a:headEnd type="none" w="med" len="med"/>
+                      <a:tailEnd type="none" w="med" len="med"/>
+                    </a:lnR>
+                    <a:lnT w="12700" cap="flat" cmpd="sng" algn="ctr">
+                      <a:solidFill>
+                        <a:srgbClr val="FFFFFF"/>
+                      </a:solidFill>
+                      <a:prstDash val="solid"/>
+                      <a:round/>
+                      <a:headEnd type="none" w="med" len="med"/>
+                      <a:tailEnd type="none" w="med" len="med"/>
+                    </a:lnT>
+                    <a:lnB w="12700" cap="flat" cmpd="sng" algn="ctr">
+                      <a:solidFill>
+                        <a:srgbClr val="FFFFFF"/>
+                      </a:solidFill>
+                      <a:prstDash val="solid"/>
+                      <a:round/>
+                      <a:headEnd type="none" w="med" len="med"/>
+                      <a:tailEnd type="none" w="med" len="med"/>
+                    </a:lnB>
+                    <a:solidFill>
+                      <a:srgbClr val="E3E7ED"/>
+                    </a:solidFill>
+                  </a:tcPr>
+                </a:tc>
+                <a:tc>
+                  <a:txBody>
+                    <a:bodyPr/>
+                    <a:lstStyle/>
+                    <a:p>
+                      <a:pPr algn="ctr" indent="0" marL="0">
+                        <a:buNone/>
+                      </a:pPr>
+                      <a:r>
+                        <a:rPr lang="en-US" sz="1300" dirty="0">
+                          <a:solidFill>
+                            <a:srgbClr val="1F2937"/>
+                          </a:solidFill>
+                          <a:latin typeface="Arial" pitchFamily="34" charset="0"/>
+                          <a:ea typeface="Arial" pitchFamily="34" charset="-122"/>
+                          <a:cs typeface="Arial" pitchFamily="34" charset="-120"/>
+                        </a:rPr>
+                        <a:t>+0.0  (461)</a:t>
+                      </a:r>
+                      <a:endParaRPr lang="en-US" sz="1300" dirty="0">
+                        <a:latin typeface="Arial" charset="0"/>
+                        <a:ea typeface="Arial" charset="0"/>
+                        <a:cs typeface="Arial" charset="0"/>
+                      </a:endParaRPr>
+                    </a:p>
+                  </a:txBody>
+                  <a:tcPr marL="91440" marR="91440" marT="45720" marB="45720" anchor="ctr">
+                    <a:lnL w="12700" cap="flat" cmpd="sng" algn="ctr">
+                      <a:solidFill>
+                        <a:srgbClr val="FFFFFF"/>
+                      </a:solidFill>
+                      <a:prstDash val="solid"/>
+                      <a:round/>
+                      <a:headEnd type="none" w="med" len="med"/>
+                      <a:tailEnd type="none" w="med" len="med"/>
+                    </a:lnL>
+                    <a:lnR w="12700" cap="flat" cmpd="sng" algn="ctr">
+                      <a:solidFill>
+                        <a:srgbClr val="FFFFFF"/>
+                      </a:solidFill>
+                      <a:prstDash val="solid"/>
+                      <a:round/>
+                      <a:headEnd type="none" w="med" len="med"/>
+                      <a:tailEnd type="none" w="med" len="med"/>
+                    </a:lnR>
+                    <a:lnT w="12700" cap="flat" cmpd="sng" algn="ctr">
+                      <a:solidFill>
+                        <a:srgbClr val="FFFFFF"/>
+                      </a:solidFill>
+                      <a:prstDash val="solid"/>
+                      <a:round/>
+                      <a:headEnd type="none" w="med" len="med"/>
+                      <a:tailEnd type="none" w="med" len="med"/>
+                    </a:lnT>
+                    <a:lnB w="12700" cap="flat" cmpd="sng" algn="ctr">
+                      <a:solidFill>
+                        <a:srgbClr val="FFFFFF"/>
+                      </a:solidFill>
+                      <a:prstDash val="solid"/>
+                      <a:round/>
+                      <a:headEnd type="none" w="med" len="med"/>
+                      <a:tailEnd type="none" w="med" len="med"/>
+                    </a:lnB>
+                    <a:solidFill>
+                      <a:srgbClr val="F3F3F4"/>
+                    </a:solidFill>
+                  </a:tcPr>
+                </a:tc>
+              </a:tr>
+            </a:tbl>
+          </a:graphicData>
+        </a:graphic>
+      </p:graphicFrame>
+      <p:sp>
+        <p:nvSpPr>
+          <p:cNvPr id="25" name="Slide Number Placeholder 0"/>
+          <p:cNvSpPr>
+            <a:spLocks noGrp="1"/>
+          </p:cNvSpPr>
+          <p:nvPr>
+            <p:ph type="sldNum" sz="quarter" idx="4294967295"/>
+          </p:nvPr>
+        </p:nvSpPr>
+        <p:spPr>
+          <a:xfrm>
+            <a:off x="11247120" y="6355080"/>
+            <a:ext cx="457200" cy="274320"/>
+          </a:xfrm>
+          <a:prstGeom prst="rect">
+            <a:avLst/>
+          </a:prstGeom>
+          <a:extLst>
+            <a:ext uri="{C572A759-6A51-4108-AA02-DFA0A04FC94B}">
+              <ma14:wrappingTextBoxFlag xmlns:ma14="http://schemas.microsoft.com/office/mac/drawingml/2011/main" val="0"/>
+            </a:ext>
+          </a:extLst>
+        </p:spPr>
+        <p:txBody>
+          <a:bodyPr/>
+          <a:lstStyle>
+            <a:lvl1pPr>
+              <a:defRPr sz="1000">
+                <a:solidFill>
+                  <a:srgbClr val="6B7280"/>
+                </a:solidFill>
+              </a:defRPr>
+            </a:lvl1pPr>
+          </a:lstStyle>
+          <a:p>
+            <a:pPr algn="r"/>
+            <a:fld id="{F7021451-1387-4CA6-816F-3879F97B5CBC}" type="slidenum">
+              <a:rPr b="0" lang="en-US"/>
+              <a:t>6</a:t>
+            </a:fld>
+            <a:endParaRPr lang="en-US"/>
+          </a:p>
+        </p:txBody>
+      </p:sp>
+    </p:spTree>
+  </p:cSld>
+  <p:clrMapOvr>
+    <a:masterClrMapping/>
+  </p:clrMapOvr>
+</p:sld>
+</file>
+
+<file path=ppt/slides/slide7.xml><?xml version="1.0" encoding="utf-8"?>
+<p:sld xmlns:a="http://schemas.openxmlformats.org/drawingml/2006/main" xmlns:r="http://schemas.openxmlformats.org/officeDocument/2006/relationships" xmlns:p="http://schemas.openxmlformats.org/presentationml/2006/main">
+  <p:cSld name="Slide 7">
+    <p:spTree>
+      <p:nvGrpSpPr>
+        <p:cNvPr id="1" name=""/>
+        <p:cNvGrpSpPr/>
+        <p:nvPr/>
+      </p:nvGrpSpPr>
+      <p:grpSpPr>
+        <a:xfrm>
+          <a:off x="0" y="0"/>
+          <a:ext cx="0" cy="0"/>
+          <a:chOff x="0" y="0"/>
+          <a:chExt cx="0" cy="0"/>
+        </a:xfrm>
+      </p:grpSpPr>
+      <p:sp>
+        <p:nvSpPr>
+          <p:cNvPr id="2" name="Text 0"/>
+          <p:cNvSpPr/>
+          <p:nvPr>
+            <p:ph idx="100" type="title" hasCustomPrompt="1"/>
+          </p:nvPr>
+        </p:nvSpPr>
+        <p:spPr>
+          <a:xfrm>
+            <a:off x="548640" y="320040"/>
+            <a:ext cx="11064240" cy="685800"/>
+          </a:xfrm>
+          <a:prstGeom prst="rect">
+            <a:avLst/>
+          </a:prstGeom>
+          <a:noFill/>
+          <a:ln/>
+        </p:spPr>
+        <p:txBody>
+          <a:bodyPr wrap="square" lIns="0" tIns="0" rIns="0" bIns="0" rtlCol="0" anchor="ctr"/>
+          <a:lstStyle/>
+          <a:p>
+            <a:pPr algn="l" indent="0" marL="0">
+              <a:buNone/>
+            </a:pPr>
+            <a:r>
+              <a:rPr lang="en-US" sz="2800" b="1" dirty="0">
+                <a:solidFill>
+                  <a:schemeClr val="tx2"/>
+                </a:solidFill>
+              </a:rPr>
               <a:t>Motor neuron disease ranks #6 of 1,045 disease terms</a:t>
             </a:r>
             <a:endParaRPr lang="en-US" sz="2800" dirty="0"/>
@@ -14452,7 +19965,7 @@
             <a:pPr algn="r"/>
             <a:fld id="{F7021451-1387-4CA6-816F-3879F97B5CBC}" type="slidenum">
               <a:rPr b="0" lang="en-US"/>
-              <a:t>5</a:t>
+              <a:t>7</a:t>
             </a:fld>
             <a:endParaRPr lang="en-US"/>
           </a:p>
@@ -14466,9 +19979,9 @@
 </p:sld>
 </file>
 
-<file path=ppt/slides/slide6.xml><?xml version="1.0" encoding="utf-8"?>
+<file path=ppt/slides/slide8.xml><?xml version="1.0" encoding="utf-8"?>
 <p:sld xmlns:a="http://schemas.openxmlformats.org/drawingml/2006/main" xmlns:r="http://schemas.openxmlformats.org/officeDocument/2006/relationships" xmlns:p="http://schemas.openxmlformats.org/presentationml/2006/main">
-  <p:cSld name="Slide 6">
+  <p:cSld name="Slide 8">
     <p:spTree>
       <p:nvGrpSpPr>
         <p:cNvPr id="1" name=""/>
@@ -14652,7 +20165,7 @@
             <a:pPr algn="r"/>
             <a:fld id="{F7021451-1387-4CA6-816F-3879F97B5CBC}" type="slidenum">
               <a:rPr b="0" lang="en-US"/>
-              <a:t>6</a:t>
+              <a:t>8</a:t>
             </a:fld>
             <a:endParaRPr lang="en-US"/>
           </a:p>
